--- a/Web Designing Course/demo/Web_Designing_Demo_Class_Presentation.pptx
+++ b/Web Designing Course/demo/Web_Designing_Demo_Class_Presentation.pptx
@@ -2,19 +2,24 @@
 <file path=ppt/presentation.xml><?xml version="1.0" encoding="utf-8"?>
 <p:presentation xmlns:a="http://schemas.openxmlformats.org/drawingml/2006/main" xmlns:r="http://schemas.openxmlformats.org/officeDocument/2006/relationships" xmlns:p="http://schemas.openxmlformats.org/presentationml/2006/main" saveSubsetFonts="1" autoCompressPictures="0">
   <p:sldMasterIdLst>
-    <p:sldMasterId id="2147483648" r:id="rId1"/>
+    <p:sldMasterId id="2147483696" r:id="rId1"/>
   </p:sldMasterIdLst>
   <p:sldIdLst>
-    <p:sldId id="256" r:id="rId7"/>
-    <p:sldId id="257" r:id="rId8"/>
-    <p:sldId id="258" r:id="rId9"/>
-    <p:sldId id="259" r:id="rId10"/>
-    <p:sldId id="260" r:id="rId11"/>
-    <p:sldId id="261" r:id="rId12"/>
-    <p:sldId id="262" r:id="rId13"/>
-    <p:sldId id="263" r:id="rId14"/>
-    <p:sldId id="264" r:id="rId15"/>
-    <p:sldId id="265" r:id="rId16"/>
+    <p:sldId id="267" r:id="rId2"/>
+    <p:sldId id="268" r:id="rId3"/>
+    <p:sldId id="269" r:id="rId4"/>
+    <p:sldId id="270" r:id="rId5"/>
+    <p:sldId id="257" r:id="rId6"/>
+    <p:sldId id="258" r:id="rId7"/>
+    <p:sldId id="259" r:id="rId8"/>
+    <p:sldId id="260" r:id="rId9"/>
+    <p:sldId id="261" r:id="rId10"/>
+    <p:sldId id="271" r:id="rId11"/>
+    <p:sldId id="262" r:id="rId12"/>
+    <p:sldId id="263" r:id="rId13"/>
+    <p:sldId id="264" r:id="rId14"/>
+    <p:sldId id="265" r:id="rId15"/>
+    <p:sldId id="266" r:id="rId16"/>
   </p:sldIdLst>
   <p:sldSz cx="9144000" cy="6858000" type="screen4x3"/>
   <p:notesSz cx="6858000" cy="9144000"/>
@@ -113,6 +118,22 @@
       </a:defRPr>
     </a:lvl9pPr>
   </p:defaultTextStyle>
+  <p:extLst>
+    <p:ext uri="{EFAFB233-063F-42B5-8137-9DF3F51BA10A}">
+      <p15:sldGuideLst xmlns:p15="http://schemas.microsoft.com/office/powerpoint/2012/main">
+        <p15:guide id="1" orient="horz" pos="2160">
+          <p15:clr>
+            <a:srgbClr val="A4A3A4"/>
+          </p15:clr>
+        </p15:guide>
+        <p15:guide id="2" pos="2880">
+          <p15:clr>
+            <a:srgbClr val="A4A3A4"/>
+          </p15:clr>
+        </p15:guide>
+      </p15:sldGuideLst>
+    </p:ext>
+  </p:extLst>
 </p:presentation>
 </file>
 
@@ -145,19 +166,23 @@
         </p:nvSpPr>
         <p:spPr>
           <a:xfrm>
-            <a:off x="685800" y="2130425"/>
-            <a:ext cx="7772400" cy="1470025"/>
+            <a:off x="866442" y="1447801"/>
+            <a:ext cx="6620968" cy="3329581"/>
           </a:xfrm>
         </p:spPr>
         <p:txBody>
-          <a:bodyPr/>
-          <a:lstStyle/>
+          <a:bodyPr anchor="b"/>
+          <a:lstStyle>
+            <a:lvl1pPr>
+              <a:defRPr sz="7200"/>
+            </a:lvl1pPr>
+          </a:lstStyle>
           <a:p>
             <a:r>
               <a:rPr lang="en-US" smtClean="0"/>
               <a:t>Click to edit Master title style</a:t>
             </a:r>
-            <a:endParaRPr lang="en-US"/>
+            <a:endParaRPr lang="en-US" dirty="0"/>
           </a:p>
         </p:txBody>
       </p:sp>
@@ -173,19 +198,20 @@
         </p:nvSpPr>
         <p:spPr>
           <a:xfrm>
-            <a:off x="1371600" y="3886200"/>
-            <a:ext cx="6400800" cy="1752600"/>
+            <a:off x="866442" y="4777380"/>
+            <a:ext cx="6620968" cy="861420"/>
           </a:xfrm>
         </p:spPr>
         <p:txBody>
-          <a:bodyPr/>
+          <a:bodyPr anchor="t"/>
           <a:lstStyle>
-            <a:lvl1pPr marL="0" indent="0" algn="ctr">
-              <a:buNone/>
-              <a:defRPr>
+            <a:lvl1pPr marL="0" indent="0" algn="l">
+              <a:buNone/>
+              <a:defRPr cap="all">
                 <a:solidFill>
-                  <a:schemeClr val="tx1">
-                    <a:tint val="75000"/>
+                  <a:schemeClr val="bg2">
+                    <a:lumMod val="40000"/>
+                    <a:lumOff val="60000"/>
                   </a:schemeClr>
                 </a:solidFill>
               </a:defRPr>
@@ -276,7 +302,7 @@
               <a:rPr lang="en-US" smtClean="0"/>
               <a:t>Click to edit Master subtitle style</a:t>
             </a:r>
-            <a:endParaRPr lang="en-US"/>
+            <a:endParaRPr lang="en-US" dirty="0"/>
           </a:p>
         </p:txBody>
       </p:sp>
@@ -297,7 +323,7 @@
           <a:p>
             <a:fld id="{5BCAD085-E8A6-8845-BD4E-CB4CCA059FC4}" type="datetimeFigureOut">
               <a:rPr lang="en-US" smtClean="0"/>
-              <a:t>1/27/13</a:t>
+              <a:t>1/8/2026</a:t>
             </a:fld>
             <a:endParaRPr lang="en-US"/>
           </a:p>
@@ -348,7 +374,7 @@
     </p:spTree>
     <p:extLst>
       <p:ext uri="{BB962C8B-B14F-4D97-AF65-F5344CB8AC3E}">
-        <p14:creationId xmlns:p14="http://schemas.microsoft.com/office/powerpoint/2010/main" val="3168075583"/>
+        <p14:creationId xmlns:p14="http://schemas.microsoft.com/office/powerpoint/2010/main" val="333570376"/>
       </p:ext>
     </p:extLst>
   </p:cSld>
@@ -359,6 +385,2572 @@
 </file>
 
 <file path=ppt/slideLayouts/slideLayout10.xml><?xml version="1.0" encoding="utf-8"?>
+<p:sldLayout xmlns:a="http://schemas.openxmlformats.org/drawingml/2006/main" xmlns:r="http://schemas.openxmlformats.org/officeDocument/2006/relationships" xmlns:p="http://schemas.openxmlformats.org/presentationml/2006/main" preserve="1">
+  <p:cSld name="Panoramic Picture with Caption">
+    <p:spTree>
+      <p:nvGrpSpPr>
+        <p:cNvPr id="1" name=""/>
+        <p:cNvGrpSpPr/>
+        <p:nvPr/>
+      </p:nvGrpSpPr>
+      <p:grpSpPr>
+        <a:xfrm>
+          <a:off x="0" y="0"/>
+          <a:ext cx="0" cy="0"/>
+          <a:chOff x="0" y="0"/>
+          <a:chExt cx="0" cy="0"/>
+        </a:xfrm>
+      </p:grpSpPr>
+      <p:sp>
+        <p:nvSpPr>
+          <p:cNvPr id="2" name="Title 1"/>
+          <p:cNvSpPr>
+            <a:spLocks noGrp="1"/>
+          </p:cNvSpPr>
+          <p:nvPr>
+            <p:ph type="title"/>
+          </p:nvPr>
+        </p:nvSpPr>
+        <p:spPr>
+          <a:xfrm>
+            <a:off x="866443" y="4800587"/>
+            <a:ext cx="6620967" cy="566738"/>
+          </a:xfrm>
+        </p:spPr>
+        <p:txBody>
+          <a:bodyPr anchor="b">
+            <a:normAutofit/>
+          </a:bodyPr>
+          <a:lstStyle>
+            <a:lvl1pPr algn="l">
+              <a:defRPr sz="2400" b="0"/>
+            </a:lvl1pPr>
+          </a:lstStyle>
+          <a:p>
+            <a:r>
+              <a:rPr lang="en-US" smtClean="0"/>
+              <a:t>Click to edit Master title style</a:t>
+            </a:r>
+            <a:endParaRPr lang="en-US" dirty="0"/>
+          </a:p>
+        </p:txBody>
+      </p:sp>
+      <p:sp>
+        <p:nvSpPr>
+          <p:cNvPr id="3" name="Picture Placeholder 2"/>
+          <p:cNvSpPr>
+            <a:spLocks noGrp="1" noChangeAspect="1"/>
+          </p:cNvSpPr>
+          <p:nvPr>
+            <p:ph type="pic" idx="1"/>
+          </p:nvPr>
+        </p:nvSpPr>
+        <p:spPr>
+          <a:xfrm>
+            <a:off x="866442" y="685800"/>
+            <a:ext cx="6620968" cy="3640666"/>
+          </a:xfrm>
+          <a:prstGeom prst="roundRect">
+            <a:avLst>
+              <a:gd name="adj" fmla="val 1858"/>
+            </a:avLst>
+          </a:prstGeom>
+          <a:effectLst>
+            <a:outerShdw blurRad="50800" dist="50800" dir="5400000" algn="tl" rotWithShape="0">
+              <a:srgbClr val="000000">
+                <a:alpha val="43000"/>
+              </a:srgbClr>
+            </a:outerShdw>
+          </a:effectLst>
+        </p:spPr>
+        <p:txBody>
+          <a:bodyPr anchor="t">
+            <a:normAutofit/>
+          </a:bodyPr>
+          <a:lstStyle>
+            <a:lvl1pPr marL="0" indent="0" algn="ctr">
+              <a:buNone/>
+              <a:defRPr sz="1600"/>
+            </a:lvl1pPr>
+            <a:lvl2pPr marL="457200" indent="0">
+              <a:buNone/>
+              <a:defRPr sz="1600"/>
+            </a:lvl2pPr>
+            <a:lvl3pPr marL="914400" indent="0">
+              <a:buNone/>
+              <a:defRPr sz="1600"/>
+            </a:lvl3pPr>
+            <a:lvl4pPr marL="1371600" indent="0">
+              <a:buNone/>
+              <a:defRPr sz="1600"/>
+            </a:lvl4pPr>
+            <a:lvl5pPr marL="1828800" indent="0">
+              <a:buNone/>
+              <a:defRPr sz="1600"/>
+            </a:lvl5pPr>
+            <a:lvl6pPr marL="2286000" indent="0">
+              <a:buNone/>
+              <a:defRPr sz="1600"/>
+            </a:lvl6pPr>
+            <a:lvl7pPr marL="2743200" indent="0">
+              <a:buNone/>
+              <a:defRPr sz="1600"/>
+            </a:lvl7pPr>
+            <a:lvl8pPr marL="3200400" indent="0">
+              <a:buNone/>
+              <a:defRPr sz="1600"/>
+            </a:lvl8pPr>
+            <a:lvl9pPr marL="3657600" indent="0">
+              <a:buNone/>
+              <a:defRPr sz="1600"/>
+            </a:lvl9pPr>
+          </a:lstStyle>
+          <a:p>
+            <a:r>
+              <a:rPr lang="en-US" smtClean="0"/>
+              <a:t>Click icon to add picture</a:t>
+            </a:r>
+            <a:endParaRPr lang="en-US" dirty="0"/>
+          </a:p>
+        </p:txBody>
+      </p:sp>
+      <p:sp>
+        <p:nvSpPr>
+          <p:cNvPr id="4" name="Text Placeholder 3"/>
+          <p:cNvSpPr>
+            <a:spLocks noGrp="1"/>
+          </p:cNvSpPr>
+          <p:nvPr>
+            <p:ph type="body" sz="half" idx="2"/>
+          </p:nvPr>
+        </p:nvSpPr>
+        <p:spPr>
+          <a:xfrm>
+            <a:off x="866443" y="5367325"/>
+            <a:ext cx="6620966" cy="493712"/>
+          </a:xfrm>
+        </p:spPr>
+        <p:txBody>
+          <a:bodyPr>
+            <a:normAutofit/>
+          </a:bodyPr>
+          <a:lstStyle>
+            <a:lvl1pPr marL="0" indent="0">
+              <a:buNone/>
+              <a:defRPr sz="1200"/>
+            </a:lvl1pPr>
+            <a:lvl2pPr marL="457200" indent="0">
+              <a:buNone/>
+              <a:defRPr sz="1200"/>
+            </a:lvl2pPr>
+            <a:lvl3pPr marL="914400" indent="0">
+              <a:buNone/>
+              <a:defRPr sz="1000"/>
+            </a:lvl3pPr>
+            <a:lvl4pPr marL="1371600" indent="0">
+              <a:buNone/>
+              <a:defRPr sz="900"/>
+            </a:lvl4pPr>
+            <a:lvl5pPr marL="1828800" indent="0">
+              <a:buNone/>
+              <a:defRPr sz="900"/>
+            </a:lvl5pPr>
+            <a:lvl6pPr marL="2286000" indent="0">
+              <a:buNone/>
+              <a:defRPr sz="900"/>
+            </a:lvl6pPr>
+            <a:lvl7pPr marL="2743200" indent="0">
+              <a:buNone/>
+              <a:defRPr sz="900"/>
+            </a:lvl7pPr>
+            <a:lvl8pPr marL="3200400" indent="0">
+              <a:buNone/>
+              <a:defRPr sz="900"/>
+            </a:lvl8pPr>
+            <a:lvl9pPr marL="3657600" indent="0">
+              <a:buNone/>
+              <a:defRPr sz="900"/>
+            </a:lvl9pPr>
+          </a:lstStyle>
+          <a:p>
+            <a:pPr lvl="0"/>
+            <a:r>
+              <a:rPr lang="en-US" smtClean="0"/>
+              <a:t>Edit Master text styles</a:t>
+            </a:r>
+          </a:p>
+        </p:txBody>
+      </p:sp>
+      <p:sp>
+        <p:nvSpPr>
+          <p:cNvPr id="5" name="Date Placeholder 4"/>
+          <p:cNvSpPr>
+            <a:spLocks noGrp="1"/>
+          </p:cNvSpPr>
+          <p:nvPr>
+            <p:ph type="dt" sz="half" idx="10"/>
+          </p:nvPr>
+        </p:nvSpPr>
+        <p:spPr/>
+        <p:txBody>
+          <a:bodyPr/>
+          <a:lstStyle/>
+          <a:p>
+            <a:fld id="{5BCAD085-E8A6-8845-BD4E-CB4CCA059FC4}" type="datetimeFigureOut">
+              <a:rPr lang="en-US" smtClean="0"/>
+              <a:t>1/8/2026</a:t>
+            </a:fld>
+            <a:endParaRPr lang="en-US"/>
+          </a:p>
+        </p:txBody>
+      </p:sp>
+      <p:sp>
+        <p:nvSpPr>
+          <p:cNvPr id="6" name="Footer Placeholder 5"/>
+          <p:cNvSpPr>
+            <a:spLocks noGrp="1"/>
+          </p:cNvSpPr>
+          <p:nvPr>
+            <p:ph type="ftr" sz="quarter" idx="11"/>
+          </p:nvPr>
+        </p:nvSpPr>
+        <p:spPr/>
+        <p:txBody>
+          <a:bodyPr/>
+          <a:lstStyle/>
+          <a:p>
+            <a:endParaRPr lang="en-US"/>
+          </a:p>
+        </p:txBody>
+      </p:sp>
+      <p:sp>
+        <p:nvSpPr>
+          <p:cNvPr id="7" name="Slide Number Placeholder 6"/>
+          <p:cNvSpPr>
+            <a:spLocks noGrp="1"/>
+          </p:cNvSpPr>
+          <p:nvPr>
+            <p:ph type="sldNum" sz="quarter" idx="12"/>
+          </p:nvPr>
+        </p:nvSpPr>
+        <p:spPr/>
+        <p:txBody>
+          <a:bodyPr/>
+          <a:lstStyle/>
+          <a:p>
+            <a:fld id="{C1FF6DA9-008F-8B48-92A6-B652298478BF}" type="slidenum">
+              <a:rPr lang="en-US" smtClean="0"/>
+              <a:t>‹#›</a:t>
+            </a:fld>
+            <a:endParaRPr lang="en-US"/>
+          </a:p>
+        </p:txBody>
+      </p:sp>
+    </p:spTree>
+    <p:extLst>
+      <p:ext uri="{BB962C8B-B14F-4D97-AF65-F5344CB8AC3E}">
+        <p14:creationId xmlns:p14="http://schemas.microsoft.com/office/powerpoint/2010/main" val="1188065574"/>
+      </p:ext>
+    </p:extLst>
+  </p:cSld>
+  <p:clrMapOvr>
+    <a:masterClrMapping/>
+  </p:clrMapOvr>
+</p:sldLayout>
+</file>
+
+<file path=ppt/slideLayouts/slideLayout11.xml><?xml version="1.0" encoding="utf-8"?>
+<p:sldLayout xmlns:a="http://schemas.openxmlformats.org/drawingml/2006/main" xmlns:r="http://schemas.openxmlformats.org/officeDocument/2006/relationships" xmlns:p="http://schemas.openxmlformats.org/presentationml/2006/main" preserve="1">
+  <p:cSld name="Title and Caption">
+    <p:spTree>
+      <p:nvGrpSpPr>
+        <p:cNvPr id="1" name=""/>
+        <p:cNvGrpSpPr/>
+        <p:nvPr/>
+      </p:nvGrpSpPr>
+      <p:grpSpPr>
+        <a:xfrm>
+          <a:off x="0" y="0"/>
+          <a:ext cx="0" cy="0"/>
+          <a:chOff x="0" y="0"/>
+          <a:chExt cx="0" cy="0"/>
+        </a:xfrm>
+      </p:grpSpPr>
+      <p:sp>
+        <p:nvSpPr>
+          <p:cNvPr id="2" name="Title 1"/>
+          <p:cNvSpPr>
+            <a:spLocks noGrp="1"/>
+          </p:cNvSpPr>
+          <p:nvPr>
+            <p:ph type="title"/>
+          </p:nvPr>
+        </p:nvSpPr>
+        <p:spPr>
+          <a:xfrm>
+            <a:off x="866442" y="1447800"/>
+            <a:ext cx="6620968" cy="1981200"/>
+          </a:xfrm>
+        </p:spPr>
+        <p:txBody>
+          <a:bodyPr/>
+          <a:lstStyle>
+            <a:lvl1pPr>
+              <a:defRPr sz="4800"/>
+            </a:lvl1pPr>
+          </a:lstStyle>
+          <a:p>
+            <a:r>
+              <a:rPr lang="en-US" smtClean="0"/>
+              <a:t>Click to edit Master title style</a:t>
+            </a:r>
+            <a:endParaRPr lang="en-US" dirty="0"/>
+          </a:p>
+        </p:txBody>
+      </p:sp>
+      <p:sp>
+        <p:nvSpPr>
+          <p:cNvPr id="8" name="Text Placeholder 3"/>
+          <p:cNvSpPr>
+            <a:spLocks noGrp="1"/>
+          </p:cNvSpPr>
+          <p:nvPr>
+            <p:ph type="body" sz="half" idx="2"/>
+          </p:nvPr>
+        </p:nvSpPr>
+        <p:spPr>
+          <a:xfrm>
+            <a:off x="866442" y="3657600"/>
+            <a:ext cx="6620968" cy="2362200"/>
+          </a:xfrm>
+        </p:spPr>
+        <p:txBody>
+          <a:bodyPr anchor="ctr">
+            <a:normAutofit/>
+          </a:bodyPr>
+          <a:lstStyle>
+            <a:lvl1pPr marL="0" indent="0">
+              <a:buNone/>
+              <a:defRPr sz="1800"/>
+            </a:lvl1pPr>
+            <a:lvl2pPr marL="457200" indent="0">
+              <a:buNone/>
+              <a:defRPr sz="1200"/>
+            </a:lvl2pPr>
+            <a:lvl3pPr marL="914400" indent="0">
+              <a:buNone/>
+              <a:defRPr sz="1000"/>
+            </a:lvl3pPr>
+            <a:lvl4pPr marL="1371600" indent="0">
+              <a:buNone/>
+              <a:defRPr sz="900"/>
+            </a:lvl4pPr>
+            <a:lvl5pPr marL="1828800" indent="0">
+              <a:buNone/>
+              <a:defRPr sz="900"/>
+            </a:lvl5pPr>
+            <a:lvl6pPr marL="2286000" indent="0">
+              <a:buNone/>
+              <a:defRPr sz="900"/>
+            </a:lvl6pPr>
+            <a:lvl7pPr marL="2743200" indent="0">
+              <a:buNone/>
+              <a:defRPr sz="900"/>
+            </a:lvl7pPr>
+            <a:lvl8pPr marL="3200400" indent="0">
+              <a:buNone/>
+              <a:defRPr sz="900"/>
+            </a:lvl8pPr>
+            <a:lvl9pPr marL="3657600" indent="0">
+              <a:buNone/>
+              <a:defRPr sz="900"/>
+            </a:lvl9pPr>
+          </a:lstStyle>
+          <a:p>
+            <a:pPr lvl="0"/>
+            <a:r>
+              <a:rPr lang="en-US" smtClean="0"/>
+              <a:t>Edit Master text styles</a:t>
+            </a:r>
+          </a:p>
+        </p:txBody>
+      </p:sp>
+      <p:sp>
+        <p:nvSpPr>
+          <p:cNvPr id="4" name="Date Placeholder 3"/>
+          <p:cNvSpPr>
+            <a:spLocks noGrp="1"/>
+          </p:cNvSpPr>
+          <p:nvPr>
+            <p:ph type="dt" sz="half" idx="10"/>
+          </p:nvPr>
+        </p:nvSpPr>
+        <p:spPr/>
+        <p:txBody>
+          <a:bodyPr/>
+          <a:lstStyle/>
+          <a:p>
+            <a:fld id="{5BCAD085-E8A6-8845-BD4E-CB4CCA059FC4}" type="datetimeFigureOut">
+              <a:rPr lang="en-US" smtClean="0"/>
+              <a:t>1/8/2026</a:t>
+            </a:fld>
+            <a:endParaRPr lang="en-US"/>
+          </a:p>
+        </p:txBody>
+      </p:sp>
+      <p:sp>
+        <p:nvSpPr>
+          <p:cNvPr id="5" name="Footer Placeholder 4"/>
+          <p:cNvSpPr>
+            <a:spLocks noGrp="1"/>
+          </p:cNvSpPr>
+          <p:nvPr>
+            <p:ph type="ftr" sz="quarter" idx="11"/>
+          </p:nvPr>
+        </p:nvSpPr>
+        <p:spPr/>
+        <p:txBody>
+          <a:bodyPr/>
+          <a:lstStyle/>
+          <a:p>
+            <a:endParaRPr lang="en-US"/>
+          </a:p>
+        </p:txBody>
+      </p:sp>
+      <p:sp>
+        <p:nvSpPr>
+          <p:cNvPr id="6" name="Slide Number Placeholder 5"/>
+          <p:cNvSpPr>
+            <a:spLocks noGrp="1"/>
+          </p:cNvSpPr>
+          <p:nvPr>
+            <p:ph type="sldNum" sz="quarter" idx="12"/>
+          </p:nvPr>
+        </p:nvSpPr>
+        <p:spPr/>
+        <p:txBody>
+          <a:bodyPr/>
+          <a:lstStyle/>
+          <a:p>
+            <a:fld id="{C1FF6DA9-008F-8B48-92A6-B652298478BF}" type="slidenum">
+              <a:rPr lang="en-US" smtClean="0"/>
+              <a:t>‹#›</a:t>
+            </a:fld>
+            <a:endParaRPr lang="en-US"/>
+          </a:p>
+        </p:txBody>
+      </p:sp>
+    </p:spTree>
+    <p:extLst>
+      <p:ext uri="{BB962C8B-B14F-4D97-AF65-F5344CB8AC3E}">
+        <p14:creationId xmlns:p14="http://schemas.microsoft.com/office/powerpoint/2010/main" val="3605408514"/>
+      </p:ext>
+    </p:extLst>
+  </p:cSld>
+  <p:clrMapOvr>
+    <a:masterClrMapping/>
+  </p:clrMapOvr>
+</p:sldLayout>
+</file>
+
+<file path=ppt/slideLayouts/slideLayout12.xml><?xml version="1.0" encoding="utf-8"?>
+<p:sldLayout xmlns:a="http://schemas.openxmlformats.org/drawingml/2006/main" xmlns:r="http://schemas.openxmlformats.org/officeDocument/2006/relationships" xmlns:p="http://schemas.openxmlformats.org/presentationml/2006/main" preserve="1">
+  <p:cSld name="Quote with Caption">
+    <p:spTree>
+      <p:nvGrpSpPr>
+        <p:cNvPr id="1" name=""/>
+        <p:cNvGrpSpPr/>
+        <p:nvPr/>
+      </p:nvGrpSpPr>
+      <p:grpSpPr>
+        <a:xfrm>
+          <a:off x="0" y="0"/>
+          <a:ext cx="0" cy="0"/>
+          <a:chOff x="0" y="0"/>
+          <a:chExt cx="0" cy="0"/>
+        </a:xfrm>
+      </p:grpSpPr>
+      <p:sp>
+        <p:nvSpPr>
+          <p:cNvPr id="2" name="Title 1"/>
+          <p:cNvSpPr>
+            <a:spLocks noGrp="1"/>
+          </p:cNvSpPr>
+          <p:nvPr>
+            <p:ph type="title"/>
+          </p:nvPr>
+        </p:nvSpPr>
+        <p:spPr>
+          <a:xfrm>
+            <a:off x="1181409" y="1447800"/>
+            <a:ext cx="6001049" cy="2323374"/>
+          </a:xfrm>
+        </p:spPr>
+        <p:txBody>
+          <a:bodyPr/>
+          <a:lstStyle>
+            <a:lvl1pPr>
+              <a:defRPr sz="4800"/>
+            </a:lvl1pPr>
+          </a:lstStyle>
+          <a:p>
+            <a:r>
+              <a:rPr lang="en-US" smtClean="0"/>
+              <a:t>Click to edit Master title style</a:t>
+            </a:r>
+            <a:endParaRPr lang="en-US" dirty="0"/>
+          </a:p>
+        </p:txBody>
+      </p:sp>
+      <p:sp>
+        <p:nvSpPr>
+          <p:cNvPr id="11" name="Text Placeholder 3"/>
+          <p:cNvSpPr>
+            <a:spLocks noGrp="1"/>
+          </p:cNvSpPr>
+          <p:nvPr>
+            <p:ph type="body" sz="half" idx="14"/>
+          </p:nvPr>
+        </p:nvSpPr>
+        <p:spPr>
+          <a:xfrm>
+            <a:off x="1448177" y="3771174"/>
+            <a:ext cx="5461159" cy="342174"/>
+          </a:xfrm>
+        </p:spPr>
+        <p:txBody>
+          <a:bodyPr vert="horz" lIns="91440" tIns="45720" rIns="91440" bIns="45720" rtlCol="0" anchor="t">
+            <a:normAutofit/>
+          </a:bodyPr>
+          <a:lstStyle>
+            <a:lvl1pPr marL="0" indent="0">
+              <a:buNone/>
+              <a:defRPr lang="en-US" sz="1400" b="0" i="0" kern="1200" cap="small" dirty="0">
+                <a:solidFill>
+                  <a:schemeClr val="bg2">
+                    <a:lumMod val="40000"/>
+                    <a:lumOff val="60000"/>
+                  </a:schemeClr>
+                </a:solidFill>
+                <a:latin typeface="+mj-lt"/>
+                <a:ea typeface="+mj-ea"/>
+                <a:cs typeface="+mj-cs"/>
+              </a:defRPr>
+            </a:lvl1pPr>
+            <a:lvl2pPr marL="457200" indent="0">
+              <a:buNone/>
+              <a:defRPr sz="1200"/>
+            </a:lvl2pPr>
+            <a:lvl3pPr marL="914400" indent="0">
+              <a:buNone/>
+              <a:defRPr sz="1000"/>
+            </a:lvl3pPr>
+            <a:lvl4pPr marL="1371600" indent="0">
+              <a:buNone/>
+              <a:defRPr sz="900"/>
+            </a:lvl4pPr>
+            <a:lvl5pPr marL="1828800" indent="0">
+              <a:buNone/>
+              <a:defRPr sz="900"/>
+            </a:lvl5pPr>
+            <a:lvl6pPr marL="2286000" indent="0">
+              <a:buNone/>
+              <a:defRPr sz="900"/>
+            </a:lvl6pPr>
+            <a:lvl7pPr marL="2743200" indent="0">
+              <a:buNone/>
+              <a:defRPr sz="900"/>
+            </a:lvl7pPr>
+            <a:lvl8pPr marL="3200400" indent="0">
+              <a:buNone/>
+              <a:defRPr sz="900"/>
+            </a:lvl8pPr>
+            <a:lvl9pPr marL="3657600" indent="0">
+              <a:buNone/>
+              <a:defRPr sz="900"/>
+            </a:lvl9pPr>
+          </a:lstStyle>
+          <a:p>
+            <a:pPr marL="0" lvl="0" indent="0">
+              <a:buNone/>
+            </a:pPr>
+            <a:r>
+              <a:rPr lang="en-US" smtClean="0"/>
+              <a:t>Edit Master text styles</a:t>
+            </a:r>
+          </a:p>
+        </p:txBody>
+      </p:sp>
+      <p:sp>
+        <p:nvSpPr>
+          <p:cNvPr id="10" name="Text Placeholder 3"/>
+          <p:cNvSpPr>
+            <a:spLocks noGrp="1"/>
+          </p:cNvSpPr>
+          <p:nvPr>
+            <p:ph type="body" sz="half" idx="2"/>
+          </p:nvPr>
+        </p:nvSpPr>
+        <p:spPr>
+          <a:xfrm>
+            <a:off x="866442" y="4350657"/>
+            <a:ext cx="6620968" cy="1676400"/>
+          </a:xfrm>
+        </p:spPr>
+        <p:txBody>
+          <a:bodyPr anchor="ctr">
+            <a:normAutofit/>
+          </a:bodyPr>
+          <a:lstStyle>
+            <a:lvl1pPr marL="0" indent="0">
+              <a:buNone/>
+              <a:defRPr sz="1800"/>
+            </a:lvl1pPr>
+            <a:lvl2pPr marL="457200" indent="0">
+              <a:buNone/>
+              <a:defRPr sz="1200"/>
+            </a:lvl2pPr>
+            <a:lvl3pPr marL="914400" indent="0">
+              <a:buNone/>
+              <a:defRPr sz="1000"/>
+            </a:lvl3pPr>
+            <a:lvl4pPr marL="1371600" indent="0">
+              <a:buNone/>
+              <a:defRPr sz="900"/>
+            </a:lvl4pPr>
+            <a:lvl5pPr marL="1828800" indent="0">
+              <a:buNone/>
+              <a:defRPr sz="900"/>
+            </a:lvl5pPr>
+            <a:lvl6pPr marL="2286000" indent="0">
+              <a:buNone/>
+              <a:defRPr sz="900"/>
+            </a:lvl6pPr>
+            <a:lvl7pPr marL="2743200" indent="0">
+              <a:buNone/>
+              <a:defRPr sz="900"/>
+            </a:lvl7pPr>
+            <a:lvl8pPr marL="3200400" indent="0">
+              <a:buNone/>
+              <a:defRPr sz="900"/>
+            </a:lvl8pPr>
+            <a:lvl9pPr marL="3657600" indent="0">
+              <a:buNone/>
+              <a:defRPr sz="900"/>
+            </a:lvl9pPr>
+          </a:lstStyle>
+          <a:p>
+            <a:pPr lvl="0"/>
+            <a:r>
+              <a:rPr lang="en-US" smtClean="0"/>
+              <a:t>Edit Master text styles</a:t>
+            </a:r>
+          </a:p>
+        </p:txBody>
+      </p:sp>
+      <p:sp>
+        <p:nvSpPr>
+          <p:cNvPr id="4" name="Date Placeholder 3"/>
+          <p:cNvSpPr>
+            <a:spLocks noGrp="1"/>
+          </p:cNvSpPr>
+          <p:nvPr>
+            <p:ph type="dt" sz="half" idx="10"/>
+          </p:nvPr>
+        </p:nvSpPr>
+        <p:spPr/>
+        <p:txBody>
+          <a:bodyPr/>
+          <a:lstStyle/>
+          <a:p>
+            <a:fld id="{5BCAD085-E8A6-8845-BD4E-CB4CCA059FC4}" type="datetimeFigureOut">
+              <a:rPr lang="en-US" smtClean="0"/>
+              <a:t>1/8/2026</a:t>
+            </a:fld>
+            <a:endParaRPr lang="en-US"/>
+          </a:p>
+        </p:txBody>
+      </p:sp>
+      <p:sp>
+        <p:nvSpPr>
+          <p:cNvPr id="5" name="Footer Placeholder 4"/>
+          <p:cNvSpPr>
+            <a:spLocks noGrp="1"/>
+          </p:cNvSpPr>
+          <p:nvPr>
+            <p:ph type="ftr" sz="quarter" idx="11"/>
+          </p:nvPr>
+        </p:nvSpPr>
+        <p:spPr/>
+        <p:txBody>
+          <a:bodyPr/>
+          <a:lstStyle/>
+          <a:p>
+            <a:endParaRPr lang="en-US"/>
+          </a:p>
+        </p:txBody>
+      </p:sp>
+      <p:sp>
+        <p:nvSpPr>
+          <p:cNvPr id="6" name="Slide Number Placeholder 5"/>
+          <p:cNvSpPr>
+            <a:spLocks noGrp="1"/>
+          </p:cNvSpPr>
+          <p:nvPr>
+            <p:ph type="sldNum" sz="quarter" idx="12"/>
+          </p:nvPr>
+        </p:nvSpPr>
+        <p:spPr/>
+        <p:txBody>
+          <a:bodyPr/>
+          <a:lstStyle/>
+          <a:p>
+            <a:fld id="{C1FF6DA9-008F-8B48-92A6-B652298478BF}" type="slidenum">
+              <a:rPr lang="en-US" smtClean="0"/>
+              <a:t>‹#›</a:t>
+            </a:fld>
+            <a:endParaRPr lang="en-US"/>
+          </a:p>
+        </p:txBody>
+      </p:sp>
+      <p:sp>
+        <p:nvSpPr>
+          <p:cNvPr id="12" name="TextBox 11"/>
+          <p:cNvSpPr txBox="1"/>
+          <p:nvPr/>
+        </p:nvSpPr>
+        <p:spPr>
+          <a:xfrm>
+            <a:off x="673897" y="971253"/>
+            <a:ext cx="601591" cy="1969770"/>
+          </a:xfrm>
+          <a:prstGeom prst="rect">
+            <a:avLst/>
+          </a:prstGeom>
+          <a:noFill/>
+        </p:spPr>
+        <p:txBody>
+          <a:bodyPr wrap="square" rtlCol="0">
+            <a:spAutoFit/>
+          </a:bodyPr>
+          <a:lstStyle>
+            <a:defPPr>
+              <a:defRPr lang="en-US"/>
+            </a:defPPr>
+            <a:lvl1pPr algn="r">
+              <a:defRPr sz="12200" b="0" i="0">
+                <a:solidFill>
+                  <a:schemeClr val="bg2">
+                    <a:lumMod val="40000"/>
+                    <a:lumOff val="60000"/>
+                  </a:schemeClr>
+                </a:solidFill>
+                <a:latin typeface="Arial"/>
+                <a:ea typeface="+mj-ea"/>
+                <a:cs typeface="+mj-cs"/>
+              </a:defRPr>
+            </a:lvl1pPr>
+          </a:lstStyle>
+          <a:p>
+            <a:pPr lvl="0"/>
+            <a:r>
+              <a:rPr lang="en-US" sz="12200" dirty="0"/>
+              <a:t>“</a:t>
+            </a:r>
+          </a:p>
+        </p:txBody>
+      </p:sp>
+      <p:sp>
+        <p:nvSpPr>
+          <p:cNvPr id="15" name="TextBox 14"/>
+          <p:cNvSpPr txBox="1"/>
+          <p:nvPr/>
+        </p:nvSpPr>
+        <p:spPr>
+          <a:xfrm>
+            <a:off x="6999690" y="2613787"/>
+            <a:ext cx="601591" cy="1969770"/>
+          </a:xfrm>
+          <a:prstGeom prst="rect">
+            <a:avLst/>
+          </a:prstGeom>
+          <a:noFill/>
+        </p:spPr>
+        <p:txBody>
+          <a:bodyPr wrap="square" rtlCol="0">
+            <a:spAutoFit/>
+          </a:bodyPr>
+          <a:lstStyle>
+            <a:defPPr>
+              <a:defRPr lang="en-US"/>
+            </a:defPPr>
+            <a:lvl1pPr algn="r">
+              <a:defRPr sz="12200" b="0" i="0">
+                <a:solidFill>
+                  <a:schemeClr val="bg2">
+                    <a:lumMod val="40000"/>
+                    <a:lumOff val="60000"/>
+                  </a:schemeClr>
+                </a:solidFill>
+                <a:latin typeface="Arial"/>
+                <a:ea typeface="+mj-ea"/>
+                <a:cs typeface="+mj-cs"/>
+              </a:defRPr>
+            </a:lvl1pPr>
+          </a:lstStyle>
+          <a:p>
+            <a:pPr lvl="0"/>
+            <a:r>
+              <a:rPr lang="en-US" sz="12200" dirty="0"/>
+              <a:t>”</a:t>
+            </a:r>
+          </a:p>
+        </p:txBody>
+      </p:sp>
+    </p:spTree>
+    <p:extLst>
+      <p:ext uri="{BB962C8B-B14F-4D97-AF65-F5344CB8AC3E}">
+        <p14:creationId xmlns:p14="http://schemas.microsoft.com/office/powerpoint/2010/main" val="729590842"/>
+      </p:ext>
+    </p:extLst>
+  </p:cSld>
+  <p:clrMapOvr>
+    <a:masterClrMapping/>
+  </p:clrMapOvr>
+</p:sldLayout>
+</file>
+
+<file path=ppt/slideLayouts/slideLayout13.xml><?xml version="1.0" encoding="utf-8"?>
+<p:sldLayout xmlns:a="http://schemas.openxmlformats.org/drawingml/2006/main" xmlns:r="http://schemas.openxmlformats.org/officeDocument/2006/relationships" xmlns:p="http://schemas.openxmlformats.org/presentationml/2006/main" preserve="1">
+  <p:cSld name="Name Card">
+    <p:spTree>
+      <p:nvGrpSpPr>
+        <p:cNvPr id="1" name=""/>
+        <p:cNvGrpSpPr/>
+        <p:nvPr/>
+      </p:nvGrpSpPr>
+      <p:grpSpPr>
+        <a:xfrm>
+          <a:off x="0" y="0"/>
+          <a:ext cx="0" cy="0"/>
+          <a:chOff x="0" y="0"/>
+          <a:chExt cx="0" cy="0"/>
+        </a:xfrm>
+      </p:grpSpPr>
+      <p:sp>
+        <p:nvSpPr>
+          <p:cNvPr id="2" name="Title 1"/>
+          <p:cNvSpPr>
+            <a:spLocks noGrp="1"/>
+          </p:cNvSpPr>
+          <p:nvPr>
+            <p:ph type="title"/>
+          </p:nvPr>
+        </p:nvSpPr>
+        <p:spPr>
+          <a:xfrm>
+            <a:off x="866441" y="3124201"/>
+            <a:ext cx="6620969" cy="1653180"/>
+          </a:xfrm>
+        </p:spPr>
+        <p:txBody>
+          <a:bodyPr anchor="b"/>
+          <a:lstStyle>
+            <a:lvl1pPr algn="l">
+              <a:defRPr sz="4000" b="0" cap="none"/>
+            </a:lvl1pPr>
+          </a:lstStyle>
+          <a:p>
+            <a:r>
+              <a:rPr lang="en-US" smtClean="0"/>
+              <a:t>Click to edit Master title style</a:t>
+            </a:r>
+            <a:endParaRPr lang="en-US" dirty="0"/>
+          </a:p>
+        </p:txBody>
+      </p:sp>
+      <p:sp>
+        <p:nvSpPr>
+          <p:cNvPr id="3" name="Text Placeholder 2"/>
+          <p:cNvSpPr>
+            <a:spLocks noGrp="1"/>
+          </p:cNvSpPr>
+          <p:nvPr>
+            <p:ph type="body" idx="1"/>
+          </p:nvPr>
+        </p:nvSpPr>
+        <p:spPr>
+          <a:xfrm>
+            <a:off x="866442" y="4777381"/>
+            <a:ext cx="6620968" cy="860400"/>
+          </a:xfrm>
+        </p:spPr>
+        <p:txBody>
+          <a:bodyPr anchor="t"/>
+          <a:lstStyle>
+            <a:lvl1pPr marL="0" indent="0" algn="l">
+              <a:buNone/>
+              <a:defRPr sz="2000" cap="none">
+                <a:solidFill>
+                  <a:schemeClr val="bg2">
+                    <a:lumMod val="40000"/>
+                    <a:lumOff val="60000"/>
+                  </a:schemeClr>
+                </a:solidFill>
+              </a:defRPr>
+            </a:lvl1pPr>
+            <a:lvl2pPr marL="457200" indent="0">
+              <a:buNone/>
+              <a:defRPr sz="1800">
+                <a:solidFill>
+                  <a:schemeClr val="tx1">
+                    <a:tint val="75000"/>
+                  </a:schemeClr>
+                </a:solidFill>
+              </a:defRPr>
+            </a:lvl2pPr>
+            <a:lvl3pPr marL="914400" indent="0">
+              <a:buNone/>
+              <a:defRPr sz="1600">
+                <a:solidFill>
+                  <a:schemeClr val="tx1">
+                    <a:tint val="75000"/>
+                  </a:schemeClr>
+                </a:solidFill>
+              </a:defRPr>
+            </a:lvl3pPr>
+            <a:lvl4pPr marL="1371600" indent="0">
+              <a:buNone/>
+              <a:defRPr sz="1400">
+                <a:solidFill>
+                  <a:schemeClr val="tx1">
+                    <a:tint val="75000"/>
+                  </a:schemeClr>
+                </a:solidFill>
+              </a:defRPr>
+            </a:lvl4pPr>
+            <a:lvl5pPr marL="1828800" indent="0">
+              <a:buNone/>
+              <a:defRPr sz="1400">
+                <a:solidFill>
+                  <a:schemeClr val="tx1">
+                    <a:tint val="75000"/>
+                  </a:schemeClr>
+                </a:solidFill>
+              </a:defRPr>
+            </a:lvl5pPr>
+            <a:lvl6pPr marL="2286000" indent="0">
+              <a:buNone/>
+              <a:defRPr sz="1400">
+                <a:solidFill>
+                  <a:schemeClr val="tx1">
+                    <a:tint val="75000"/>
+                  </a:schemeClr>
+                </a:solidFill>
+              </a:defRPr>
+            </a:lvl6pPr>
+            <a:lvl7pPr marL="2743200" indent="0">
+              <a:buNone/>
+              <a:defRPr sz="1400">
+                <a:solidFill>
+                  <a:schemeClr val="tx1">
+                    <a:tint val="75000"/>
+                  </a:schemeClr>
+                </a:solidFill>
+              </a:defRPr>
+            </a:lvl7pPr>
+            <a:lvl8pPr marL="3200400" indent="0">
+              <a:buNone/>
+              <a:defRPr sz="1400">
+                <a:solidFill>
+                  <a:schemeClr val="tx1">
+                    <a:tint val="75000"/>
+                  </a:schemeClr>
+                </a:solidFill>
+              </a:defRPr>
+            </a:lvl8pPr>
+            <a:lvl9pPr marL="3657600" indent="0">
+              <a:buNone/>
+              <a:defRPr sz="1400">
+                <a:solidFill>
+                  <a:schemeClr val="tx1">
+                    <a:tint val="75000"/>
+                  </a:schemeClr>
+                </a:solidFill>
+              </a:defRPr>
+            </a:lvl9pPr>
+          </a:lstStyle>
+          <a:p>
+            <a:pPr lvl="0"/>
+            <a:r>
+              <a:rPr lang="en-US" smtClean="0"/>
+              <a:t>Edit Master text styles</a:t>
+            </a:r>
+          </a:p>
+        </p:txBody>
+      </p:sp>
+      <p:sp>
+        <p:nvSpPr>
+          <p:cNvPr id="4" name="Date Placeholder 3"/>
+          <p:cNvSpPr>
+            <a:spLocks noGrp="1"/>
+          </p:cNvSpPr>
+          <p:nvPr>
+            <p:ph type="dt" sz="half" idx="10"/>
+          </p:nvPr>
+        </p:nvSpPr>
+        <p:spPr/>
+        <p:txBody>
+          <a:bodyPr/>
+          <a:lstStyle/>
+          <a:p>
+            <a:fld id="{5BCAD085-E8A6-8845-BD4E-CB4CCA059FC4}" type="datetimeFigureOut">
+              <a:rPr lang="en-US" smtClean="0"/>
+              <a:t>1/8/2026</a:t>
+            </a:fld>
+            <a:endParaRPr lang="en-US"/>
+          </a:p>
+        </p:txBody>
+      </p:sp>
+      <p:sp>
+        <p:nvSpPr>
+          <p:cNvPr id="5" name="Footer Placeholder 4"/>
+          <p:cNvSpPr>
+            <a:spLocks noGrp="1"/>
+          </p:cNvSpPr>
+          <p:nvPr>
+            <p:ph type="ftr" sz="quarter" idx="11"/>
+          </p:nvPr>
+        </p:nvSpPr>
+        <p:spPr/>
+        <p:txBody>
+          <a:bodyPr/>
+          <a:lstStyle/>
+          <a:p>
+            <a:endParaRPr lang="en-US"/>
+          </a:p>
+        </p:txBody>
+      </p:sp>
+      <p:sp>
+        <p:nvSpPr>
+          <p:cNvPr id="6" name="Slide Number Placeholder 5"/>
+          <p:cNvSpPr>
+            <a:spLocks noGrp="1"/>
+          </p:cNvSpPr>
+          <p:nvPr>
+            <p:ph type="sldNum" sz="quarter" idx="12"/>
+          </p:nvPr>
+        </p:nvSpPr>
+        <p:spPr/>
+        <p:txBody>
+          <a:bodyPr/>
+          <a:lstStyle/>
+          <a:p>
+            <a:fld id="{C1FF6DA9-008F-8B48-92A6-B652298478BF}" type="slidenum">
+              <a:rPr lang="en-US" smtClean="0"/>
+              <a:t>‹#›</a:t>
+            </a:fld>
+            <a:endParaRPr lang="en-US"/>
+          </a:p>
+        </p:txBody>
+      </p:sp>
+    </p:spTree>
+    <p:extLst>
+      <p:ext uri="{BB962C8B-B14F-4D97-AF65-F5344CB8AC3E}">
+        <p14:creationId xmlns:p14="http://schemas.microsoft.com/office/powerpoint/2010/main" val="2046480766"/>
+      </p:ext>
+    </p:extLst>
+  </p:cSld>
+  <p:clrMapOvr>
+    <a:masterClrMapping/>
+  </p:clrMapOvr>
+</p:sldLayout>
+</file>
+
+<file path=ppt/slideLayouts/slideLayout14.xml><?xml version="1.0" encoding="utf-8"?>
+<p:sldLayout xmlns:a="http://schemas.openxmlformats.org/drawingml/2006/main" xmlns:r="http://schemas.openxmlformats.org/officeDocument/2006/relationships" xmlns:p="http://schemas.openxmlformats.org/presentationml/2006/main" preserve="1">
+  <p:cSld name="3 Column">
+    <p:spTree>
+      <p:nvGrpSpPr>
+        <p:cNvPr id="1" name=""/>
+        <p:cNvGrpSpPr/>
+        <p:nvPr/>
+      </p:nvGrpSpPr>
+      <p:grpSpPr>
+        <a:xfrm>
+          <a:off x="0" y="0"/>
+          <a:ext cx="0" cy="0"/>
+          <a:chOff x="0" y="0"/>
+          <a:chExt cx="0" cy="0"/>
+        </a:xfrm>
+      </p:grpSpPr>
+      <p:sp>
+        <p:nvSpPr>
+          <p:cNvPr id="2" name="Title 1"/>
+          <p:cNvSpPr>
+            <a:spLocks noGrp="1"/>
+          </p:cNvSpPr>
+          <p:nvPr>
+            <p:ph type="title"/>
+          </p:nvPr>
+        </p:nvSpPr>
+        <p:spPr/>
+        <p:txBody>
+          <a:bodyPr/>
+          <a:lstStyle>
+            <a:lvl1pPr>
+              <a:defRPr sz="4200"/>
+            </a:lvl1pPr>
+          </a:lstStyle>
+          <a:p>
+            <a:r>
+              <a:rPr lang="en-US" smtClean="0"/>
+              <a:t>Click to edit Master title style</a:t>
+            </a:r>
+            <a:endParaRPr lang="en-US" dirty="0"/>
+          </a:p>
+        </p:txBody>
+      </p:sp>
+      <p:sp>
+        <p:nvSpPr>
+          <p:cNvPr id="3" name="Text Placeholder 2"/>
+          <p:cNvSpPr>
+            <a:spLocks noGrp="1"/>
+          </p:cNvSpPr>
+          <p:nvPr>
+            <p:ph type="body" idx="1"/>
+          </p:nvPr>
+        </p:nvSpPr>
+        <p:spPr>
+          <a:xfrm>
+            <a:off x="474834" y="1981200"/>
+            <a:ext cx="2210725" cy="576262"/>
+          </a:xfrm>
+        </p:spPr>
+        <p:txBody>
+          <a:bodyPr anchor="b">
+            <a:noAutofit/>
+          </a:bodyPr>
+          <a:lstStyle>
+            <a:lvl1pPr marL="0" indent="0">
+              <a:buNone/>
+              <a:defRPr sz="2400" b="0">
+                <a:solidFill>
+                  <a:schemeClr val="bg2">
+                    <a:lumMod val="40000"/>
+                    <a:lumOff val="60000"/>
+                  </a:schemeClr>
+                </a:solidFill>
+              </a:defRPr>
+            </a:lvl1pPr>
+            <a:lvl2pPr marL="457200" indent="0">
+              <a:buNone/>
+              <a:defRPr sz="2000" b="1"/>
+            </a:lvl2pPr>
+            <a:lvl3pPr marL="914400" indent="0">
+              <a:buNone/>
+              <a:defRPr sz="1800" b="1"/>
+            </a:lvl3pPr>
+            <a:lvl4pPr marL="1371600" indent="0">
+              <a:buNone/>
+              <a:defRPr sz="1600" b="1"/>
+            </a:lvl4pPr>
+            <a:lvl5pPr marL="1828800" indent="0">
+              <a:buNone/>
+              <a:defRPr sz="1600" b="1"/>
+            </a:lvl5pPr>
+            <a:lvl6pPr marL="2286000" indent="0">
+              <a:buNone/>
+              <a:defRPr sz="1600" b="1"/>
+            </a:lvl6pPr>
+            <a:lvl7pPr marL="2743200" indent="0">
+              <a:buNone/>
+              <a:defRPr sz="1600" b="1"/>
+            </a:lvl7pPr>
+            <a:lvl8pPr marL="3200400" indent="0">
+              <a:buNone/>
+              <a:defRPr sz="1600" b="1"/>
+            </a:lvl8pPr>
+            <a:lvl9pPr marL="3657600" indent="0">
+              <a:buNone/>
+              <a:defRPr sz="1600" b="1"/>
+            </a:lvl9pPr>
+          </a:lstStyle>
+          <a:p>
+            <a:pPr lvl="0"/>
+            <a:r>
+              <a:rPr lang="en-US" smtClean="0"/>
+              <a:t>Edit Master text styles</a:t>
+            </a:r>
+          </a:p>
+        </p:txBody>
+      </p:sp>
+      <p:sp>
+        <p:nvSpPr>
+          <p:cNvPr id="16" name="Text Placeholder 3"/>
+          <p:cNvSpPr>
+            <a:spLocks noGrp="1"/>
+          </p:cNvSpPr>
+          <p:nvPr>
+            <p:ph type="body" sz="half" idx="15"/>
+          </p:nvPr>
+        </p:nvSpPr>
+        <p:spPr>
+          <a:xfrm>
+            <a:off x="489475" y="2667000"/>
+            <a:ext cx="2196084" cy="3589338"/>
+          </a:xfrm>
+        </p:spPr>
+        <p:txBody>
+          <a:bodyPr anchor="t">
+            <a:normAutofit/>
+          </a:bodyPr>
+          <a:lstStyle>
+            <a:lvl1pPr marL="0" indent="0">
+              <a:buNone/>
+              <a:defRPr sz="1400"/>
+            </a:lvl1pPr>
+            <a:lvl2pPr marL="457200" indent="0">
+              <a:buNone/>
+              <a:defRPr sz="1200"/>
+            </a:lvl2pPr>
+            <a:lvl3pPr marL="914400" indent="0">
+              <a:buNone/>
+              <a:defRPr sz="1000"/>
+            </a:lvl3pPr>
+            <a:lvl4pPr marL="1371600" indent="0">
+              <a:buNone/>
+              <a:defRPr sz="900"/>
+            </a:lvl4pPr>
+            <a:lvl5pPr marL="1828800" indent="0">
+              <a:buNone/>
+              <a:defRPr sz="900"/>
+            </a:lvl5pPr>
+            <a:lvl6pPr marL="2286000" indent="0">
+              <a:buNone/>
+              <a:defRPr sz="900"/>
+            </a:lvl6pPr>
+            <a:lvl7pPr marL="2743200" indent="0">
+              <a:buNone/>
+              <a:defRPr sz="900"/>
+            </a:lvl7pPr>
+            <a:lvl8pPr marL="3200400" indent="0">
+              <a:buNone/>
+              <a:defRPr sz="900"/>
+            </a:lvl8pPr>
+            <a:lvl9pPr marL="3657600" indent="0">
+              <a:buNone/>
+              <a:defRPr sz="900"/>
+            </a:lvl9pPr>
+          </a:lstStyle>
+          <a:p>
+            <a:pPr lvl="0"/>
+            <a:r>
+              <a:rPr lang="en-US" smtClean="0"/>
+              <a:t>Edit Master text styles</a:t>
+            </a:r>
+          </a:p>
+        </p:txBody>
+      </p:sp>
+      <p:sp>
+        <p:nvSpPr>
+          <p:cNvPr id="5" name="Text Placeholder 4"/>
+          <p:cNvSpPr>
+            <a:spLocks noGrp="1"/>
+          </p:cNvSpPr>
+          <p:nvPr>
+            <p:ph type="body" sz="quarter" idx="3"/>
+          </p:nvPr>
+        </p:nvSpPr>
+        <p:spPr>
+          <a:xfrm>
+            <a:off x="2913504" y="1981200"/>
+            <a:ext cx="2202754" cy="576262"/>
+          </a:xfrm>
+        </p:spPr>
+        <p:txBody>
+          <a:bodyPr anchor="b">
+            <a:noAutofit/>
+          </a:bodyPr>
+          <a:lstStyle>
+            <a:lvl1pPr marL="0" indent="0">
+              <a:buNone/>
+              <a:defRPr sz="2400" b="0">
+                <a:solidFill>
+                  <a:schemeClr val="bg2">
+                    <a:lumMod val="40000"/>
+                    <a:lumOff val="60000"/>
+                  </a:schemeClr>
+                </a:solidFill>
+              </a:defRPr>
+            </a:lvl1pPr>
+            <a:lvl2pPr marL="457200" indent="0">
+              <a:buNone/>
+              <a:defRPr sz="2000" b="1"/>
+            </a:lvl2pPr>
+            <a:lvl3pPr marL="914400" indent="0">
+              <a:buNone/>
+              <a:defRPr sz="1800" b="1"/>
+            </a:lvl3pPr>
+            <a:lvl4pPr marL="1371600" indent="0">
+              <a:buNone/>
+              <a:defRPr sz="1600" b="1"/>
+            </a:lvl4pPr>
+            <a:lvl5pPr marL="1828800" indent="0">
+              <a:buNone/>
+              <a:defRPr sz="1600" b="1"/>
+            </a:lvl5pPr>
+            <a:lvl6pPr marL="2286000" indent="0">
+              <a:buNone/>
+              <a:defRPr sz="1600" b="1"/>
+            </a:lvl6pPr>
+            <a:lvl7pPr marL="2743200" indent="0">
+              <a:buNone/>
+              <a:defRPr sz="1600" b="1"/>
+            </a:lvl7pPr>
+            <a:lvl8pPr marL="3200400" indent="0">
+              <a:buNone/>
+              <a:defRPr sz="1600" b="1"/>
+            </a:lvl8pPr>
+            <a:lvl9pPr marL="3657600" indent="0">
+              <a:buNone/>
+              <a:defRPr sz="1600" b="1"/>
+            </a:lvl9pPr>
+          </a:lstStyle>
+          <a:p>
+            <a:pPr lvl="0"/>
+            <a:r>
+              <a:rPr lang="en-US" smtClean="0"/>
+              <a:t>Edit Master text styles</a:t>
+            </a:r>
+          </a:p>
+        </p:txBody>
+      </p:sp>
+      <p:sp>
+        <p:nvSpPr>
+          <p:cNvPr id="19" name="Text Placeholder 3"/>
+          <p:cNvSpPr>
+            <a:spLocks noGrp="1"/>
+          </p:cNvSpPr>
+          <p:nvPr>
+            <p:ph type="body" sz="half" idx="16"/>
+          </p:nvPr>
+        </p:nvSpPr>
+        <p:spPr>
+          <a:xfrm>
+            <a:off x="2905586" y="2667000"/>
+            <a:ext cx="2210671" cy="3589338"/>
+          </a:xfrm>
+        </p:spPr>
+        <p:txBody>
+          <a:bodyPr anchor="t">
+            <a:normAutofit/>
+          </a:bodyPr>
+          <a:lstStyle>
+            <a:lvl1pPr marL="0" indent="0">
+              <a:buNone/>
+              <a:defRPr sz="1400"/>
+            </a:lvl1pPr>
+            <a:lvl2pPr marL="457200" indent="0">
+              <a:buNone/>
+              <a:defRPr sz="1200"/>
+            </a:lvl2pPr>
+            <a:lvl3pPr marL="914400" indent="0">
+              <a:buNone/>
+              <a:defRPr sz="1000"/>
+            </a:lvl3pPr>
+            <a:lvl4pPr marL="1371600" indent="0">
+              <a:buNone/>
+              <a:defRPr sz="900"/>
+            </a:lvl4pPr>
+            <a:lvl5pPr marL="1828800" indent="0">
+              <a:buNone/>
+              <a:defRPr sz="900"/>
+            </a:lvl5pPr>
+            <a:lvl6pPr marL="2286000" indent="0">
+              <a:buNone/>
+              <a:defRPr sz="900"/>
+            </a:lvl6pPr>
+            <a:lvl7pPr marL="2743200" indent="0">
+              <a:buNone/>
+              <a:defRPr sz="900"/>
+            </a:lvl7pPr>
+            <a:lvl8pPr marL="3200400" indent="0">
+              <a:buNone/>
+              <a:defRPr sz="900"/>
+            </a:lvl8pPr>
+            <a:lvl9pPr marL="3657600" indent="0">
+              <a:buNone/>
+              <a:defRPr sz="900"/>
+            </a:lvl9pPr>
+          </a:lstStyle>
+          <a:p>
+            <a:pPr lvl="0"/>
+            <a:r>
+              <a:rPr lang="en-US" smtClean="0"/>
+              <a:t>Edit Master text styles</a:t>
+            </a:r>
+          </a:p>
+        </p:txBody>
+      </p:sp>
+      <p:sp>
+        <p:nvSpPr>
+          <p:cNvPr id="14" name="Text Placeholder 4"/>
+          <p:cNvSpPr>
+            <a:spLocks noGrp="1"/>
+          </p:cNvSpPr>
+          <p:nvPr>
+            <p:ph type="body" sz="quarter" idx="13"/>
+          </p:nvPr>
+        </p:nvSpPr>
+        <p:spPr>
+          <a:xfrm>
+            <a:off x="5344917" y="1981200"/>
+            <a:ext cx="2199658" cy="576262"/>
+          </a:xfrm>
+        </p:spPr>
+        <p:txBody>
+          <a:bodyPr anchor="b">
+            <a:noAutofit/>
+          </a:bodyPr>
+          <a:lstStyle>
+            <a:lvl1pPr marL="0" indent="0">
+              <a:buNone/>
+              <a:defRPr sz="2400" b="0">
+                <a:solidFill>
+                  <a:schemeClr val="bg2">
+                    <a:lumMod val="40000"/>
+                    <a:lumOff val="60000"/>
+                  </a:schemeClr>
+                </a:solidFill>
+              </a:defRPr>
+            </a:lvl1pPr>
+            <a:lvl2pPr marL="457200" indent="0">
+              <a:buNone/>
+              <a:defRPr sz="2000" b="1"/>
+            </a:lvl2pPr>
+            <a:lvl3pPr marL="914400" indent="0">
+              <a:buNone/>
+              <a:defRPr sz="1800" b="1"/>
+            </a:lvl3pPr>
+            <a:lvl4pPr marL="1371600" indent="0">
+              <a:buNone/>
+              <a:defRPr sz="1600" b="1"/>
+            </a:lvl4pPr>
+            <a:lvl5pPr marL="1828800" indent="0">
+              <a:buNone/>
+              <a:defRPr sz="1600" b="1"/>
+            </a:lvl5pPr>
+            <a:lvl6pPr marL="2286000" indent="0">
+              <a:buNone/>
+              <a:defRPr sz="1600" b="1"/>
+            </a:lvl6pPr>
+            <a:lvl7pPr marL="2743200" indent="0">
+              <a:buNone/>
+              <a:defRPr sz="1600" b="1"/>
+            </a:lvl7pPr>
+            <a:lvl8pPr marL="3200400" indent="0">
+              <a:buNone/>
+              <a:defRPr sz="1600" b="1"/>
+            </a:lvl8pPr>
+            <a:lvl9pPr marL="3657600" indent="0">
+              <a:buNone/>
+              <a:defRPr sz="1600" b="1"/>
+            </a:lvl9pPr>
+          </a:lstStyle>
+          <a:p>
+            <a:pPr lvl="0"/>
+            <a:r>
+              <a:rPr lang="en-US" smtClean="0"/>
+              <a:t>Edit Master text styles</a:t>
+            </a:r>
+          </a:p>
+        </p:txBody>
+      </p:sp>
+      <p:sp>
+        <p:nvSpPr>
+          <p:cNvPr id="20" name="Text Placeholder 3"/>
+          <p:cNvSpPr>
+            <a:spLocks noGrp="1"/>
+          </p:cNvSpPr>
+          <p:nvPr>
+            <p:ph type="body" sz="half" idx="17"/>
+          </p:nvPr>
+        </p:nvSpPr>
+        <p:spPr>
+          <a:xfrm>
+            <a:off x="5344917" y="2667000"/>
+            <a:ext cx="2199658" cy="3589338"/>
+          </a:xfrm>
+        </p:spPr>
+        <p:txBody>
+          <a:bodyPr anchor="t">
+            <a:normAutofit/>
+          </a:bodyPr>
+          <a:lstStyle>
+            <a:lvl1pPr marL="0" indent="0">
+              <a:buNone/>
+              <a:defRPr sz="1400"/>
+            </a:lvl1pPr>
+            <a:lvl2pPr marL="457200" indent="0">
+              <a:buNone/>
+              <a:defRPr sz="1200"/>
+            </a:lvl2pPr>
+            <a:lvl3pPr marL="914400" indent="0">
+              <a:buNone/>
+              <a:defRPr sz="1000"/>
+            </a:lvl3pPr>
+            <a:lvl4pPr marL="1371600" indent="0">
+              <a:buNone/>
+              <a:defRPr sz="900"/>
+            </a:lvl4pPr>
+            <a:lvl5pPr marL="1828800" indent="0">
+              <a:buNone/>
+              <a:defRPr sz="900"/>
+            </a:lvl5pPr>
+            <a:lvl6pPr marL="2286000" indent="0">
+              <a:buNone/>
+              <a:defRPr sz="900"/>
+            </a:lvl6pPr>
+            <a:lvl7pPr marL="2743200" indent="0">
+              <a:buNone/>
+              <a:defRPr sz="900"/>
+            </a:lvl7pPr>
+            <a:lvl8pPr marL="3200400" indent="0">
+              <a:buNone/>
+              <a:defRPr sz="900"/>
+            </a:lvl8pPr>
+            <a:lvl9pPr marL="3657600" indent="0">
+              <a:buNone/>
+              <a:defRPr sz="900"/>
+            </a:lvl9pPr>
+          </a:lstStyle>
+          <a:p>
+            <a:pPr lvl="0"/>
+            <a:r>
+              <a:rPr lang="en-US" smtClean="0"/>
+              <a:t>Edit Master text styles</a:t>
+            </a:r>
+          </a:p>
+        </p:txBody>
+      </p:sp>
+      <p:cxnSp>
+        <p:nvCxnSpPr>
+          <p:cNvPr id="17" name="Straight Connector 16"/>
+          <p:cNvCxnSpPr/>
+          <p:nvPr/>
+        </p:nvCxnSpPr>
+        <p:spPr>
+          <a:xfrm>
+            <a:off x="2795334" y="2133600"/>
+            <a:ext cx="0" cy="3962400"/>
+          </a:xfrm>
+          <a:prstGeom prst="line">
+            <a:avLst/>
+          </a:prstGeom>
+          <a:ln w="12700" cmpd="sng">
+            <a:solidFill>
+              <a:schemeClr val="bg2">
+                <a:lumMod val="40000"/>
+                <a:lumOff val="60000"/>
+                <a:alpha val="40000"/>
+              </a:schemeClr>
+            </a:solidFill>
+          </a:ln>
+        </p:spPr>
+        <p:style>
+          <a:lnRef idx="2">
+            <a:schemeClr val="accent1"/>
+          </a:lnRef>
+          <a:fillRef idx="0">
+            <a:schemeClr val="accent1"/>
+          </a:fillRef>
+          <a:effectRef idx="1">
+            <a:schemeClr val="accent1"/>
+          </a:effectRef>
+          <a:fontRef idx="minor">
+            <a:schemeClr val="tx1"/>
+          </a:fontRef>
+        </p:style>
+      </p:cxnSp>
+      <p:cxnSp>
+        <p:nvCxnSpPr>
+          <p:cNvPr id="18" name="Straight Connector 17"/>
+          <p:cNvCxnSpPr/>
+          <p:nvPr/>
+        </p:nvCxnSpPr>
+        <p:spPr>
+          <a:xfrm>
+            <a:off x="5223030" y="2133600"/>
+            <a:ext cx="0" cy="3966882"/>
+          </a:xfrm>
+          <a:prstGeom prst="line">
+            <a:avLst/>
+          </a:prstGeom>
+          <a:ln w="12700" cmpd="sng">
+            <a:solidFill>
+              <a:schemeClr val="bg2">
+                <a:lumMod val="40000"/>
+                <a:lumOff val="60000"/>
+                <a:alpha val="40000"/>
+              </a:schemeClr>
+            </a:solidFill>
+          </a:ln>
+        </p:spPr>
+        <p:style>
+          <a:lnRef idx="2">
+            <a:schemeClr val="accent1"/>
+          </a:lnRef>
+          <a:fillRef idx="0">
+            <a:schemeClr val="accent1"/>
+          </a:fillRef>
+          <a:effectRef idx="1">
+            <a:schemeClr val="accent1"/>
+          </a:effectRef>
+          <a:fontRef idx="minor">
+            <a:schemeClr val="tx1"/>
+          </a:fontRef>
+        </p:style>
+      </p:cxnSp>
+      <p:sp>
+        <p:nvSpPr>
+          <p:cNvPr id="7" name="Date Placeholder 3"/>
+          <p:cNvSpPr>
+            <a:spLocks noGrp="1"/>
+          </p:cNvSpPr>
+          <p:nvPr>
+            <p:ph type="dt" sz="half" idx="10"/>
+          </p:nvPr>
+        </p:nvSpPr>
+        <p:spPr/>
+        <p:txBody>
+          <a:bodyPr/>
+          <a:lstStyle/>
+          <a:p>
+            <a:fld id="{5BCAD085-E8A6-8845-BD4E-CB4CCA059FC4}" type="datetimeFigureOut">
+              <a:rPr lang="en-US" smtClean="0"/>
+              <a:t>1/8/2026</a:t>
+            </a:fld>
+            <a:endParaRPr lang="en-US"/>
+          </a:p>
+        </p:txBody>
+      </p:sp>
+      <p:sp>
+        <p:nvSpPr>
+          <p:cNvPr id="4" name="Footer Placeholder 4"/>
+          <p:cNvSpPr>
+            <a:spLocks noGrp="1"/>
+          </p:cNvSpPr>
+          <p:nvPr>
+            <p:ph type="ftr" sz="quarter" idx="11"/>
+          </p:nvPr>
+        </p:nvSpPr>
+        <p:spPr/>
+        <p:txBody>
+          <a:bodyPr/>
+          <a:lstStyle/>
+          <a:p>
+            <a:endParaRPr lang="en-US"/>
+          </a:p>
+        </p:txBody>
+      </p:sp>
+      <p:sp>
+        <p:nvSpPr>
+          <p:cNvPr id="6" name="Slide Number Placeholder 5"/>
+          <p:cNvSpPr>
+            <a:spLocks noGrp="1"/>
+          </p:cNvSpPr>
+          <p:nvPr>
+            <p:ph type="sldNum" sz="quarter" idx="12"/>
+          </p:nvPr>
+        </p:nvSpPr>
+        <p:spPr/>
+        <p:txBody>
+          <a:bodyPr/>
+          <a:lstStyle/>
+          <a:p>
+            <a:fld id="{C1FF6DA9-008F-8B48-92A6-B652298478BF}" type="slidenum">
+              <a:rPr lang="en-US" smtClean="0"/>
+              <a:t>‹#›</a:t>
+            </a:fld>
+            <a:endParaRPr lang="en-US"/>
+          </a:p>
+        </p:txBody>
+      </p:sp>
+    </p:spTree>
+    <p:extLst>
+      <p:ext uri="{BB962C8B-B14F-4D97-AF65-F5344CB8AC3E}">
+        <p14:creationId xmlns:p14="http://schemas.microsoft.com/office/powerpoint/2010/main" val="8285029"/>
+      </p:ext>
+    </p:extLst>
+  </p:cSld>
+  <p:clrMapOvr>
+    <a:masterClrMapping/>
+  </p:clrMapOvr>
+</p:sldLayout>
+</file>
+
+<file path=ppt/slideLayouts/slideLayout15.xml><?xml version="1.0" encoding="utf-8"?>
+<p:sldLayout xmlns:a="http://schemas.openxmlformats.org/drawingml/2006/main" xmlns:r="http://schemas.openxmlformats.org/officeDocument/2006/relationships" xmlns:p="http://schemas.openxmlformats.org/presentationml/2006/main" preserve="1">
+  <p:cSld name="3 Picture Column">
+    <p:spTree>
+      <p:nvGrpSpPr>
+        <p:cNvPr id="1" name=""/>
+        <p:cNvGrpSpPr/>
+        <p:nvPr/>
+      </p:nvGrpSpPr>
+      <p:grpSpPr>
+        <a:xfrm>
+          <a:off x="0" y="0"/>
+          <a:ext cx="0" cy="0"/>
+          <a:chOff x="0" y="0"/>
+          <a:chExt cx="0" cy="0"/>
+        </a:xfrm>
+      </p:grpSpPr>
+      <p:sp>
+        <p:nvSpPr>
+          <p:cNvPr id="2" name="Title 1"/>
+          <p:cNvSpPr>
+            <a:spLocks noGrp="1"/>
+          </p:cNvSpPr>
+          <p:nvPr>
+            <p:ph type="title"/>
+          </p:nvPr>
+        </p:nvSpPr>
+        <p:spPr/>
+        <p:txBody>
+          <a:bodyPr/>
+          <a:lstStyle>
+            <a:lvl1pPr>
+              <a:defRPr sz="4200"/>
+            </a:lvl1pPr>
+          </a:lstStyle>
+          <a:p>
+            <a:r>
+              <a:rPr lang="en-US" smtClean="0"/>
+              <a:t>Click to edit Master title style</a:t>
+            </a:r>
+            <a:endParaRPr lang="en-US" dirty="0"/>
+          </a:p>
+        </p:txBody>
+      </p:sp>
+      <p:sp>
+        <p:nvSpPr>
+          <p:cNvPr id="3" name="Text Placeholder 2"/>
+          <p:cNvSpPr>
+            <a:spLocks noGrp="1"/>
+          </p:cNvSpPr>
+          <p:nvPr>
+            <p:ph type="body" idx="1"/>
+          </p:nvPr>
+        </p:nvSpPr>
+        <p:spPr>
+          <a:xfrm>
+            <a:off x="489475" y="4250949"/>
+            <a:ext cx="2205612" cy="576262"/>
+          </a:xfrm>
+        </p:spPr>
+        <p:txBody>
+          <a:bodyPr anchor="b">
+            <a:noAutofit/>
+          </a:bodyPr>
+          <a:lstStyle>
+            <a:lvl1pPr marL="0" indent="0">
+              <a:buNone/>
+              <a:defRPr sz="2400" b="0">
+                <a:solidFill>
+                  <a:schemeClr val="bg2">
+                    <a:lumMod val="40000"/>
+                    <a:lumOff val="60000"/>
+                  </a:schemeClr>
+                </a:solidFill>
+              </a:defRPr>
+            </a:lvl1pPr>
+            <a:lvl2pPr marL="457200" indent="0">
+              <a:buNone/>
+              <a:defRPr sz="2000" b="1"/>
+            </a:lvl2pPr>
+            <a:lvl3pPr marL="914400" indent="0">
+              <a:buNone/>
+              <a:defRPr sz="1800" b="1"/>
+            </a:lvl3pPr>
+            <a:lvl4pPr marL="1371600" indent="0">
+              <a:buNone/>
+              <a:defRPr sz="1600" b="1"/>
+            </a:lvl4pPr>
+            <a:lvl5pPr marL="1828800" indent="0">
+              <a:buNone/>
+              <a:defRPr sz="1600" b="1"/>
+            </a:lvl5pPr>
+            <a:lvl6pPr marL="2286000" indent="0">
+              <a:buNone/>
+              <a:defRPr sz="1600" b="1"/>
+            </a:lvl6pPr>
+            <a:lvl7pPr marL="2743200" indent="0">
+              <a:buNone/>
+              <a:defRPr sz="1600" b="1"/>
+            </a:lvl7pPr>
+            <a:lvl8pPr marL="3200400" indent="0">
+              <a:buNone/>
+              <a:defRPr sz="1600" b="1"/>
+            </a:lvl8pPr>
+            <a:lvl9pPr marL="3657600" indent="0">
+              <a:buNone/>
+              <a:defRPr sz="1600" b="1"/>
+            </a:lvl9pPr>
+          </a:lstStyle>
+          <a:p>
+            <a:pPr lvl="0"/>
+            <a:r>
+              <a:rPr lang="en-US" smtClean="0"/>
+              <a:t>Edit Master text styles</a:t>
+            </a:r>
+          </a:p>
+        </p:txBody>
+      </p:sp>
+      <p:sp>
+        <p:nvSpPr>
+          <p:cNvPr id="29" name="Picture Placeholder 2"/>
+          <p:cNvSpPr>
+            <a:spLocks noGrp="1" noChangeAspect="1"/>
+          </p:cNvSpPr>
+          <p:nvPr>
+            <p:ph type="pic" idx="15"/>
+          </p:nvPr>
+        </p:nvSpPr>
+        <p:spPr>
+          <a:xfrm>
+            <a:off x="489475" y="2209800"/>
+            <a:ext cx="2205612" cy="1524000"/>
+          </a:xfrm>
+          <a:prstGeom prst="roundRect">
+            <a:avLst>
+              <a:gd name="adj" fmla="val 1858"/>
+            </a:avLst>
+          </a:prstGeom>
+          <a:effectLst>
+            <a:outerShdw blurRad="50800" dist="50800" dir="5400000" algn="tl" rotWithShape="0">
+              <a:srgbClr val="000000">
+                <a:alpha val="43000"/>
+              </a:srgbClr>
+            </a:outerShdw>
+          </a:effectLst>
+        </p:spPr>
+        <p:txBody>
+          <a:bodyPr anchor="t">
+            <a:normAutofit/>
+          </a:bodyPr>
+          <a:lstStyle>
+            <a:lvl1pPr marL="0" indent="0" algn="ctr">
+              <a:buNone/>
+              <a:defRPr sz="1600"/>
+            </a:lvl1pPr>
+            <a:lvl2pPr marL="457200" indent="0">
+              <a:buNone/>
+              <a:defRPr sz="1600"/>
+            </a:lvl2pPr>
+            <a:lvl3pPr marL="914400" indent="0">
+              <a:buNone/>
+              <a:defRPr sz="1600"/>
+            </a:lvl3pPr>
+            <a:lvl4pPr marL="1371600" indent="0">
+              <a:buNone/>
+              <a:defRPr sz="1600"/>
+            </a:lvl4pPr>
+            <a:lvl5pPr marL="1828800" indent="0">
+              <a:buNone/>
+              <a:defRPr sz="1600"/>
+            </a:lvl5pPr>
+            <a:lvl6pPr marL="2286000" indent="0">
+              <a:buNone/>
+              <a:defRPr sz="1600"/>
+            </a:lvl6pPr>
+            <a:lvl7pPr marL="2743200" indent="0">
+              <a:buNone/>
+              <a:defRPr sz="1600"/>
+            </a:lvl7pPr>
+            <a:lvl8pPr marL="3200400" indent="0">
+              <a:buNone/>
+              <a:defRPr sz="1600"/>
+            </a:lvl8pPr>
+            <a:lvl9pPr marL="3657600" indent="0">
+              <a:buNone/>
+              <a:defRPr sz="1600"/>
+            </a:lvl9pPr>
+          </a:lstStyle>
+          <a:p>
+            <a:r>
+              <a:rPr lang="en-US" smtClean="0"/>
+              <a:t>Click icon to add picture</a:t>
+            </a:r>
+            <a:endParaRPr lang="en-US" dirty="0"/>
+          </a:p>
+        </p:txBody>
+      </p:sp>
+      <p:sp>
+        <p:nvSpPr>
+          <p:cNvPr id="22" name="Text Placeholder 3"/>
+          <p:cNvSpPr>
+            <a:spLocks noGrp="1"/>
+          </p:cNvSpPr>
+          <p:nvPr>
+            <p:ph type="body" sz="half" idx="18"/>
+          </p:nvPr>
+        </p:nvSpPr>
+        <p:spPr>
+          <a:xfrm>
+            <a:off x="489475" y="4827212"/>
+            <a:ext cx="2205612" cy="659189"/>
+          </a:xfrm>
+        </p:spPr>
+        <p:txBody>
+          <a:bodyPr anchor="t">
+            <a:normAutofit/>
+          </a:bodyPr>
+          <a:lstStyle>
+            <a:lvl1pPr marL="0" indent="0">
+              <a:buNone/>
+              <a:defRPr sz="1400"/>
+            </a:lvl1pPr>
+            <a:lvl2pPr marL="457200" indent="0">
+              <a:buNone/>
+              <a:defRPr sz="1200"/>
+            </a:lvl2pPr>
+            <a:lvl3pPr marL="914400" indent="0">
+              <a:buNone/>
+              <a:defRPr sz="1000"/>
+            </a:lvl3pPr>
+            <a:lvl4pPr marL="1371600" indent="0">
+              <a:buNone/>
+              <a:defRPr sz="900"/>
+            </a:lvl4pPr>
+            <a:lvl5pPr marL="1828800" indent="0">
+              <a:buNone/>
+              <a:defRPr sz="900"/>
+            </a:lvl5pPr>
+            <a:lvl6pPr marL="2286000" indent="0">
+              <a:buNone/>
+              <a:defRPr sz="900"/>
+            </a:lvl6pPr>
+            <a:lvl7pPr marL="2743200" indent="0">
+              <a:buNone/>
+              <a:defRPr sz="900"/>
+            </a:lvl7pPr>
+            <a:lvl8pPr marL="3200400" indent="0">
+              <a:buNone/>
+              <a:defRPr sz="900"/>
+            </a:lvl8pPr>
+            <a:lvl9pPr marL="3657600" indent="0">
+              <a:buNone/>
+              <a:defRPr sz="900"/>
+            </a:lvl9pPr>
+          </a:lstStyle>
+          <a:p>
+            <a:pPr lvl="0"/>
+            <a:r>
+              <a:rPr lang="en-US" smtClean="0"/>
+              <a:t>Edit Master text styles</a:t>
+            </a:r>
+          </a:p>
+        </p:txBody>
+      </p:sp>
+      <p:sp>
+        <p:nvSpPr>
+          <p:cNvPr id="5" name="Text Placeholder 4"/>
+          <p:cNvSpPr>
+            <a:spLocks noGrp="1"/>
+          </p:cNvSpPr>
+          <p:nvPr>
+            <p:ph type="body" sz="quarter" idx="3"/>
+          </p:nvPr>
+        </p:nvSpPr>
+        <p:spPr>
+          <a:xfrm>
+            <a:off x="2917792" y="4250949"/>
+            <a:ext cx="2198466" cy="576262"/>
+          </a:xfrm>
+        </p:spPr>
+        <p:txBody>
+          <a:bodyPr anchor="b">
+            <a:noAutofit/>
+          </a:bodyPr>
+          <a:lstStyle>
+            <a:lvl1pPr marL="0" indent="0">
+              <a:buNone/>
+              <a:defRPr sz="2400" b="0">
+                <a:solidFill>
+                  <a:schemeClr val="bg2">
+                    <a:lumMod val="40000"/>
+                    <a:lumOff val="60000"/>
+                  </a:schemeClr>
+                </a:solidFill>
+              </a:defRPr>
+            </a:lvl1pPr>
+            <a:lvl2pPr marL="457200" indent="0">
+              <a:buNone/>
+              <a:defRPr sz="2000" b="1"/>
+            </a:lvl2pPr>
+            <a:lvl3pPr marL="914400" indent="0">
+              <a:buNone/>
+              <a:defRPr sz="1800" b="1"/>
+            </a:lvl3pPr>
+            <a:lvl4pPr marL="1371600" indent="0">
+              <a:buNone/>
+              <a:defRPr sz="1600" b="1"/>
+            </a:lvl4pPr>
+            <a:lvl5pPr marL="1828800" indent="0">
+              <a:buNone/>
+              <a:defRPr sz="1600" b="1"/>
+            </a:lvl5pPr>
+            <a:lvl6pPr marL="2286000" indent="0">
+              <a:buNone/>
+              <a:defRPr sz="1600" b="1"/>
+            </a:lvl6pPr>
+            <a:lvl7pPr marL="2743200" indent="0">
+              <a:buNone/>
+              <a:defRPr sz="1600" b="1"/>
+            </a:lvl7pPr>
+            <a:lvl8pPr marL="3200400" indent="0">
+              <a:buNone/>
+              <a:defRPr sz="1600" b="1"/>
+            </a:lvl8pPr>
+            <a:lvl9pPr marL="3657600" indent="0">
+              <a:buNone/>
+              <a:defRPr sz="1600" b="1"/>
+            </a:lvl9pPr>
+          </a:lstStyle>
+          <a:p>
+            <a:pPr lvl="0"/>
+            <a:r>
+              <a:rPr lang="en-US" smtClean="0"/>
+              <a:t>Edit Master text styles</a:t>
+            </a:r>
+          </a:p>
+        </p:txBody>
+      </p:sp>
+      <p:sp>
+        <p:nvSpPr>
+          <p:cNvPr id="30" name="Picture Placeholder 2"/>
+          <p:cNvSpPr>
+            <a:spLocks noGrp="1" noChangeAspect="1"/>
+          </p:cNvSpPr>
+          <p:nvPr>
+            <p:ph type="pic" idx="21"/>
+          </p:nvPr>
+        </p:nvSpPr>
+        <p:spPr>
+          <a:xfrm>
+            <a:off x="2917791" y="2209800"/>
+            <a:ext cx="2198466" cy="1524000"/>
+          </a:xfrm>
+          <a:prstGeom prst="roundRect">
+            <a:avLst>
+              <a:gd name="adj" fmla="val 1858"/>
+            </a:avLst>
+          </a:prstGeom>
+          <a:effectLst>
+            <a:outerShdw blurRad="50800" dist="50800" dir="5400000" algn="tl" rotWithShape="0">
+              <a:srgbClr val="000000">
+                <a:alpha val="43000"/>
+              </a:srgbClr>
+            </a:outerShdw>
+          </a:effectLst>
+        </p:spPr>
+        <p:txBody>
+          <a:bodyPr anchor="t">
+            <a:normAutofit/>
+          </a:bodyPr>
+          <a:lstStyle>
+            <a:lvl1pPr marL="0" indent="0" algn="ctr">
+              <a:buNone/>
+              <a:defRPr sz="1600"/>
+            </a:lvl1pPr>
+            <a:lvl2pPr marL="457200" indent="0">
+              <a:buNone/>
+              <a:defRPr sz="1600"/>
+            </a:lvl2pPr>
+            <a:lvl3pPr marL="914400" indent="0">
+              <a:buNone/>
+              <a:defRPr sz="1600"/>
+            </a:lvl3pPr>
+            <a:lvl4pPr marL="1371600" indent="0">
+              <a:buNone/>
+              <a:defRPr sz="1600"/>
+            </a:lvl4pPr>
+            <a:lvl5pPr marL="1828800" indent="0">
+              <a:buNone/>
+              <a:defRPr sz="1600"/>
+            </a:lvl5pPr>
+            <a:lvl6pPr marL="2286000" indent="0">
+              <a:buNone/>
+              <a:defRPr sz="1600"/>
+            </a:lvl6pPr>
+            <a:lvl7pPr marL="2743200" indent="0">
+              <a:buNone/>
+              <a:defRPr sz="1600"/>
+            </a:lvl7pPr>
+            <a:lvl8pPr marL="3200400" indent="0">
+              <a:buNone/>
+              <a:defRPr sz="1600"/>
+            </a:lvl8pPr>
+            <a:lvl9pPr marL="3657600" indent="0">
+              <a:buNone/>
+              <a:defRPr sz="1600"/>
+            </a:lvl9pPr>
+          </a:lstStyle>
+          <a:p>
+            <a:r>
+              <a:rPr lang="en-US" smtClean="0"/>
+              <a:t>Click icon to add picture</a:t>
+            </a:r>
+            <a:endParaRPr lang="en-US" dirty="0"/>
+          </a:p>
+        </p:txBody>
+      </p:sp>
+      <p:sp>
+        <p:nvSpPr>
+          <p:cNvPr id="23" name="Text Placeholder 3"/>
+          <p:cNvSpPr>
+            <a:spLocks noGrp="1"/>
+          </p:cNvSpPr>
+          <p:nvPr>
+            <p:ph type="body" sz="half" idx="19"/>
+          </p:nvPr>
+        </p:nvSpPr>
+        <p:spPr>
+          <a:xfrm>
+            <a:off x="2916776" y="4827211"/>
+            <a:ext cx="2201378" cy="659189"/>
+          </a:xfrm>
+        </p:spPr>
+        <p:txBody>
+          <a:bodyPr anchor="t">
+            <a:normAutofit/>
+          </a:bodyPr>
+          <a:lstStyle>
+            <a:lvl1pPr marL="0" indent="0">
+              <a:buNone/>
+              <a:defRPr sz="1400"/>
+            </a:lvl1pPr>
+            <a:lvl2pPr marL="457200" indent="0">
+              <a:buNone/>
+              <a:defRPr sz="1200"/>
+            </a:lvl2pPr>
+            <a:lvl3pPr marL="914400" indent="0">
+              <a:buNone/>
+              <a:defRPr sz="1000"/>
+            </a:lvl3pPr>
+            <a:lvl4pPr marL="1371600" indent="0">
+              <a:buNone/>
+              <a:defRPr sz="900"/>
+            </a:lvl4pPr>
+            <a:lvl5pPr marL="1828800" indent="0">
+              <a:buNone/>
+              <a:defRPr sz="900"/>
+            </a:lvl5pPr>
+            <a:lvl6pPr marL="2286000" indent="0">
+              <a:buNone/>
+              <a:defRPr sz="900"/>
+            </a:lvl6pPr>
+            <a:lvl7pPr marL="2743200" indent="0">
+              <a:buNone/>
+              <a:defRPr sz="900"/>
+            </a:lvl7pPr>
+            <a:lvl8pPr marL="3200400" indent="0">
+              <a:buNone/>
+              <a:defRPr sz="900"/>
+            </a:lvl8pPr>
+            <a:lvl9pPr marL="3657600" indent="0">
+              <a:buNone/>
+              <a:defRPr sz="900"/>
+            </a:lvl9pPr>
+          </a:lstStyle>
+          <a:p>
+            <a:pPr lvl="0"/>
+            <a:r>
+              <a:rPr lang="en-US" smtClean="0"/>
+              <a:t>Edit Master text styles</a:t>
+            </a:r>
+          </a:p>
+        </p:txBody>
+      </p:sp>
+      <p:sp>
+        <p:nvSpPr>
+          <p:cNvPr id="14" name="Text Placeholder 4"/>
+          <p:cNvSpPr>
+            <a:spLocks noGrp="1"/>
+          </p:cNvSpPr>
+          <p:nvPr>
+            <p:ph type="body" sz="quarter" idx="13"/>
+          </p:nvPr>
+        </p:nvSpPr>
+        <p:spPr>
+          <a:xfrm>
+            <a:off x="5344917" y="4250949"/>
+            <a:ext cx="2199658" cy="576262"/>
+          </a:xfrm>
+        </p:spPr>
+        <p:txBody>
+          <a:bodyPr anchor="b">
+            <a:noAutofit/>
+          </a:bodyPr>
+          <a:lstStyle>
+            <a:lvl1pPr marL="0" indent="0">
+              <a:buNone/>
+              <a:defRPr sz="2400" b="0">
+                <a:solidFill>
+                  <a:schemeClr val="bg2">
+                    <a:lumMod val="40000"/>
+                    <a:lumOff val="60000"/>
+                  </a:schemeClr>
+                </a:solidFill>
+              </a:defRPr>
+            </a:lvl1pPr>
+            <a:lvl2pPr marL="457200" indent="0">
+              <a:buNone/>
+              <a:defRPr sz="2000" b="1"/>
+            </a:lvl2pPr>
+            <a:lvl3pPr marL="914400" indent="0">
+              <a:buNone/>
+              <a:defRPr sz="1800" b="1"/>
+            </a:lvl3pPr>
+            <a:lvl4pPr marL="1371600" indent="0">
+              <a:buNone/>
+              <a:defRPr sz="1600" b="1"/>
+            </a:lvl4pPr>
+            <a:lvl5pPr marL="1828800" indent="0">
+              <a:buNone/>
+              <a:defRPr sz="1600" b="1"/>
+            </a:lvl5pPr>
+            <a:lvl6pPr marL="2286000" indent="0">
+              <a:buNone/>
+              <a:defRPr sz="1600" b="1"/>
+            </a:lvl6pPr>
+            <a:lvl7pPr marL="2743200" indent="0">
+              <a:buNone/>
+              <a:defRPr sz="1600" b="1"/>
+            </a:lvl7pPr>
+            <a:lvl8pPr marL="3200400" indent="0">
+              <a:buNone/>
+              <a:defRPr sz="1600" b="1"/>
+            </a:lvl8pPr>
+            <a:lvl9pPr marL="3657600" indent="0">
+              <a:buNone/>
+              <a:defRPr sz="1600" b="1"/>
+            </a:lvl9pPr>
+          </a:lstStyle>
+          <a:p>
+            <a:pPr lvl="0"/>
+            <a:r>
+              <a:rPr lang="en-US" smtClean="0"/>
+              <a:t>Edit Master text styles</a:t>
+            </a:r>
+          </a:p>
+        </p:txBody>
+      </p:sp>
+      <p:sp>
+        <p:nvSpPr>
+          <p:cNvPr id="31" name="Picture Placeholder 2"/>
+          <p:cNvSpPr>
+            <a:spLocks noGrp="1" noChangeAspect="1"/>
+          </p:cNvSpPr>
+          <p:nvPr>
+            <p:ph type="pic" idx="22"/>
+          </p:nvPr>
+        </p:nvSpPr>
+        <p:spPr>
+          <a:xfrm>
+            <a:off x="5344916" y="2209800"/>
+            <a:ext cx="2199658" cy="1524000"/>
+          </a:xfrm>
+          <a:prstGeom prst="roundRect">
+            <a:avLst>
+              <a:gd name="adj" fmla="val 1858"/>
+            </a:avLst>
+          </a:prstGeom>
+          <a:effectLst>
+            <a:outerShdw blurRad="50800" dist="50800" dir="5400000" algn="tl" rotWithShape="0">
+              <a:srgbClr val="000000">
+                <a:alpha val="43000"/>
+              </a:srgbClr>
+            </a:outerShdw>
+          </a:effectLst>
+        </p:spPr>
+        <p:txBody>
+          <a:bodyPr anchor="t">
+            <a:normAutofit/>
+          </a:bodyPr>
+          <a:lstStyle>
+            <a:lvl1pPr marL="0" indent="0" algn="ctr">
+              <a:buNone/>
+              <a:defRPr sz="1600"/>
+            </a:lvl1pPr>
+            <a:lvl2pPr marL="457200" indent="0">
+              <a:buNone/>
+              <a:defRPr sz="1600"/>
+            </a:lvl2pPr>
+            <a:lvl3pPr marL="914400" indent="0">
+              <a:buNone/>
+              <a:defRPr sz="1600"/>
+            </a:lvl3pPr>
+            <a:lvl4pPr marL="1371600" indent="0">
+              <a:buNone/>
+              <a:defRPr sz="1600"/>
+            </a:lvl4pPr>
+            <a:lvl5pPr marL="1828800" indent="0">
+              <a:buNone/>
+              <a:defRPr sz="1600"/>
+            </a:lvl5pPr>
+            <a:lvl6pPr marL="2286000" indent="0">
+              <a:buNone/>
+              <a:defRPr sz="1600"/>
+            </a:lvl6pPr>
+            <a:lvl7pPr marL="2743200" indent="0">
+              <a:buNone/>
+              <a:defRPr sz="1600"/>
+            </a:lvl7pPr>
+            <a:lvl8pPr marL="3200400" indent="0">
+              <a:buNone/>
+              <a:defRPr sz="1600"/>
+            </a:lvl8pPr>
+            <a:lvl9pPr marL="3657600" indent="0">
+              <a:buNone/>
+              <a:defRPr sz="1600"/>
+            </a:lvl9pPr>
+          </a:lstStyle>
+          <a:p>
+            <a:r>
+              <a:rPr lang="en-US" smtClean="0"/>
+              <a:t>Click icon to add picture</a:t>
+            </a:r>
+            <a:endParaRPr lang="en-US" dirty="0"/>
+          </a:p>
+        </p:txBody>
+      </p:sp>
+      <p:sp>
+        <p:nvSpPr>
+          <p:cNvPr id="24" name="Text Placeholder 3"/>
+          <p:cNvSpPr>
+            <a:spLocks noGrp="1"/>
+          </p:cNvSpPr>
+          <p:nvPr>
+            <p:ph type="body" sz="half" idx="20"/>
+          </p:nvPr>
+        </p:nvSpPr>
+        <p:spPr>
+          <a:xfrm>
+            <a:off x="5344824" y="4827209"/>
+            <a:ext cx="2202571" cy="659189"/>
+          </a:xfrm>
+        </p:spPr>
+        <p:txBody>
+          <a:bodyPr anchor="t">
+            <a:normAutofit/>
+          </a:bodyPr>
+          <a:lstStyle>
+            <a:lvl1pPr marL="0" indent="0">
+              <a:buNone/>
+              <a:defRPr sz="1400"/>
+            </a:lvl1pPr>
+            <a:lvl2pPr marL="457200" indent="0">
+              <a:buNone/>
+              <a:defRPr sz="1200"/>
+            </a:lvl2pPr>
+            <a:lvl3pPr marL="914400" indent="0">
+              <a:buNone/>
+              <a:defRPr sz="1000"/>
+            </a:lvl3pPr>
+            <a:lvl4pPr marL="1371600" indent="0">
+              <a:buNone/>
+              <a:defRPr sz="900"/>
+            </a:lvl4pPr>
+            <a:lvl5pPr marL="1828800" indent="0">
+              <a:buNone/>
+              <a:defRPr sz="900"/>
+            </a:lvl5pPr>
+            <a:lvl6pPr marL="2286000" indent="0">
+              <a:buNone/>
+              <a:defRPr sz="900"/>
+            </a:lvl6pPr>
+            <a:lvl7pPr marL="2743200" indent="0">
+              <a:buNone/>
+              <a:defRPr sz="900"/>
+            </a:lvl7pPr>
+            <a:lvl8pPr marL="3200400" indent="0">
+              <a:buNone/>
+              <a:defRPr sz="900"/>
+            </a:lvl8pPr>
+            <a:lvl9pPr marL="3657600" indent="0">
+              <a:buNone/>
+              <a:defRPr sz="900"/>
+            </a:lvl9pPr>
+          </a:lstStyle>
+          <a:p>
+            <a:pPr lvl="0"/>
+            <a:r>
+              <a:rPr lang="en-US" smtClean="0"/>
+              <a:t>Edit Master text styles</a:t>
+            </a:r>
+          </a:p>
+        </p:txBody>
+      </p:sp>
+      <p:cxnSp>
+        <p:nvCxnSpPr>
+          <p:cNvPr id="19" name="Straight Connector 18"/>
+          <p:cNvCxnSpPr/>
+          <p:nvPr/>
+        </p:nvCxnSpPr>
+        <p:spPr>
+          <a:xfrm>
+            <a:off x="2795334" y="2133600"/>
+            <a:ext cx="0" cy="3962400"/>
+          </a:xfrm>
+          <a:prstGeom prst="line">
+            <a:avLst/>
+          </a:prstGeom>
+          <a:ln w="12700" cmpd="sng">
+            <a:solidFill>
+              <a:schemeClr val="bg2">
+                <a:lumMod val="40000"/>
+                <a:lumOff val="60000"/>
+                <a:alpha val="40000"/>
+              </a:schemeClr>
+            </a:solidFill>
+          </a:ln>
+        </p:spPr>
+        <p:style>
+          <a:lnRef idx="2">
+            <a:schemeClr val="accent1"/>
+          </a:lnRef>
+          <a:fillRef idx="0">
+            <a:schemeClr val="accent1"/>
+          </a:fillRef>
+          <a:effectRef idx="1">
+            <a:schemeClr val="accent1"/>
+          </a:effectRef>
+          <a:fontRef idx="minor">
+            <a:schemeClr val="tx1"/>
+          </a:fontRef>
+        </p:style>
+      </p:cxnSp>
+      <p:cxnSp>
+        <p:nvCxnSpPr>
+          <p:cNvPr id="20" name="Straight Connector 19"/>
+          <p:cNvCxnSpPr/>
+          <p:nvPr/>
+        </p:nvCxnSpPr>
+        <p:spPr>
+          <a:xfrm>
+            <a:off x="5223030" y="2133600"/>
+            <a:ext cx="0" cy="3966882"/>
+          </a:xfrm>
+          <a:prstGeom prst="line">
+            <a:avLst/>
+          </a:prstGeom>
+          <a:ln w="12700" cmpd="sng">
+            <a:solidFill>
+              <a:schemeClr val="bg2">
+                <a:lumMod val="40000"/>
+                <a:lumOff val="60000"/>
+                <a:alpha val="40000"/>
+              </a:schemeClr>
+            </a:solidFill>
+          </a:ln>
+        </p:spPr>
+        <p:style>
+          <a:lnRef idx="2">
+            <a:schemeClr val="accent1"/>
+          </a:lnRef>
+          <a:fillRef idx="0">
+            <a:schemeClr val="accent1"/>
+          </a:fillRef>
+          <a:effectRef idx="1">
+            <a:schemeClr val="accent1"/>
+          </a:effectRef>
+          <a:fontRef idx="minor">
+            <a:schemeClr val="tx1"/>
+          </a:fontRef>
+        </p:style>
+      </p:cxnSp>
+      <p:sp>
+        <p:nvSpPr>
+          <p:cNvPr id="7" name="Date Placeholder 3"/>
+          <p:cNvSpPr>
+            <a:spLocks noGrp="1"/>
+          </p:cNvSpPr>
+          <p:nvPr>
+            <p:ph type="dt" sz="half" idx="10"/>
+          </p:nvPr>
+        </p:nvSpPr>
+        <p:spPr/>
+        <p:txBody>
+          <a:bodyPr/>
+          <a:lstStyle/>
+          <a:p>
+            <a:fld id="{5BCAD085-E8A6-8845-BD4E-CB4CCA059FC4}" type="datetimeFigureOut">
+              <a:rPr lang="en-US" smtClean="0"/>
+              <a:t>1/8/2026</a:t>
+            </a:fld>
+            <a:endParaRPr lang="en-US"/>
+          </a:p>
+        </p:txBody>
+      </p:sp>
+      <p:sp>
+        <p:nvSpPr>
+          <p:cNvPr id="4" name="Footer Placeholder 4"/>
+          <p:cNvSpPr>
+            <a:spLocks noGrp="1"/>
+          </p:cNvSpPr>
+          <p:nvPr>
+            <p:ph type="ftr" sz="quarter" idx="11"/>
+          </p:nvPr>
+        </p:nvSpPr>
+        <p:spPr/>
+        <p:txBody>
+          <a:bodyPr/>
+          <a:lstStyle/>
+          <a:p>
+            <a:endParaRPr lang="en-US"/>
+          </a:p>
+        </p:txBody>
+      </p:sp>
+      <p:sp>
+        <p:nvSpPr>
+          <p:cNvPr id="6" name="Slide Number Placeholder 5"/>
+          <p:cNvSpPr>
+            <a:spLocks noGrp="1"/>
+          </p:cNvSpPr>
+          <p:nvPr>
+            <p:ph type="sldNum" sz="quarter" idx="12"/>
+          </p:nvPr>
+        </p:nvSpPr>
+        <p:spPr/>
+        <p:txBody>
+          <a:bodyPr/>
+          <a:lstStyle/>
+          <a:p>
+            <a:fld id="{C1FF6DA9-008F-8B48-92A6-B652298478BF}" type="slidenum">
+              <a:rPr lang="en-US" smtClean="0"/>
+              <a:t>‹#›</a:t>
+            </a:fld>
+            <a:endParaRPr lang="en-US"/>
+          </a:p>
+        </p:txBody>
+      </p:sp>
+    </p:spTree>
+    <p:extLst>
+      <p:ext uri="{BB962C8B-B14F-4D97-AF65-F5344CB8AC3E}">
+        <p14:creationId xmlns:p14="http://schemas.microsoft.com/office/powerpoint/2010/main" val="2961814738"/>
+      </p:ext>
+    </p:extLst>
+  </p:cSld>
+  <p:clrMapOvr>
+    <a:masterClrMapping/>
+  </p:clrMapOvr>
+</p:sldLayout>
+</file>
+
+<file path=ppt/slideLayouts/slideLayout16.xml><?xml version="1.0" encoding="utf-8"?>
 <p:sldLayout xmlns:a="http://schemas.openxmlformats.org/drawingml/2006/main" xmlns:r="http://schemas.openxmlformats.org/officeDocument/2006/relationships" xmlns:p="http://schemas.openxmlformats.org/presentationml/2006/main" type="vertTx" preserve="1">
   <p:cSld name="Title and Vertical Text">
     <p:spTree>
@@ -394,7 +2986,7 @@
               <a:rPr lang="en-US" smtClean="0"/>
               <a:t>Click to edit Master title style</a:t>
             </a:r>
-            <a:endParaRPr lang="en-US"/>
+            <a:endParaRPr lang="en-US" dirty="0"/>
           </a:p>
         </p:txBody>
       </p:sp>
@@ -410,13 +3002,13 @@
         </p:nvSpPr>
         <p:spPr/>
         <p:txBody>
-          <a:bodyPr vert="eaVert"/>
+          <a:bodyPr vert="eaVert" anchor="t" anchorCtr="0"/>
           <a:lstStyle/>
           <a:p>
             <a:pPr lvl="0"/>
             <a:r>
               <a:rPr lang="en-US" smtClean="0"/>
-              <a:t>Click to edit Master text styles</a:t>
+              <a:t>Edit Master text styles</a:t>
             </a:r>
           </a:p>
           <a:p>
@@ -446,7 +3038,7 @@
               <a:rPr lang="en-US" smtClean="0"/>
               <a:t>Fifth level</a:t>
             </a:r>
-            <a:endParaRPr lang="en-US"/>
+            <a:endParaRPr lang="en-US" dirty="0"/>
           </a:p>
         </p:txBody>
       </p:sp>
@@ -467,7 +3059,7 @@
           <a:p>
             <a:fld id="{5BCAD085-E8A6-8845-BD4E-CB4CCA059FC4}" type="datetimeFigureOut">
               <a:rPr lang="en-US" smtClean="0"/>
-              <a:t>1/27/13</a:t>
+              <a:t>1/8/2026</a:t>
             </a:fld>
             <a:endParaRPr lang="en-US"/>
           </a:p>
@@ -518,7 +3110,7 @@
     </p:spTree>
     <p:extLst>
       <p:ext uri="{BB962C8B-B14F-4D97-AF65-F5344CB8AC3E}">
-        <p14:creationId xmlns:p14="http://schemas.microsoft.com/office/powerpoint/2010/main" val="2910927964"/>
+        <p14:creationId xmlns:p14="http://schemas.microsoft.com/office/powerpoint/2010/main" val="2486589059"/>
       </p:ext>
     </p:extLst>
   </p:cSld>
@@ -528,7 +3120,7 @@
 </p:sldLayout>
 </file>
 
-<file path=ppt/slideLayouts/slideLayout11.xml><?xml version="1.0" encoding="utf-8"?>
+<file path=ppt/slideLayouts/slideLayout17.xml><?xml version="1.0" encoding="utf-8"?>
 <p:sldLayout xmlns:a="http://schemas.openxmlformats.org/drawingml/2006/main" xmlns:r="http://schemas.openxmlformats.org/officeDocument/2006/relationships" xmlns:p="http://schemas.openxmlformats.org/presentationml/2006/main" type="vertTitleAndTx" preserve="1">
   <p:cSld name="Vertical Title and Text">
     <p:spTree>
@@ -557,46 +3149,46 @@
         </p:nvSpPr>
         <p:spPr>
           <a:xfrm>
-            <a:off x="6629400" y="274638"/>
-            <a:ext cx="2057400" cy="5851525"/>
+            <a:off x="6229782" y="430214"/>
+            <a:ext cx="1314793" cy="5826125"/>
           </a:xfrm>
         </p:spPr>
         <p:txBody>
+          <a:bodyPr vert="eaVert" anchor="b" anchorCtr="0"/>
+          <a:lstStyle/>
+          <a:p>
+            <a:r>
+              <a:rPr lang="en-US" smtClean="0"/>
+              <a:t>Click to edit Master title style</a:t>
+            </a:r>
+            <a:endParaRPr lang="en-US" dirty="0"/>
+          </a:p>
+        </p:txBody>
+      </p:sp>
+      <p:sp>
+        <p:nvSpPr>
+          <p:cNvPr id="3" name="Vertical Text Placeholder 2"/>
+          <p:cNvSpPr>
+            <a:spLocks noGrp="1"/>
+          </p:cNvSpPr>
+          <p:nvPr>
+            <p:ph type="body" orient="vert" idx="1"/>
+          </p:nvPr>
+        </p:nvSpPr>
+        <p:spPr>
+          <a:xfrm>
+            <a:off x="489475" y="773205"/>
+            <a:ext cx="5568812" cy="5483134"/>
+          </a:xfrm>
+        </p:spPr>
+        <p:txBody>
           <a:bodyPr vert="eaVert"/>
           <a:lstStyle/>
           <a:p>
-            <a:r>
-              <a:rPr lang="en-US" smtClean="0"/>
-              <a:t>Click to edit Master title style</a:t>
-            </a:r>
-            <a:endParaRPr lang="en-US"/>
-          </a:p>
-        </p:txBody>
-      </p:sp>
-      <p:sp>
-        <p:nvSpPr>
-          <p:cNvPr id="3" name="Vertical Text Placeholder 2"/>
-          <p:cNvSpPr>
-            <a:spLocks noGrp="1"/>
-          </p:cNvSpPr>
-          <p:nvPr>
-            <p:ph type="body" orient="vert" idx="1"/>
-          </p:nvPr>
-        </p:nvSpPr>
-        <p:spPr>
-          <a:xfrm>
-            <a:off x="457200" y="274638"/>
-            <a:ext cx="6019800" cy="5851525"/>
-          </a:xfrm>
-        </p:spPr>
-        <p:txBody>
-          <a:bodyPr vert="eaVert"/>
-          <a:lstStyle/>
-          <a:p>
             <a:pPr lvl="0"/>
             <a:r>
               <a:rPr lang="en-US" smtClean="0"/>
-              <a:t>Click to edit Master text styles</a:t>
+              <a:t>Edit Master text styles</a:t>
             </a:r>
           </a:p>
           <a:p>
@@ -626,7 +3218,7 @@
               <a:rPr lang="en-US" smtClean="0"/>
               <a:t>Fifth level</a:t>
             </a:r>
-            <a:endParaRPr lang="en-US"/>
+            <a:endParaRPr lang="en-US" dirty="0"/>
           </a:p>
         </p:txBody>
       </p:sp>
@@ -647,7 +3239,7 @@
           <a:p>
             <a:fld id="{5BCAD085-E8A6-8845-BD4E-CB4CCA059FC4}" type="datetimeFigureOut">
               <a:rPr lang="en-US" smtClean="0"/>
-              <a:t>1/27/13</a:t>
+              <a:t>1/8/2026</a:t>
             </a:fld>
             <a:endParaRPr lang="en-US"/>
           </a:p>
@@ -698,7 +3290,7 @@
     </p:spTree>
     <p:extLst>
       <p:ext uri="{BB962C8B-B14F-4D97-AF65-F5344CB8AC3E}">
-        <p14:creationId xmlns:p14="http://schemas.microsoft.com/office/powerpoint/2010/main" val="3612223792"/>
+        <p14:creationId xmlns:p14="http://schemas.microsoft.com/office/powerpoint/2010/main" val="1431173373"/>
       </p:ext>
     </p:extLst>
   </p:cSld>
@@ -744,7 +3336,7 @@
               <a:rPr lang="en-US" smtClean="0"/>
               <a:t>Click to edit Master title style</a:t>
             </a:r>
-            <a:endParaRPr lang="en-US"/>
+            <a:endParaRPr lang="en-US" dirty="0"/>
           </a:p>
         </p:txBody>
       </p:sp>
@@ -766,7 +3358,7 @@
             <a:pPr lvl="0"/>
             <a:r>
               <a:rPr lang="en-US" smtClean="0"/>
-              <a:t>Click to edit Master text styles</a:t>
+              <a:t>Edit Master text styles</a:t>
             </a:r>
           </a:p>
           <a:p>
@@ -796,13 +3388,13 @@
               <a:rPr lang="en-US" smtClean="0"/>
               <a:t>Fifth level</a:t>
             </a:r>
-            <a:endParaRPr lang="en-US"/>
-          </a:p>
-        </p:txBody>
-      </p:sp>
-      <p:sp>
-        <p:nvSpPr>
-          <p:cNvPr id="4" name="Date Placeholder 3"/>
+            <a:endParaRPr lang="en-US" dirty="0"/>
+          </a:p>
+        </p:txBody>
+      </p:sp>
+      <p:sp>
+        <p:nvSpPr>
+          <p:cNvPr id="7" name="Date Placeholder 3"/>
           <p:cNvSpPr>
             <a:spLocks noGrp="1"/>
           </p:cNvSpPr>
@@ -817,7 +3409,7 @@
           <a:p>
             <a:fld id="{5BCAD085-E8A6-8845-BD4E-CB4CCA059FC4}" type="datetimeFigureOut">
               <a:rPr lang="en-US" smtClean="0"/>
-              <a:t>1/27/13</a:t>
+              <a:t>1/8/2026</a:t>
             </a:fld>
             <a:endParaRPr lang="en-US"/>
           </a:p>
@@ -868,7 +3460,7 @@
     </p:spTree>
     <p:extLst>
       <p:ext uri="{BB962C8B-B14F-4D97-AF65-F5344CB8AC3E}">
-        <p14:creationId xmlns:p14="http://schemas.microsoft.com/office/powerpoint/2010/main" val="2614314258"/>
+        <p14:creationId xmlns:p14="http://schemas.microsoft.com/office/powerpoint/2010/main" val="3764144466"/>
       </p:ext>
     </p:extLst>
   </p:cSld>
@@ -907,51 +3499,52 @@
         </p:nvSpPr>
         <p:spPr>
           <a:xfrm>
-            <a:off x="722313" y="4406900"/>
-            <a:ext cx="7772400" cy="1362075"/>
+            <a:off x="866443" y="2861734"/>
+            <a:ext cx="6620967" cy="1915647"/>
           </a:xfrm>
         </p:spPr>
         <p:txBody>
+          <a:bodyPr anchor="b"/>
+          <a:lstStyle>
+            <a:lvl1pPr algn="l">
+              <a:defRPr sz="4000" b="0" cap="none"/>
+            </a:lvl1pPr>
+          </a:lstStyle>
+          <a:p>
+            <a:r>
+              <a:rPr lang="en-US" smtClean="0"/>
+              <a:t>Click to edit Master title style</a:t>
+            </a:r>
+            <a:endParaRPr lang="en-US" dirty="0"/>
+          </a:p>
+        </p:txBody>
+      </p:sp>
+      <p:sp>
+        <p:nvSpPr>
+          <p:cNvPr id="3" name="Text Placeholder 2"/>
+          <p:cNvSpPr>
+            <a:spLocks noGrp="1"/>
+          </p:cNvSpPr>
+          <p:nvPr>
+            <p:ph type="body" idx="1"/>
+          </p:nvPr>
+        </p:nvSpPr>
+        <p:spPr>
+          <a:xfrm>
+            <a:off x="866442" y="4777381"/>
+            <a:ext cx="6620968" cy="860400"/>
+          </a:xfrm>
+        </p:spPr>
+        <p:txBody>
           <a:bodyPr anchor="t"/>
           <a:lstStyle>
-            <a:lvl1pPr algn="l">
-              <a:defRPr sz="4000" b="1" cap="all"/>
-            </a:lvl1pPr>
-          </a:lstStyle>
-          <a:p>
-            <a:r>
-              <a:rPr lang="en-US" smtClean="0"/>
-              <a:t>Click to edit Master title style</a:t>
-            </a:r>
-            <a:endParaRPr lang="en-US"/>
-          </a:p>
-        </p:txBody>
-      </p:sp>
-      <p:sp>
-        <p:nvSpPr>
-          <p:cNvPr id="3" name="Text Placeholder 2"/>
-          <p:cNvSpPr>
-            <a:spLocks noGrp="1"/>
-          </p:cNvSpPr>
-          <p:nvPr>
-            <p:ph type="body" idx="1"/>
-          </p:nvPr>
-        </p:nvSpPr>
-        <p:spPr>
-          <a:xfrm>
-            <a:off x="722313" y="2906713"/>
-            <a:ext cx="7772400" cy="1500187"/>
-          </a:xfrm>
-        </p:spPr>
-        <p:txBody>
-          <a:bodyPr anchor="b"/>
-          <a:lstStyle>
-            <a:lvl1pPr marL="0" indent="0">
-              <a:buNone/>
-              <a:defRPr sz="2000">
+            <a:lvl1pPr marL="0" indent="0" algn="l">
+              <a:buNone/>
+              <a:defRPr sz="2000" cap="all">
                 <a:solidFill>
-                  <a:schemeClr val="tx1">
-                    <a:tint val="75000"/>
+                  <a:schemeClr val="bg2">
+                    <a:lumMod val="40000"/>
+                    <a:lumOff val="60000"/>
                   </a:schemeClr>
                 </a:solidFill>
               </a:defRPr>
@@ -1041,7 +3634,7 @@
             <a:pPr lvl="0"/>
             <a:r>
               <a:rPr lang="en-US" smtClean="0"/>
-              <a:t>Click to edit Master text styles</a:t>
+              <a:t>Edit Master text styles</a:t>
             </a:r>
           </a:p>
         </p:txBody>
@@ -1063,7 +3656,7 @@
           <a:p>
             <a:fld id="{5BCAD085-E8A6-8845-BD4E-CB4CCA059FC4}" type="datetimeFigureOut">
               <a:rPr lang="en-US" smtClean="0"/>
-              <a:t>1/27/13</a:t>
+              <a:t>1/8/2026</a:t>
             </a:fld>
             <a:endParaRPr lang="en-US"/>
           </a:p>
@@ -1114,7 +3707,7 @@
     </p:spTree>
     <p:extLst>
       <p:ext uri="{BB962C8B-B14F-4D97-AF65-F5344CB8AC3E}">
-        <p14:creationId xmlns:p14="http://schemas.microsoft.com/office/powerpoint/2010/main" val="960648375"/>
+        <p14:creationId xmlns:p14="http://schemas.microsoft.com/office/powerpoint/2010/main" val="2562182595"/>
       </p:ext>
     </p:extLst>
   </p:cSld>
@@ -1160,7 +3753,7 @@
               <a:rPr lang="en-US" smtClean="0"/>
               <a:t>Click to edit Master title style</a:t>
             </a:r>
-            <a:endParaRPr lang="en-US"/>
+            <a:endParaRPr lang="en-US" dirty="0"/>
           </a:p>
         </p:txBody>
       </p:sp>
@@ -1176,46 +3769,48 @@
         </p:nvSpPr>
         <p:spPr>
           <a:xfrm>
-            <a:off x="457200" y="1600200"/>
-            <a:ext cx="4038600" cy="4525963"/>
+            <a:off x="827700" y="2060576"/>
+            <a:ext cx="3298113" cy="4195763"/>
           </a:xfrm>
         </p:spPr>
         <p:txBody>
-          <a:bodyPr/>
+          <a:bodyPr>
+            <a:normAutofit/>
+          </a:bodyPr>
           <a:lstStyle>
             <a:lvl1pPr>
-              <a:defRPr sz="2800"/>
+              <a:defRPr sz="1800"/>
             </a:lvl1pPr>
             <a:lvl2pPr>
-              <a:defRPr sz="2400"/>
+              <a:defRPr sz="1600"/>
             </a:lvl2pPr>
             <a:lvl3pPr>
-              <a:defRPr sz="2000"/>
+              <a:defRPr sz="1400"/>
             </a:lvl3pPr>
             <a:lvl4pPr>
-              <a:defRPr sz="1800"/>
+              <a:defRPr sz="1200"/>
             </a:lvl4pPr>
             <a:lvl5pPr>
-              <a:defRPr sz="1800"/>
+              <a:defRPr sz="1200"/>
             </a:lvl5pPr>
             <a:lvl6pPr>
-              <a:defRPr sz="1800"/>
+              <a:defRPr sz="1200"/>
             </a:lvl6pPr>
             <a:lvl7pPr>
-              <a:defRPr sz="1800"/>
+              <a:defRPr sz="1200"/>
             </a:lvl7pPr>
             <a:lvl8pPr>
-              <a:defRPr sz="1800"/>
+              <a:defRPr sz="1200"/>
             </a:lvl8pPr>
             <a:lvl9pPr>
-              <a:defRPr sz="1800"/>
+              <a:defRPr sz="1200"/>
             </a:lvl9pPr>
           </a:lstStyle>
           <a:p>
             <a:pPr lvl="0"/>
             <a:r>
               <a:rPr lang="en-US" smtClean="0"/>
-              <a:t>Click to edit Master text styles</a:t>
+              <a:t>Edit Master text styles</a:t>
             </a:r>
           </a:p>
           <a:p>
@@ -1245,7 +3840,7 @@
               <a:rPr lang="en-US" smtClean="0"/>
               <a:t>Fifth level</a:t>
             </a:r>
-            <a:endParaRPr lang="en-US"/>
+            <a:endParaRPr lang="en-US" dirty="0"/>
           </a:p>
         </p:txBody>
       </p:sp>
@@ -1261,46 +3856,48 @@
         </p:nvSpPr>
         <p:spPr>
           <a:xfrm>
-            <a:off x="4648200" y="1600200"/>
-            <a:ext cx="4038600" cy="4525963"/>
+            <a:off x="4241975" y="2056093"/>
+            <a:ext cx="3298115" cy="4200245"/>
           </a:xfrm>
         </p:spPr>
         <p:txBody>
-          <a:bodyPr/>
+          <a:bodyPr>
+            <a:normAutofit/>
+          </a:bodyPr>
           <a:lstStyle>
             <a:lvl1pPr>
-              <a:defRPr sz="2800"/>
+              <a:defRPr sz="1800"/>
             </a:lvl1pPr>
             <a:lvl2pPr>
-              <a:defRPr sz="2400"/>
+              <a:defRPr sz="1600"/>
             </a:lvl2pPr>
             <a:lvl3pPr>
-              <a:defRPr sz="2000"/>
+              <a:defRPr sz="1400"/>
             </a:lvl3pPr>
             <a:lvl4pPr>
-              <a:defRPr sz="1800"/>
+              <a:defRPr sz="1200"/>
             </a:lvl4pPr>
             <a:lvl5pPr>
-              <a:defRPr sz="1800"/>
+              <a:defRPr sz="1200"/>
             </a:lvl5pPr>
             <a:lvl6pPr>
-              <a:defRPr sz="1800"/>
+              <a:defRPr sz="1200"/>
             </a:lvl6pPr>
             <a:lvl7pPr>
-              <a:defRPr sz="1800"/>
+              <a:defRPr sz="1200"/>
             </a:lvl7pPr>
             <a:lvl8pPr>
-              <a:defRPr sz="1800"/>
+              <a:defRPr sz="1200"/>
             </a:lvl8pPr>
             <a:lvl9pPr>
-              <a:defRPr sz="1800"/>
+              <a:defRPr sz="1200"/>
             </a:lvl9pPr>
           </a:lstStyle>
           <a:p>
             <a:pPr lvl="0"/>
             <a:r>
               <a:rPr lang="en-US" smtClean="0"/>
-              <a:t>Click to edit Master text styles</a:t>
+              <a:t>Edit Master text styles</a:t>
             </a:r>
           </a:p>
           <a:p>
@@ -1330,7 +3927,7 @@
               <a:rPr lang="en-US" smtClean="0"/>
               <a:t>Fifth level</a:t>
             </a:r>
-            <a:endParaRPr lang="en-US"/>
+            <a:endParaRPr lang="en-US" dirty="0"/>
           </a:p>
         </p:txBody>
       </p:sp>
@@ -1351,7 +3948,7 @@
           <a:p>
             <a:fld id="{5BCAD085-E8A6-8845-BD4E-CB4CCA059FC4}" type="datetimeFigureOut">
               <a:rPr lang="en-US" smtClean="0"/>
-              <a:t>1/27/13</a:t>
+              <a:t>1/8/2026</a:t>
             </a:fld>
             <a:endParaRPr lang="en-US"/>
           </a:p>
@@ -1402,7 +3999,7 @@
     </p:spTree>
     <p:extLst>
       <p:ext uri="{BB962C8B-B14F-4D97-AF65-F5344CB8AC3E}">
-        <p14:creationId xmlns:p14="http://schemas.microsoft.com/office/powerpoint/2010/main" val="2782244947"/>
+        <p14:creationId xmlns:p14="http://schemas.microsoft.com/office/powerpoint/2010/main" val="3473091734"/>
       </p:ext>
     </p:extLst>
   </p:cSld>
@@ -1452,7 +4049,7 @@
               <a:rPr lang="en-US" smtClean="0"/>
               <a:t>Click to edit Master title style</a:t>
             </a:r>
-            <a:endParaRPr lang="en-US"/>
+            <a:endParaRPr lang="en-US" dirty="0"/>
           </a:p>
         </p:txBody>
       </p:sp>
@@ -1468,16 +4065,25 @@
         </p:nvSpPr>
         <p:spPr>
           <a:xfrm>
-            <a:off x="457200" y="1535113"/>
-            <a:ext cx="4040188" cy="639762"/>
+            <a:off x="827700" y="1905000"/>
+            <a:ext cx="3298112" cy="576262"/>
           </a:xfrm>
         </p:spPr>
         <p:txBody>
-          <a:bodyPr anchor="b"/>
+          <a:bodyPr anchor="b">
+            <a:noAutofit/>
+          </a:bodyPr>
           <a:lstStyle>
             <a:lvl1pPr marL="0" indent="0">
               <a:buNone/>
-              <a:defRPr sz="2400" b="1"/>
+              <a:defRPr sz="2400" b="0">
+                <a:solidFill>
+                  <a:schemeClr val="bg2">
+                    <a:lumMod val="40000"/>
+                    <a:lumOff val="60000"/>
+                  </a:schemeClr>
+                </a:solidFill>
+              </a:defRPr>
             </a:lvl1pPr>
             <a:lvl2pPr marL="457200" indent="0">
               <a:buNone/>
@@ -1516,7 +4122,7 @@
             <a:pPr lvl="0"/>
             <a:r>
               <a:rPr lang="en-US" smtClean="0"/>
-              <a:t>Click to edit Master text styles</a:t>
+              <a:t>Edit Master text styles</a:t>
             </a:r>
           </a:p>
         </p:txBody>
@@ -1533,46 +4139,48 @@
         </p:nvSpPr>
         <p:spPr>
           <a:xfrm>
-            <a:off x="457200" y="2174875"/>
-            <a:ext cx="4040188" cy="3951288"/>
+            <a:off x="827700" y="2514600"/>
+            <a:ext cx="3298113" cy="3741738"/>
           </a:xfrm>
         </p:spPr>
         <p:txBody>
-          <a:bodyPr/>
+          <a:bodyPr>
+            <a:normAutofit/>
+          </a:bodyPr>
           <a:lstStyle>
             <a:lvl1pPr>
-              <a:defRPr sz="2400"/>
+              <a:defRPr sz="1800"/>
             </a:lvl1pPr>
             <a:lvl2pPr>
-              <a:defRPr sz="2000"/>
+              <a:defRPr sz="1600"/>
             </a:lvl2pPr>
             <a:lvl3pPr>
-              <a:defRPr sz="1800"/>
+              <a:defRPr sz="1400"/>
             </a:lvl3pPr>
             <a:lvl4pPr>
-              <a:defRPr sz="1600"/>
+              <a:defRPr sz="1200"/>
             </a:lvl4pPr>
             <a:lvl5pPr>
-              <a:defRPr sz="1600"/>
+              <a:defRPr sz="1200"/>
             </a:lvl5pPr>
             <a:lvl6pPr>
-              <a:defRPr sz="1600"/>
+              <a:defRPr sz="1200"/>
             </a:lvl6pPr>
             <a:lvl7pPr>
-              <a:defRPr sz="1600"/>
+              <a:defRPr sz="1200"/>
             </a:lvl7pPr>
             <a:lvl8pPr>
-              <a:defRPr sz="1600"/>
+              <a:defRPr sz="1200"/>
             </a:lvl8pPr>
             <a:lvl9pPr>
-              <a:defRPr sz="1600"/>
+              <a:defRPr sz="1200"/>
             </a:lvl9pPr>
           </a:lstStyle>
           <a:p>
             <a:pPr lvl="0"/>
             <a:r>
               <a:rPr lang="en-US" smtClean="0"/>
-              <a:t>Click to edit Master text styles</a:t>
+              <a:t>Edit Master text styles</a:t>
             </a:r>
           </a:p>
           <a:p>
@@ -1602,7 +4210,7 @@
               <a:rPr lang="en-US" smtClean="0"/>
               <a:t>Fifth level</a:t>
             </a:r>
-            <a:endParaRPr lang="en-US"/>
+            <a:endParaRPr lang="en-US" dirty="0"/>
           </a:p>
         </p:txBody>
       </p:sp>
@@ -1618,16 +4226,25 @@
         </p:nvSpPr>
         <p:spPr>
           <a:xfrm>
-            <a:off x="4645025" y="1535113"/>
-            <a:ext cx="4041775" cy="639762"/>
+            <a:off x="4241976" y="1905000"/>
+            <a:ext cx="3298113" cy="576262"/>
           </a:xfrm>
         </p:spPr>
         <p:txBody>
-          <a:bodyPr anchor="b"/>
+          <a:bodyPr anchor="b">
+            <a:noAutofit/>
+          </a:bodyPr>
           <a:lstStyle>
             <a:lvl1pPr marL="0" indent="0">
               <a:buNone/>
-              <a:defRPr sz="2400" b="1"/>
+              <a:defRPr sz="2400" b="0">
+                <a:solidFill>
+                  <a:schemeClr val="bg2">
+                    <a:lumMod val="40000"/>
+                    <a:lumOff val="60000"/>
+                  </a:schemeClr>
+                </a:solidFill>
+              </a:defRPr>
             </a:lvl1pPr>
             <a:lvl2pPr marL="457200" indent="0">
               <a:buNone/>
@@ -1666,7 +4283,7 @@
             <a:pPr lvl="0"/>
             <a:r>
               <a:rPr lang="en-US" smtClean="0"/>
-              <a:t>Click to edit Master text styles</a:t>
+              <a:t>Edit Master text styles</a:t>
             </a:r>
           </a:p>
         </p:txBody>
@@ -1683,46 +4300,48 @@
         </p:nvSpPr>
         <p:spPr>
           <a:xfrm>
-            <a:off x="4645025" y="2174875"/>
-            <a:ext cx="4041775" cy="3951288"/>
+            <a:off x="4241976" y="2514600"/>
+            <a:ext cx="3298113" cy="3741738"/>
           </a:xfrm>
         </p:spPr>
         <p:txBody>
-          <a:bodyPr/>
+          <a:bodyPr>
+            <a:normAutofit/>
+          </a:bodyPr>
           <a:lstStyle>
             <a:lvl1pPr>
-              <a:defRPr sz="2400"/>
+              <a:defRPr sz="1800"/>
             </a:lvl1pPr>
             <a:lvl2pPr>
-              <a:defRPr sz="2000"/>
+              <a:defRPr sz="1600"/>
             </a:lvl2pPr>
             <a:lvl3pPr>
-              <a:defRPr sz="1800"/>
+              <a:defRPr sz="1400"/>
             </a:lvl3pPr>
             <a:lvl4pPr>
-              <a:defRPr sz="1600"/>
+              <a:defRPr sz="1200"/>
             </a:lvl4pPr>
             <a:lvl5pPr>
-              <a:defRPr sz="1600"/>
+              <a:defRPr sz="1200"/>
             </a:lvl5pPr>
             <a:lvl6pPr>
-              <a:defRPr sz="1600"/>
+              <a:defRPr sz="1200"/>
             </a:lvl6pPr>
             <a:lvl7pPr>
-              <a:defRPr sz="1600"/>
+              <a:defRPr sz="1200"/>
             </a:lvl7pPr>
             <a:lvl8pPr>
-              <a:defRPr sz="1600"/>
+              <a:defRPr sz="1200"/>
             </a:lvl8pPr>
             <a:lvl9pPr>
-              <a:defRPr sz="1600"/>
+              <a:defRPr sz="1200"/>
             </a:lvl9pPr>
           </a:lstStyle>
           <a:p>
             <a:pPr lvl="0"/>
             <a:r>
               <a:rPr lang="en-US" smtClean="0"/>
-              <a:t>Click to edit Master text styles</a:t>
+              <a:t>Edit Master text styles</a:t>
             </a:r>
           </a:p>
           <a:p>
@@ -1752,7 +4371,7 @@
               <a:rPr lang="en-US" smtClean="0"/>
               <a:t>Fifth level</a:t>
             </a:r>
-            <a:endParaRPr lang="en-US"/>
+            <a:endParaRPr lang="en-US" dirty="0"/>
           </a:p>
         </p:txBody>
       </p:sp>
@@ -1773,7 +4392,7 @@
           <a:p>
             <a:fld id="{5BCAD085-E8A6-8845-BD4E-CB4CCA059FC4}" type="datetimeFigureOut">
               <a:rPr lang="en-US" smtClean="0"/>
-              <a:t>1/27/13</a:t>
+              <a:t>1/8/2026</a:t>
             </a:fld>
             <a:endParaRPr lang="en-US"/>
           </a:p>
@@ -1824,7 +4443,7 @@
     </p:spTree>
     <p:extLst>
       <p:ext uri="{BB962C8B-B14F-4D97-AF65-F5344CB8AC3E}">
-        <p14:creationId xmlns:p14="http://schemas.microsoft.com/office/powerpoint/2010/main" val="990158736"/>
+        <p14:creationId xmlns:p14="http://schemas.microsoft.com/office/powerpoint/2010/main" val="1985644598"/>
       </p:ext>
     </p:extLst>
   </p:cSld>
@@ -1870,13 +4489,13 @@
               <a:rPr lang="en-US" smtClean="0"/>
               <a:t>Click to edit Master title style</a:t>
             </a:r>
-            <a:endParaRPr lang="en-US"/>
-          </a:p>
-        </p:txBody>
-      </p:sp>
-      <p:sp>
-        <p:nvSpPr>
-          <p:cNvPr id="3" name="Date Placeholder 2"/>
+            <a:endParaRPr lang="en-US" dirty="0"/>
+          </a:p>
+        </p:txBody>
+      </p:sp>
+      <p:sp>
+        <p:nvSpPr>
+          <p:cNvPr id="7" name="Date Placeholder 2"/>
           <p:cNvSpPr>
             <a:spLocks noGrp="1"/>
           </p:cNvSpPr>
@@ -1891,7 +4510,7 @@
           <a:p>
             <a:fld id="{5BCAD085-E8A6-8845-BD4E-CB4CCA059FC4}" type="datetimeFigureOut">
               <a:rPr lang="en-US" smtClean="0"/>
-              <a:t>1/27/13</a:t>
+              <a:t>1/8/2026</a:t>
             </a:fld>
             <a:endParaRPr lang="en-US"/>
           </a:p>
@@ -1899,7 +4518,7 @@
       </p:sp>
       <p:sp>
         <p:nvSpPr>
-          <p:cNvPr id="4" name="Footer Placeholder 3"/>
+          <p:cNvPr id="5" name="Footer Placeholder 3"/>
           <p:cNvSpPr>
             <a:spLocks noGrp="1"/>
           </p:cNvSpPr>
@@ -1918,7 +4537,7 @@
       </p:sp>
       <p:sp>
         <p:nvSpPr>
-          <p:cNvPr id="5" name="Slide Number Placeholder 4"/>
+          <p:cNvPr id="6" name="Slide Number Placeholder 4"/>
           <p:cNvSpPr>
             <a:spLocks noGrp="1"/>
           </p:cNvSpPr>
@@ -1942,7 +4561,7 @@
     </p:spTree>
     <p:extLst>
       <p:ext uri="{BB962C8B-B14F-4D97-AF65-F5344CB8AC3E}">
-        <p14:creationId xmlns:p14="http://schemas.microsoft.com/office/powerpoint/2010/main" val="727027711"/>
+        <p14:creationId xmlns:p14="http://schemas.microsoft.com/office/powerpoint/2010/main" val="962687394"/>
       </p:ext>
     </p:extLst>
   </p:cSld>
@@ -1971,7 +4590,7 @@
       </p:grpSpPr>
       <p:sp>
         <p:nvSpPr>
-          <p:cNvPr id="2" name="Date Placeholder 1"/>
+          <p:cNvPr id="7" name="Date Placeholder 1"/>
           <p:cNvSpPr>
             <a:spLocks noGrp="1"/>
           </p:cNvSpPr>
@@ -1986,7 +4605,7 @@
           <a:p>
             <a:fld id="{5BCAD085-E8A6-8845-BD4E-CB4CCA059FC4}" type="datetimeFigureOut">
               <a:rPr lang="en-US" smtClean="0"/>
-              <a:t>1/27/13</a:t>
+              <a:t>1/8/2026</a:t>
             </a:fld>
             <a:endParaRPr lang="en-US"/>
           </a:p>
@@ -1994,7 +4613,7 @@
       </p:sp>
       <p:sp>
         <p:nvSpPr>
-          <p:cNvPr id="3" name="Footer Placeholder 2"/>
+          <p:cNvPr id="5" name="Footer Placeholder 2"/>
           <p:cNvSpPr>
             <a:spLocks noGrp="1"/>
           </p:cNvSpPr>
@@ -2013,7 +4632,7 @@
       </p:sp>
       <p:sp>
         <p:nvSpPr>
-          <p:cNvPr id="4" name="Slide Number Placeholder 3"/>
+          <p:cNvPr id="6" name="Slide Number Placeholder 3"/>
           <p:cNvSpPr>
             <a:spLocks noGrp="1"/>
           </p:cNvSpPr>
@@ -2037,7 +4656,7 @@
     </p:spTree>
     <p:extLst>
       <p:ext uri="{BB962C8B-B14F-4D97-AF65-F5344CB8AC3E}">
-        <p14:creationId xmlns:p14="http://schemas.microsoft.com/office/powerpoint/2010/main" val="1212999818"/>
+        <p14:creationId xmlns:p14="http://schemas.microsoft.com/office/powerpoint/2010/main" val="904935546"/>
       </p:ext>
     </p:extLst>
   </p:cSld>
@@ -2076,15 +4695,15 @@
         </p:nvSpPr>
         <p:spPr>
           <a:xfrm>
-            <a:off x="457200" y="273050"/>
-            <a:ext cx="3008313" cy="1162050"/>
+            <a:off x="866441" y="1447800"/>
+            <a:ext cx="2551462" cy="1447800"/>
           </a:xfrm>
         </p:spPr>
         <p:txBody>
           <a:bodyPr anchor="b"/>
           <a:lstStyle>
             <a:lvl1pPr algn="l">
-              <a:defRPr sz="2000" b="1"/>
+              <a:defRPr sz="2400" b="0"/>
             </a:lvl1pPr>
           </a:lstStyle>
           <a:p>
@@ -2092,7 +4711,7 @@
               <a:rPr lang="en-US" smtClean="0"/>
               <a:t>Click to edit Master title style</a:t>
             </a:r>
-            <a:endParaRPr lang="en-US"/>
+            <a:endParaRPr lang="en-US" dirty="0"/>
           </a:p>
         </p:txBody>
       </p:sp>
@@ -2108,46 +4727,48 @@
         </p:nvSpPr>
         <p:spPr>
           <a:xfrm>
-            <a:off x="3575050" y="273050"/>
-            <a:ext cx="5111750" cy="5853113"/>
+            <a:off x="3589397" y="1447800"/>
+            <a:ext cx="3898013" cy="4572000"/>
           </a:xfrm>
         </p:spPr>
         <p:txBody>
-          <a:bodyPr/>
+          <a:bodyPr anchor="ctr">
+            <a:normAutofit/>
+          </a:bodyPr>
           <a:lstStyle>
             <a:lvl1pPr>
-              <a:defRPr sz="3200"/>
+              <a:defRPr sz="2000"/>
             </a:lvl1pPr>
             <a:lvl2pPr>
-              <a:defRPr sz="2800"/>
+              <a:defRPr sz="1800"/>
             </a:lvl2pPr>
             <a:lvl3pPr>
-              <a:defRPr sz="2400"/>
+              <a:defRPr sz="1600"/>
             </a:lvl3pPr>
             <a:lvl4pPr>
-              <a:defRPr sz="2000"/>
+              <a:defRPr sz="1400"/>
             </a:lvl4pPr>
             <a:lvl5pPr>
-              <a:defRPr sz="2000"/>
+              <a:defRPr sz="1400"/>
             </a:lvl5pPr>
             <a:lvl6pPr>
-              <a:defRPr sz="2000"/>
+              <a:defRPr sz="1400"/>
             </a:lvl6pPr>
             <a:lvl7pPr>
-              <a:defRPr sz="2000"/>
+              <a:defRPr sz="1400"/>
             </a:lvl7pPr>
             <a:lvl8pPr>
-              <a:defRPr sz="2000"/>
+              <a:defRPr sz="1400"/>
             </a:lvl8pPr>
             <a:lvl9pPr>
-              <a:defRPr sz="2000"/>
+              <a:defRPr sz="1400"/>
             </a:lvl9pPr>
           </a:lstStyle>
           <a:p>
             <a:pPr lvl="0"/>
             <a:r>
               <a:rPr lang="en-US" smtClean="0"/>
-              <a:t>Click to edit Master text styles</a:t>
+              <a:t>Edit Master text styles</a:t>
             </a:r>
           </a:p>
           <a:p>
@@ -2177,7 +4798,7 @@
               <a:rPr lang="en-US" smtClean="0"/>
               <a:t>Fifth level</a:t>
             </a:r>
-            <a:endParaRPr lang="en-US"/>
+            <a:endParaRPr lang="en-US" dirty="0"/>
           </a:p>
         </p:txBody>
       </p:sp>
@@ -2193,8 +4814,8 @@
         </p:nvSpPr>
         <p:spPr>
           <a:xfrm>
-            <a:off x="457200" y="1435100"/>
-            <a:ext cx="3008313" cy="4691063"/>
+            <a:off x="866441" y="3129281"/>
+            <a:ext cx="2551462" cy="2895599"/>
           </a:xfrm>
         </p:spPr>
         <p:txBody>
@@ -2241,14 +4862,14 @@
             <a:pPr lvl="0"/>
             <a:r>
               <a:rPr lang="en-US" smtClean="0"/>
-              <a:t>Click to edit Master text styles</a:t>
-            </a:r>
-          </a:p>
-        </p:txBody>
-      </p:sp>
-      <p:sp>
-        <p:nvSpPr>
-          <p:cNvPr id="5" name="Date Placeholder 4"/>
+              <a:t>Edit Master text styles</a:t>
+            </a:r>
+          </a:p>
+        </p:txBody>
+      </p:sp>
+      <p:sp>
+        <p:nvSpPr>
+          <p:cNvPr id="7" name="Date Placeholder 4"/>
           <p:cNvSpPr>
             <a:spLocks noGrp="1"/>
           </p:cNvSpPr>
@@ -2263,7 +4884,7 @@
           <a:p>
             <a:fld id="{5BCAD085-E8A6-8845-BD4E-CB4CCA059FC4}" type="datetimeFigureOut">
               <a:rPr lang="en-US" smtClean="0"/>
-              <a:t>1/27/13</a:t>
+              <a:t>1/8/2026</a:t>
             </a:fld>
             <a:endParaRPr lang="en-US"/>
           </a:p>
@@ -2271,7 +4892,7 @@
       </p:sp>
       <p:sp>
         <p:nvSpPr>
-          <p:cNvPr id="6" name="Footer Placeholder 5"/>
+          <p:cNvPr id="5" name="Footer Placeholder 5"/>
           <p:cNvSpPr>
             <a:spLocks noGrp="1"/>
           </p:cNvSpPr>
@@ -2290,7 +4911,7 @@
       </p:sp>
       <p:sp>
         <p:nvSpPr>
-          <p:cNvPr id="7" name="Slide Number Placeholder 6"/>
+          <p:cNvPr id="6" name="Slide Number Placeholder 6"/>
           <p:cNvSpPr>
             <a:spLocks noGrp="1"/>
           </p:cNvSpPr>
@@ -2314,7 +4935,7 @@
     </p:spTree>
     <p:extLst>
       <p:ext uri="{BB962C8B-B14F-4D97-AF65-F5344CB8AC3E}">
-        <p14:creationId xmlns:p14="http://schemas.microsoft.com/office/powerpoint/2010/main" val="1840726560"/>
+        <p14:creationId xmlns:p14="http://schemas.microsoft.com/office/powerpoint/2010/main" val="1019730457"/>
       </p:ext>
     </p:extLst>
   </p:cSld>
@@ -2353,15 +4974,17 @@
         </p:nvSpPr>
         <p:spPr>
           <a:xfrm>
-            <a:off x="1792288" y="4800600"/>
-            <a:ext cx="5486400" cy="566738"/>
+            <a:off x="865656" y="1854192"/>
+            <a:ext cx="3820674" cy="1574808"/>
           </a:xfrm>
         </p:spPr>
         <p:txBody>
-          <a:bodyPr anchor="b"/>
+          <a:bodyPr anchor="b">
+            <a:normAutofit/>
+          </a:bodyPr>
           <a:lstStyle>
             <a:lvl1pPr algn="l">
-              <a:defRPr sz="2000" b="1"/>
+              <a:defRPr sz="3600" b="0"/>
             </a:lvl1pPr>
           </a:lstStyle>
           <a:p>
@@ -2369,7 +4992,7 @@
               <a:rPr lang="en-US" smtClean="0"/>
               <a:t>Click to edit Master title style</a:t>
             </a:r>
-            <a:endParaRPr lang="en-US"/>
+            <a:endParaRPr lang="en-US" dirty="0"/>
           </a:p>
         </p:txBody>
       </p:sp>
@@ -2377,7 +5000,7 @@
         <p:nvSpPr>
           <p:cNvPr id="3" name="Picture Placeholder 2"/>
           <p:cNvSpPr>
-            <a:spLocks noGrp="1"/>
+            <a:spLocks noGrp="1" noChangeAspect="1"/>
           </p:cNvSpPr>
           <p:nvPr>
             <p:ph type="pic" idx="1"/>
@@ -2385,73 +5008,93 @@
         </p:nvSpPr>
         <p:spPr>
           <a:xfrm>
-            <a:off x="1792288" y="612775"/>
-            <a:ext cx="5486400" cy="4114800"/>
+            <a:off x="5213517" y="1143000"/>
+            <a:ext cx="2400925" cy="4572000"/>
+          </a:xfrm>
+          <a:prstGeom prst="roundRect">
+            <a:avLst>
+              <a:gd name="adj" fmla="val 1858"/>
+            </a:avLst>
+          </a:prstGeom>
+          <a:effectLst>
+            <a:outerShdw blurRad="50800" dist="50800" dir="5400000" algn="tl" rotWithShape="0">
+              <a:srgbClr val="000000">
+                <a:alpha val="43000"/>
+              </a:srgbClr>
+            </a:outerShdw>
+          </a:effectLst>
+        </p:spPr>
+        <p:txBody>
+          <a:bodyPr anchor="t">
+            <a:normAutofit/>
+          </a:bodyPr>
+          <a:lstStyle>
+            <a:lvl1pPr marL="0" indent="0" algn="ctr">
+              <a:buNone/>
+              <a:defRPr sz="1600"/>
+            </a:lvl1pPr>
+            <a:lvl2pPr marL="457200" indent="0">
+              <a:buNone/>
+              <a:defRPr sz="1600"/>
+            </a:lvl2pPr>
+            <a:lvl3pPr marL="914400" indent="0">
+              <a:buNone/>
+              <a:defRPr sz="1600"/>
+            </a:lvl3pPr>
+            <a:lvl4pPr marL="1371600" indent="0">
+              <a:buNone/>
+              <a:defRPr sz="1600"/>
+            </a:lvl4pPr>
+            <a:lvl5pPr marL="1828800" indent="0">
+              <a:buNone/>
+              <a:defRPr sz="1600"/>
+            </a:lvl5pPr>
+            <a:lvl6pPr marL="2286000" indent="0">
+              <a:buNone/>
+              <a:defRPr sz="1600"/>
+            </a:lvl6pPr>
+            <a:lvl7pPr marL="2743200" indent="0">
+              <a:buNone/>
+              <a:defRPr sz="1600"/>
+            </a:lvl7pPr>
+            <a:lvl8pPr marL="3200400" indent="0">
+              <a:buNone/>
+              <a:defRPr sz="1600"/>
+            </a:lvl8pPr>
+            <a:lvl9pPr marL="3657600" indent="0">
+              <a:buNone/>
+              <a:defRPr sz="1600"/>
+            </a:lvl9pPr>
+          </a:lstStyle>
+          <a:p>
+            <a:r>
+              <a:rPr lang="en-US" smtClean="0"/>
+              <a:t>Click icon to add picture</a:t>
+            </a:r>
+            <a:endParaRPr lang="en-US" dirty="0"/>
+          </a:p>
+        </p:txBody>
+      </p:sp>
+      <p:sp>
+        <p:nvSpPr>
+          <p:cNvPr id="4" name="Text Placeholder 3"/>
+          <p:cNvSpPr>
+            <a:spLocks noGrp="1"/>
+          </p:cNvSpPr>
+          <p:nvPr>
+            <p:ph type="body" sz="half" idx="2"/>
+          </p:nvPr>
+        </p:nvSpPr>
+        <p:spPr>
+          <a:xfrm>
+            <a:off x="866441" y="3657600"/>
+            <a:ext cx="3814728" cy="1371600"/>
           </a:xfrm>
         </p:spPr>
         <p:txBody>
-          <a:bodyPr/>
-          <a:lstStyle>
-            <a:lvl1pPr marL="0" indent="0">
-              <a:buNone/>
-              <a:defRPr sz="3200"/>
-            </a:lvl1pPr>
-            <a:lvl2pPr marL="457200" indent="0">
-              <a:buNone/>
-              <a:defRPr sz="2800"/>
-            </a:lvl2pPr>
-            <a:lvl3pPr marL="914400" indent="0">
-              <a:buNone/>
-              <a:defRPr sz="2400"/>
-            </a:lvl3pPr>
-            <a:lvl4pPr marL="1371600" indent="0">
-              <a:buNone/>
-              <a:defRPr sz="2000"/>
-            </a:lvl4pPr>
-            <a:lvl5pPr marL="1828800" indent="0">
-              <a:buNone/>
-              <a:defRPr sz="2000"/>
-            </a:lvl5pPr>
-            <a:lvl6pPr marL="2286000" indent="0">
-              <a:buNone/>
-              <a:defRPr sz="2000"/>
-            </a:lvl6pPr>
-            <a:lvl7pPr marL="2743200" indent="0">
-              <a:buNone/>
-              <a:defRPr sz="2000"/>
-            </a:lvl7pPr>
-            <a:lvl8pPr marL="3200400" indent="0">
-              <a:buNone/>
-              <a:defRPr sz="2000"/>
-            </a:lvl8pPr>
-            <a:lvl9pPr marL="3657600" indent="0">
-              <a:buNone/>
-              <a:defRPr sz="2000"/>
-            </a:lvl9pPr>
-          </a:lstStyle>
-          <a:p>
-            <a:endParaRPr lang="en-US"/>
-          </a:p>
-        </p:txBody>
-      </p:sp>
-      <p:sp>
-        <p:nvSpPr>
-          <p:cNvPr id="4" name="Text Placeholder 3"/>
-          <p:cNvSpPr>
-            <a:spLocks noGrp="1"/>
-          </p:cNvSpPr>
-          <p:nvPr>
-            <p:ph type="body" sz="half" idx="2"/>
-          </p:nvPr>
-        </p:nvSpPr>
-        <p:spPr>
-          <a:xfrm>
-            <a:off x="1792288" y="5367338"/>
-            <a:ext cx="5486400" cy="804862"/>
-          </a:xfrm>
-        </p:spPr>
-        <p:txBody>
-          <a:bodyPr/>
+          <a:bodyPr>
+            <a:normAutofit/>
+          </a:bodyPr>
           <a:lstStyle>
             <a:lvl1pPr marL="0" indent="0">
               <a:buNone/>
@@ -2494,7 +5137,7 @@
             <a:pPr lvl="0"/>
             <a:r>
               <a:rPr lang="en-US" smtClean="0"/>
-              <a:t>Click to edit Master text styles</a:t>
+              <a:t>Edit Master text styles</a:t>
             </a:r>
           </a:p>
         </p:txBody>
@@ -2516,7 +5159,7 @@
           <a:p>
             <a:fld id="{5BCAD085-E8A6-8845-BD4E-CB4CCA059FC4}" type="datetimeFigureOut">
               <a:rPr lang="en-US" smtClean="0"/>
-              <a:t>1/27/13</a:t>
+              <a:t>1/8/2026</a:t>
             </a:fld>
             <a:endParaRPr lang="en-US"/>
           </a:p>
@@ -2567,7 +5210,7 @@
     </p:spTree>
     <p:extLst>
       <p:ext uri="{BB962C8B-B14F-4D97-AF65-F5344CB8AC3E}">
-        <p14:creationId xmlns:p14="http://schemas.microsoft.com/office/powerpoint/2010/main" val="3889236939"/>
+        <p14:creationId xmlns:p14="http://schemas.microsoft.com/office/powerpoint/2010/main" val="334972539"/>
       </p:ext>
     </p:extLst>
   </p:cSld>
@@ -2581,8 +5224,8 @@
 <p:sldMaster xmlns:a="http://schemas.openxmlformats.org/drawingml/2006/main" xmlns:r="http://schemas.openxmlformats.org/officeDocument/2006/relationships" xmlns:p="http://schemas.openxmlformats.org/presentationml/2006/main">
   <p:cSld>
     <p:bg>
-      <p:bgRef idx="1001">
-        <a:schemeClr val="bg1"/>
+      <p:bgRef idx="1003">
+        <a:schemeClr val="bg2"/>
       </p:bgRef>
     </p:bg>
     <p:spTree>
@@ -2601,26 +5244,62 @@
       </p:grpSpPr>
       <p:sp>
         <p:nvSpPr>
-          <p:cNvPr id="2" name="Title Placeholder 1"/>
-          <p:cNvSpPr>
-            <a:spLocks noGrp="1"/>
-          </p:cNvSpPr>
-          <p:nvPr>
-            <p:ph type="title"/>
-          </p:nvPr>
+          <p:cNvPr id="19" name="Rectangle 18"/>
+          <p:cNvSpPr/>
+          <p:nvPr/>
         </p:nvSpPr>
         <p:spPr>
           <a:xfrm>
-            <a:off x="457200" y="274638"/>
-            <a:ext cx="8229600" cy="1143000"/>
+            <a:off x="7745644" y="0"/>
+            <a:ext cx="685800" cy="1099458"/>
+          </a:xfrm>
+          <a:prstGeom prst="rect">
+            <a:avLst/>
+          </a:prstGeom>
+          <a:solidFill>
+            <a:schemeClr val="accent1"/>
+          </a:solidFill>
+          <a:ln>
+            <a:noFill/>
+          </a:ln>
+        </p:spPr>
+        <p:style>
+          <a:lnRef idx="1">
+            <a:schemeClr val="accent1"/>
+          </a:lnRef>
+          <a:fillRef idx="3">
+            <a:schemeClr val="accent1"/>
+          </a:fillRef>
+          <a:effectRef idx="2">
+            <a:schemeClr val="accent1"/>
+          </a:effectRef>
+          <a:fontRef idx="minor">
+            <a:schemeClr val="lt1"/>
+          </a:fontRef>
+        </p:style>
+      </p:sp>
+      <p:sp>
+        <p:nvSpPr>
+          <p:cNvPr id="2" name="Title Placeholder 1"/>
+          <p:cNvSpPr>
+            <a:spLocks noGrp="1"/>
+          </p:cNvSpPr>
+          <p:nvPr>
+            <p:ph type="title"/>
+          </p:nvPr>
+        </p:nvSpPr>
+        <p:spPr>
+          <a:xfrm>
+            <a:off x="484710" y="452718"/>
+            <a:ext cx="7055380" cy="1400530"/>
           </a:xfrm>
           <a:prstGeom prst="rect">
             <a:avLst/>
           </a:prstGeom>
         </p:spPr>
         <p:txBody>
-          <a:bodyPr vert="horz" lIns="91440" tIns="45720" rIns="91440" bIns="45720" rtlCol="0" anchor="ctr">
-            <a:normAutofit/>
+          <a:bodyPr vert="horz" lIns="91440" tIns="45720" rIns="91440" bIns="45720" rtlCol="0" anchor="t">
+            <a:noAutofit/>
           </a:bodyPr>
           <a:lstStyle/>
           <a:p>
@@ -2628,7 +5307,7 @@
               <a:rPr lang="en-US" smtClean="0"/>
               <a:t>Click to edit Master title style</a:t>
             </a:r>
-            <a:endParaRPr lang="en-US"/>
+            <a:endParaRPr lang="en-US" dirty="0"/>
           </a:p>
         </p:txBody>
       </p:sp>
@@ -2644,8 +5323,8 @@
         </p:nvSpPr>
         <p:spPr>
           <a:xfrm>
-            <a:off x="457200" y="1600200"/>
-            <a:ext cx="8229600" cy="4525963"/>
+            <a:off x="827700" y="2052925"/>
+            <a:ext cx="6711654" cy="4195481"/>
           </a:xfrm>
           <a:prstGeom prst="rect">
             <a:avLst/>
@@ -2660,7 +5339,7 @@
             <a:pPr lvl="0"/>
             <a:r>
               <a:rPr lang="en-US" smtClean="0"/>
-              <a:t>Click to edit Master text styles</a:t>
+              <a:t>Edit Master text styles</a:t>
             </a:r>
           </a:p>
           <a:p>
@@ -2690,7 +5369,7 @@
               <a:rPr lang="en-US" smtClean="0"/>
               <a:t>Fifth level</a:t>
             </a:r>
-            <a:endParaRPr lang="en-US"/>
+            <a:endParaRPr lang="en-US" dirty="0"/>
           </a:p>
         </p:txBody>
       </p:sp>
@@ -2705,19 +5384,99 @@
           </p:nvPr>
         </p:nvSpPr>
         <p:spPr>
-          <a:xfrm>
-            <a:off x="457200" y="6356350"/>
-            <a:ext cx="2133600" cy="365125"/>
+          <a:xfrm rot="5400000">
+            <a:off x="7494989" y="1828771"/>
+            <a:ext cx="990599" cy="228659"/>
           </a:xfrm>
           <a:prstGeom prst="rect">
             <a:avLst/>
           </a:prstGeom>
         </p:spPr>
         <p:txBody>
-          <a:bodyPr vert="horz" lIns="91440" tIns="45720" rIns="91440" bIns="45720" rtlCol="0" anchor="ctr"/>
+          <a:bodyPr vert="horz" lIns="91440" tIns="45720" rIns="91440" bIns="45720" rtlCol="0" anchor="t"/>
           <a:lstStyle>
             <a:lvl1pPr algn="l">
-              <a:defRPr sz="1200">
+              <a:defRPr sz="1100" b="0" i="0">
+                <a:solidFill>
+                  <a:schemeClr val="tx1">
+                    <a:tint val="75000"/>
+                    <a:alpha val="60000"/>
+                  </a:schemeClr>
+                </a:solidFill>
+              </a:defRPr>
+            </a:lvl1pPr>
+          </a:lstStyle>
+          <a:p>
+            <a:fld id="{5BCAD085-E8A6-8845-BD4E-CB4CCA059FC4}" type="datetimeFigureOut">
+              <a:rPr lang="en-US" smtClean="0"/>
+              <a:t>1/8/2026</a:t>
+            </a:fld>
+            <a:endParaRPr lang="en-US"/>
+          </a:p>
+        </p:txBody>
+      </p:sp>
+      <p:sp>
+        <p:nvSpPr>
+          <p:cNvPr id="5" name="Footer Placeholder 4"/>
+          <p:cNvSpPr>
+            <a:spLocks noGrp="1"/>
+          </p:cNvSpPr>
+          <p:nvPr>
+            <p:ph type="ftr" sz="quarter" idx="3"/>
+          </p:nvPr>
+        </p:nvSpPr>
+        <p:spPr>
+          <a:xfrm rot="5400000">
+            <a:off x="6233335" y="3263371"/>
+            <a:ext cx="3859795" cy="228660"/>
+          </a:xfrm>
+          <a:prstGeom prst="rect">
+            <a:avLst/>
+          </a:prstGeom>
+        </p:spPr>
+        <p:txBody>
+          <a:bodyPr vert="horz" lIns="91440" tIns="45720" rIns="91440" bIns="45720" rtlCol="0" anchor="b"/>
+          <a:lstStyle>
+            <a:lvl1pPr algn="l">
+              <a:defRPr sz="1100" b="0" i="0">
+                <a:solidFill>
+                  <a:schemeClr val="tx1">
+                    <a:tint val="75000"/>
+                    <a:alpha val="60000"/>
+                  </a:schemeClr>
+                </a:solidFill>
+              </a:defRPr>
+            </a:lvl1pPr>
+          </a:lstStyle>
+          <a:p>
+            <a:endParaRPr lang="en-US"/>
+          </a:p>
+        </p:txBody>
+      </p:sp>
+      <p:sp>
+        <p:nvSpPr>
+          <p:cNvPr id="6" name="Slide Number Placeholder 5"/>
+          <p:cNvSpPr>
+            <a:spLocks noGrp="1"/>
+          </p:cNvSpPr>
+          <p:nvPr>
+            <p:ph type="sldNum" sz="quarter" idx="4"/>
+          </p:nvPr>
+        </p:nvSpPr>
+        <p:spPr>
+          <a:xfrm>
+            <a:off x="7766431" y="295736"/>
+            <a:ext cx="628813" cy="767687"/>
+          </a:xfrm>
+          <a:prstGeom prst="rect">
+            <a:avLst/>
+          </a:prstGeom>
+        </p:spPr>
+        <p:txBody>
+          <a:bodyPr vert="horz" lIns="91440" tIns="45720" rIns="91440" bIns="45720" rtlCol="0" anchor="b"/>
+          <a:lstStyle>
+            <a:lvl1pPr algn="ctr">
+              <a:defRPr sz="2801" b="0" i="0">
                 <a:solidFill>
                   <a:schemeClr val="tx1">
                     <a:tint val="75000"/>
@@ -2727,84 +5486,6 @@
             </a:lvl1pPr>
           </a:lstStyle>
           <a:p>
-            <a:fld id="{5BCAD085-E8A6-8845-BD4E-CB4CCA059FC4}" type="datetimeFigureOut">
-              <a:rPr lang="en-US" smtClean="0"/>
-              <a:t>1/27/13</a:t>
-            </a:fld>
-            <a:endParaRPr lang="en-US"/>
-          </a:p>
-        </p:txBody>
-      </p:sp>
-      <p:sp>
-        <p:nvSpPr>
-          <p:cNvPr id="5" name="Footer Placeholder 4"/>
-          <p:cNvSpPr>
-            <a:spLocks noGrp="1"/>
-          </p:cNvSpPr>
-          <p:nvPr>
-            <p:ph type="ftr" sz="quarter" idx="3"/>
-          </p:nvPr>
-        </p:nvSpPr>
-        <p:spPr>
-          <a:xfrm>
-            <a:off x="3124200" y="6356350"/>
-            <a:ext cx="2895600" cy="365125"/>
-          </a:xfrm>
-          <a:prstGeom prst="rect">
-            <a:avLst/>
-          </a:prstGeom>
-        </p:spPr>
-        <p:txBody>
-          <a:bodyPr vert="horz" lIns="91440" tIns="45720" rIns="91440" bIns="45720" rtlCol="0" anchor="ctr"/>
-          <a:lstStyle>
-            <a:lvl1pPr algn="ctr">
-              <a:defRPr sz="1200">
-                <a:solidFill>
-                  <a:schemeClr val="tx1">
-                    <a:tint val="75000"/>
-                  </a:schemeClr>
-                </a:solidFill>
-              </a:defRPr>
-            </a:lvl1pPr>
-          </a:lstStyle>
-          <a:p>
-            <a:endParaRPr lang="en-US"/>
-          </a:p>
-        </p:txBody>
-      </p:sp>
-      <p:sp>
-        <p:nvSpPr>
-          <p:cNvPr id="6" name="Slide Number Placeholder 5"/>
-          <p:cNvSpPr>
-            <a:spLocks noGrp="1"/>
-          </p:cNvSpPr>
-          <p:nvPr>
-            <p:ph type="sldNum" sz="quarter" idx="4"/>
-          </p:nvPr>
-        </p:nvSpPr>
-        <p:spPr>
-          <a:xfrm>
-            <a:off x="6553200" y="6356350"/>
-            <a:ext cx="2133600" cy="365125"/>
-          </a:xfrm>
-          <a:prstGeom prst="rect">
-            <a:avLst/>
-          </a:prstGeom>
-        </p:spPr>
-        <p:txBody>
-          <a:bodyPr vert="horz" lIns="91440" tIns="45720" rIns="91440" bIns="45720" rtlCol="0" anchor="ctr"/>
-          <a:lstStyle>
-            <a:lvl1pPr algn="r">
-              <a:defRPr sz="1200">
-                <a:solidFill>
-                  <a:schemeClr val="tx1">
-                    <a:tint val="75000"/>
-                  </a:schemeClr>
-                </a:solidFill>
-              </a:defRPr>
-            </a:lvl1pPr>
-          </a:lstStyle>
-          <a:p>
             <a:fld id="{C1FF6DA9-008F-8B48-92A6-B652298478BF}" type="slidenum">
               <a:rPr lang="en-US" smtClean="0"/>
               <a:t>‹#›</a:t>
@@ -2816,32 +5497,121 @@
     </p:spTree>
     <p:extLst>
       <p:ext uri="{BB962C8B-B14F-4D97-AF65-F5344CB8AC3E}">
-        <p14:creationId xmlns:p14="http://schemas.microsoft.com/office/powerpoint/2010/main" val="2209977519"/>
+        <p14:creationId xmlns:p14="http://schemas.microsoft.com/office/powerpoint/2010/main" val="3534370322"/>
       </p:ext>
     </p:extLst>
   </p:cSld>
-  <p:clrMap bg1="lt1" tx1="dk1" bg2="lt2" tx2="dk2" accent1="accent1" accent2="accent2" accent3="accent3" accent4="accent4" accent5="accent5" accent6="accent6" hlink="hlink" folHlink="folHlink"/>
+  <p:clrMap bg1="dk1" tx1="lt1" bg2="dk2" tx2="lt2" accent1="accent1" accent2="accent2" accent3="accent3" accent4="accent4" accent5="accent5" accent6="accent6" hlink="hlink" folHlink="folHlink"/>
   <p:sldLayoutIdLst>
-    <p:sldLayoutId id="2147483649" r:id="rId1"/>
-    <p:sldLayoutId id="2147483650" r:id="rId2"/>
-    <p:sldLayoutId id="2147483651" r:id="rId3"/>
-    <p:sldLayoutId id="2147483652" r:id="rId4"/>
-    <p:sldLayoutId id="2147483653" r:id="rId5"/>
-    <p:sldLayoutId id="2147483654" r:id="rId6"/>
-    <p:sldLayoutId id="2147483655" r:id="rId7"/>
-    <p:sldLayoutId id="2147483656" r:id="rId8"/>
-    <p:sldLayoutId id="2147483657" r:id="rId9"/>
-    <p:sldLayoutId id="2147483658" r:id="rId10"/>
-    <p:sldLayoutId id="2147483659" r:id="rId11"/>
+    <p:sldLayoutId id="2147483697" r:id="rId1"/>
+    <p:sldLayoutId id="2147483698" r:id="rId2"/>
+    <p:sldLayoutId id="2147483699" r:id="rId3"/>
+    <p:sldLayoutId id="2147483700" r:id="rId4"/>
+    <p:sldLayoutId id="2147483701" r:id="rId5"/>
+    <p:sldLayoutId id="2147483702" r:id="rId6"/>
+    <p:sldLayoutId id="2147483703" r:id="rId7"/>
+    <p:sldLayoutId id="2147483704" r:id="rId8"/>
+    <p:sldLayoutId id="2147483705" r:id="rId9"/>
+    <p:sldLayoutId id="2147483706" r:id="rId10"/>
+    <p:sldLayoutId id="2147483707" r:id="rId11"/>
+    <p:sldLayoutId id="2147483708" r:id="rId12"/>
+    <p:sldLayoutId id="2147483709" r:id="rId13"/>
+    <p:sldLayoutId id="2147483710" r:id="rId14"/>
+    <p:sldLayoutId id="2147483711" r:id="rId15"/>
+    <p:sldLayoutId id="2147483712" r:id="rId16"/>
+    <p:sldLayoutId id="2147483713" r:id="rId17"/>
   </p:sldLayoutIdLst>
   <p:txStyles>
     <p:titleStyle>
-      <a:lvl1pPr algn="ctr" defTabSz="457200" rtl="0" eaLnBrk="1" latinLnBrk="0" hangingPunct="1">
+      <a:lvl1pPr algn="l" defTabSz="457207" rtl="0" eaLnBrk="1" latinLnBrk="0" hangingPunct="1">
         <a:spcBef>
           <a:spcPct val="0"/>
         </a:spcBef>
         <a:buNone/>
-        <a:defRPr sz="4400" kern="1200">
+        <a:defRPr sz="4200" b="0" i="0" kern="1200">
+          <a:solidFill>
+            <a:schemeClr val="tx2"/>
+          </a:solidFill>
+          <a:latin typeface="+mj-lt"/>
+          <a:ea typeface="+mj-ea"/>
+          <a:cs typeface="+mj-cs"/>
+        </a:defRPr>
+      </a:lvl1pPr>
+      <a:lvl2pPr eaLnBrk="1" hangingPunct="1">
+        <a:defRPr>
+          <a:solidFill>
+            <a:schemeClr val="tx2"/>
+          </a:solidFill>
+        </a:defRPr>
+      </a:lvl2pPr>
+      <a:lvl3pPr eaLnBrk="1" hangingPunct="1">
+        <a:defRPr>
+          <a:solidFill>
+            <a:schemeClr val="tx2"/>
+          </a:solidFill>
+        </a:defRPr>
+      </a:lvl3pPr>
+      <a:lvl4pPr eaLnBrk="1" hangingPunct="1">
+        <a:defRPr>
+          <a:solidFill>
+            <a:schemeClr val="tx2"/>
+          </a:solidFill>
+        </a:defRPr>
+      </a:lvl4pPr>
+      <a:lvl5pPr eaLnBrk="1" hangingPunct="1">
+        <a:defRPr>
+          <a:solidFill>
+            <a:schemeClr val="tx2"/>
+          </a:solidFill>
+        </a:defRPr>
+      </a:lvl5pPr>
+      <a:lvl6pPr eaLnBrk="1" hangingPunct="1">
+        <a:defRPr>
+          <a:solidFill>
+            <a:schemeClr val="tx2"/>
+          </a:solidFill>
+        </a:defRPr>
+      </a:lvl6pPr>
+      <a:lvl7pPr eaLnBrk="1" hangingPunct="1">
+        <a:defRPr>
+          <a:solidFill>
+            <a:schemeClr val="tx2"/>
+          </a:solidFill>
+        </a:defRPr>
+      </a:lvl7pPr>
+      <a:lvl8pPr eaLnBrk="1" hangingPunct="1">
+        <a:defRPr>
+          <a:solidFill>
+            <a:schemeClr val="tx2"/>
+          </a:solidFill>
+        </a:defRPr>
+      </a:lvl8pPr>
+      <a:lvl9pPr eaLnBrk="1" hangingPunct="1">
+        <a:defRPr>
+          <a:solidFill>
+            <a:schemeClr val="tx2"/>
+          </a:solidFill>
+        </a:defRPr>
+      </a:lvl9pPr>
+    </p:titleStyle>
+    <p:bodyStyle>
+      <a:lvl1pPr marL="342906" indent="-342906" algn="l" defTabSz="457207" rtl="0" eaLnBrk="1" latinLnBrk="0" hangingPunct="1">
+        <a:spcBef>
+          <a:spcPts val="1000"/>
+        </a:spcBef>
+        <a:spcAft>
+          <a:spcPts val="0"/>
+        </a:spcAft>
+        <a:buClr>
+          <a:schemeClr val="bg2">
+            <a:lumMod val="40000"/>
+            <a:lumOff val="60000"/>
+          </a:schemeClr>
+        </a:buClr>
+        <a:buSzPct val="80000"/>
+        <a:buFont typeface="Wingdings 3" charset="2"/>
+        <a:buChar char=""/>
+        <a:defRPr sz="2000" b="0" i="0" kern="1200">
           <a:solidFill>
             <a:schemeClr val="tx1"/>
           </a:solidFill>
@@ -2850,141 +5620,204 @@
           <a:cs typeface="+mj-cs"/>
         </a:defRPr>
       </a:lvl1pPr>
-    </p:titleStyle>
-    <p:bodyStyle>
-      <a:lvl1pPr marL="342900" indent="-342900" algn="l" defTabSz="457200" rtl="0" eaLnBrk="1" latinLnBrk="0" hangingPunct="1">
+      <a:lvl2pPr marL="742962" indent="-285755" algn="l" defTabSz="457207" rtl="0" eaLnBrk="1" latinLnBrk="0" hangingPunct="1">
         <a:spcBef>
-          <a:spcPct val="20000"/>
+          <a:spcPts val="1000"/>
         </a:spcBef>
-        <a:buFont typeface="Arial"/>
-        <a:buChar char="•"/>
-        <a:defRPr sz="3200" kern="1200">
+        <a:spcAft>
+          <a:spcPts val="0"/>
+        </a:spcAft>
+        <a:buClr>
+          <a:schemeClr val="bg2">
+            <a:lumMod val="40000"/>
+            <a:lumOff val="60000"/>
+          </a:schemeClr>
+        </a:buClr>
+        <a:buSzPct val="80000"/>
+        <a:buFont typeface="Wingdings 3" charset="2"/>
+        <a:buChar char=""/>
+        <a:defRPr sz="1800" b="0" i="0" kern="1200">
           <a:solidFill>
             <a:schemeClr val="tx1"/>
           </a:solidFill>
-          <a:latin typeface="+mn-lt"/>
-          <a:ea typeface="+mn-ea"/>
-          <a:cs typeface="+mn-cs"/>
+          <a:latin typeface="+mj-lt"/>
+          <a:ea typeface="+mj-ea"/>
+          <a:cs typeface="+mj-cs"/>
         </a:defRPr>
-      </a:lvl1pPr>
-      <a:lvl2pPr marL="742950" indent="-285750" algn="l" defTabSz="457200" rtl="0" eaLnBrk="1" latinLnBrk="0" hangingPunct="1">
+      </a:lvl2pPr>
+      <a:lvl3pPr marL="1143020" indent="-228604" algn="l" defTabSz="457207" rtl="0" eaLnBrk="1" latinLnBrk="0" hangingPunct="1">
         <a:spcBef>
-          <a:spcPct val="20000"/>
+          <a:spcPts val="1000"/>
         </a:spcBef>
-        <a:buFont typeface="Arial"/>
-        <a:buChar char="–"/>
-        <a:defRPr sz="2800" kern="1200">
+        <a:spcAft>
+          <a:spcPts val="0"/>
+        </a:spcAft>
+        <a:buClr>
+          <a:schemeClr val="bg2">
+            <a:lumMod val="40000"/>
+            <a:lumOff val="60000"/>
+          </a:schemeClr>
+        </a:buClr>
+        <a:buSzPct val="80000"/>
+        <a:buFont typeface="Wingdings 3" charset="2"/>
+        <a:buChar char=""/>
+        <a:defRPr sz="1600" b="0" i="0" kern="1200">
           <a:solidFill>
             <a:schemeClr val="tx1"/>
           </a:solidFill>
-          <a:latin typeface="+mn-lt"/>
-          <a:ea typeface="+mn-ea"/>
-          <a:cs typeface="+mn-cs"/>
+          <a:latin typeface="+mj-lt"/>
+          <a:ea typeface="+mj-ea"/>
+          <a:cs typeface="+mj-cs"/>
         </a:defRPr>
-      </a:lvl2pPr>
-      <a:lvl3pPr marL="1143000" indent="-228600" algn="l" defTabSz="457200" rtl="0" eaLnBrk="1" latinLnBrk="0" hangingPunct="1">
+      </a:lvl3pPr>
+      <a:lvl4pPr marL="1600227" indent="-228604" algn="l" defTabSz="457207" rtl="0" eaLnBrk="1" latinLnBrk="0" hangingPunct="1">
         <a:spcBef>
-          <a:spcPct val="20000"/>
+          <a:spcPts val="1000"/>
         </a:spcBef>
-        <a:buFont typeface="Arial"/>
-        <a:buChar char="•"/>
-        <a:defRPr sz="2400" kern="1200">
+        <a:spcAft>
+          <a:spcPts val="0"/>
+        </a:spcAft>
+        <a:buClr>
+          <a:schemeClr val="bg2">
+            <a:lumMod val="40000"/>
+            <a:lumOff val="60000"/>
+          </a:schemeClr>
+        </a:buClr>
+        <a:buSzPct val="80000"/>
+        <a:buFont typeface="Wingdings 3" charset="2"/>
+        <a:buChar char=""/>
+        <a:defRPr sz="1400" b="0" i="0" kern="1200">
           <a:solidFill>
             <a:schemeClr val="tx1"/>
           </a:solidFill>
-          <a:latin typeface="+mn-lt"/>
-          <a:ea typeface="+mn-ea"/>
-          <a:cs typeface="+mn-cs"/>
+          <a:latin typeface="+mj-lt"/>
+          <a:ea typeface="+mj-ea"/>
+          <a:cs typeface="+mj-cs"/>
         </a:defRPr>
-      </a:lvl3pPr>
-      <a:lvl4pPr marL="1600200" indent="-228600" algn="l" defTabSz="457200" rtl="0" eaLnBrk="1" latinLnBrk="0" hangingPunct="1">
+      </a:lvl4pPr>
+      <a:lvl5pPr marL="2057434" indent="-228604" algn="l" defTabSz="457207" rtl="0" eaLnBrk="1" latinLnBrk="0" hangingPunct="1">
         <a:spcBef>
-          <a:spcPct val="20000"/>
+          <a:spcPts val="1000"/>
         </a:spcBef>
-        <a:buFont typeface="Arial"/>
-        <a:buChar char="–"/>
-        <a:defRPr sz="2000" kern="1200">
+        <a:spcAft>
+          <a:spcPts val="0"/>
+        </a:spcAft>
+        <a:buClr>
+          <a:schemeClr val="bg2">
+            <a:lumMod val="40000"/>
+            <a:lumOff val="60000"/>
+          </a:schemeClr>
+        </a:buClr>
+        <a:buSzPct val="80000"/>
+        <a:buFont typeface="Wingdings 3" charset="2"/>
+        <a:buChar char=""/>
+        <a:defRPr sz="1400" b="0" i="0" kern="1200">
           <a:solidFill>
             <a:schemeClr val="tx1"/>
           </a:solidFill>
-          <a:latin typeface="+mn-lt"/>
-          <a:ea typeface="+mn-ea"/>
-          <a:cs typeface="+mn-cs"/>
+          <a:latin typeface="+mj-lt"/>
+          <a:ea typeface="+mj-ea"/>
+          <a:cs typeface="+mj-cs"/>
         </a:defRPr>
-      </a:lvl4pPr>
-      <a:lvl5pPr marL="2057400" indent="-228600" algn="l" defTabSz="457200" rtl="0" eaLnBrk="1" latinLnBrk="0" hangingPunct="1">
+      </a:lvl5pPr>
+      <a:lvl6pPr marL="2514642" indent="-228604" algn="l" defTabSz="457207" rtl="0" eaLnBrk="1" latinLnBrk="0" hangingPunct="1">
         <a:spcBef>
-          <a:spcPct val="20000"/>
+          <a:spcPts val="1000"/>
         </a:spcBef>
-        <a:buFont typeface="Arial"/>
-        <a:buChar char="»"/>
-        <a:defRPr sz="2000" kern="1200">
+        <a:spcAft>
+          <a:spcPts val="0"/>
+        </a:spcAft>
+        <a:buClr>
+          <a:schemeClr val="bg2">
+            <a:lumMod val="40000"/>
+            <a:lumOff val="60000"/>
+          </a:schemeClr>
+        </a:buClr>
+        <a:buSzPct val="80000"/>
+        <a:buFont typeface="Wingdings 3" charset="2"/>
+        <a:buChar char=""/>
+        <a:defRPr sz="1400" b="0" i="0" kern="1200">
           <a:solidFill>
             <a:schemeClr val="tx1"/>
           </a:solidFill>
-          <a:latin typeface="+mn-lt"/>
-          <a:ea typeface="+mn-ea"/>
-          <a:cs typeface="+mn-cs"/>
+          <a:latin typeface="+mj-lt"/>
+          <a:ea typeface="+mj-ea"/>
+          <a:cs typeface="+mj-cs"/>
         </a:defRPr>
-      </a:lvl5pPr>
-      <a:lvl6pPr marL="2514600" indent="-228600" algn="l" defTabSz="457200" rtl="0" eaLnBrk="1" latinLnBrk="0" hangingPunct="1">
+      </a:lvl6pPr>
+      <a:lvl7pPr marL="2971849" indent="-228604" algn="l" defTabSz="457207" rtl="0" eaLnBrk="1" latinLnBrk="0" hangingPunct="1">
         <a:spcBef>
-          <a:spcPct val="20000"/>
+          <a:spcPts val="1000"/>
         </a:spcBef>
-        <a:buFont typeface="Arial"/>
-        <a:buChar char="•"/>
-        <a:defRPr sz="2000" kern="1200">
+        <a:spcAft>
+          <a:spcPts val="0"/>
+        </a:spcAft>
+        <a:buClr>
+          <a:schemeClr val="bg2">
+            <a:lumMod val="40000"/>
+            <a:lumOff val="60000"/>
+          </a:schemeClr>
+        </a:buClr>
+        <a:buSzPct val="80000"/>
+        <a:buFont typeface="Wingdings 3" charset="2"/>
+        <a:buChar char=""/>
+        <a:defRPr sz="1400" b="0" i="0" kern="1200">
           <a:solidFill>
             <a:schemeClr val="tx1"/>
           </a:solidFill>
-          <a:latin typeface="+mn-lt"/>
-          <a:ea typeface="+mn-ea"/>
-          <a:cs typeface="+mn-cs"/>
+          <a:latin typeface="+mj-lt"/>
+          <a:ea typeface="+mj-ea"/>
+          <a:cs typeface="+mj-cs"/>
         </a:defRPr>
-      </a:lvl6pPr>
-      <a:lvl7pPr marL="2971800" indent="-228600" algn="l" defTabSz="457200" rtl="0" eaLnBrk="1" latinLnBrk="0" hangingPunct="1">
+      </a:lvl7pPr>
+      <a:lvl8pPr marL="3429057" indent="-228604" algn="l" defTabSz="457207" rtl="0" eaLnBrk="1" latinLnBrk="0" hangingPunct="1">
         <a:spcBef>
-          <a:spcPct val="20000"/>
+          <a:spcPts val="1000"/>
         </a:spcBef>
-        <a:buFont typeface="Arial"/>
-        <a:buChar char="•"/>
-        <a:defRPr sz="2000" kern="1200">
+        <a:spcAft>
+          <a:spcPts val="0"/>
+        </a:spcAft>
+        <a:buClr>
+          <a:schemeClr val="bg2">
+            <a:lumMod val="40000"/>
+            <a:lumOff val="60000"/>
+          </a:schemeClr>
+        </a:buClr>
+        <a:buSzPct val="80000"/>
+        <a:buFont typeface="Wingdings 3" charset="2"/>
+        <a:buChar char=""/>
+        <a:defRPr sz="1400" b="0" i="0" kern="1200">
           <a:solidFill>
             <a:schemeClr val="tx1"/>
           </a:solidFill>
-          <a:latin typeface="+mn-lt"/>
-          <a:ea typeface="+mn-ea"/>
-          <a:cs typeface="+mn-cs"/>
+          <a:latin typeface="+mj-lt"/>
+          <a:ea typeface="+mj-ea"/>
+          <a:cs typeface="+mj-cs"/>
         </a:defRPr>
-      </a:lvl7pPr>
-      <a:lvl8pPr marL="3429000" indent="-228600" algn="l" defTabSz="457200" rtl="0" eaLnBrk="1" latinLnBrk="0" hangingPunct="1">
+      </a:lvl8pPr>
+      <a:lvl9pPr marL="3886264" indent="-228604" algn="l" defTabSz="457207" rtl="0" eaLnBrk="1" latinLnBrk="0" hangingPunct="1">
         <a:spcBef>
-          <a:spcPct val="20000"/>
+          <a:spcPts val="1000"/>
         </a:spcBef>
-        <a:buFont typeface="Arial"/>
-        <a:buChar char="•"/>
-        <a:defRPr sz="2000" kern="1200">
+        <a:spcAft>
+          <a:spcPts val="0"/>
+        </a:spcAft>
+        <a:buClr>
+          <a:schemeClr val="bg2">
+            <a:lumMod val="40000"/>
+            <a:lumOff val="60000"/>
+          </a:schemeClr>
+        </a:buClr>
+        <a:buSzPct val="80000"/>
+        <a:buFont typeface="Wingdings 3" charset="2"/>
+        <a:buChar char=""/>
+        <a:defRPr sz="1400" b="0" i="0" kern="1200">
           <a:solidFill>
             <a:schemeClr val="tx1"/>
           </a:solidFill>
-          <a:latin typeface="+mn-lt"/>
-          <a:ea typeface="+mn-ea"/>
-          <a:cs typeface="+mn-cs"/>
-        </a:defRPr>
-      </a:lvl8pPr>
-      <a:lvl9pPr marL="3886200" indent="-228600" algn="l" defTabSz="457200" rtl="0" eaLnBrk="1" latinLnBrk="0" hangingPunct="1">
-        <a:spcBef>
-          <a:spcPct val="20000"/>
-        </a:spcBef>
-        <a:buFont typeface="Arial"/>
-        <a:buChar char="•"/>
-        <a:defRPr sz="2000" kern="1200">
-          <a:solidFill>
-            <a:schemeClr val="tx1"/>
-          </a:solidFill>
-          <a:latin typeface="+mn-lt"/>
-          <a:ea typeface="+mn-ea"/>
-          <a:cs typeface="+mn-cs"/>
+          <a:latin typeface="+mj-lt"/>
+          <a:ea typeface="+mj-ea"/>
+          <a:cs typeface="+mj-cs"/>
         </a:defRPr>
       </a:lvl9pPr>
     </p:bodyStyle>
@@ -2992,7 +5825,7 @@
       <a:defPPr>
         <a:defRPr lang="en-US"/>
       </a:defPPr>
-      <a:lvl1pPr marL="0" algn="l" defTabSz="457200" rtl="0" eaLnBrk="1" latinLnBrk="0" hangingPunct="1">
+      <a:lvl1pPr marL="0" algn="l" defTabSz="457207" rtl="0" eaLnBrk="1" latinLnBrk="0" hangingPunct="1">
         <a:defRPr sz="1800" kern="1200">
           <a:solidFill>
             <a:schemeClr val="tx1"/>
@@ -3002,7 +5835,7 @@
           <a:cs typeface="+mn-cs"/>
         </a:defRPr>
       </a:lvl1pPr>
-      <a:lvl2pPr marL="457200" algn="l" defTabSz="457200" rtl="0" eaLnBrk="1" latinLnBrk="0" hangingPunct="1">
+      <a:lvl2pPr marL="457207" algn="l" defTabSz="457207" rtl="0" eaLnBrk="1" latinLnBrk="0" hangingPunct="1">
         <a:defRPr sz="1800" kern="1200">
           <a:solidFill>
             <a:schemeClr val="tx1"/>
@@ -3012,7 +5845,7 @@
           <a:cs typeface="+mn-cs"/>
         </a:defRPr>
       </a:lvl2pPr>
-      <a:lvl3pPr marL="914400" algn="l" defTabSz="457200" rtl="0" eaLnBrk="1" latinLnBrk="0" hangingPunct="1">
+      <a:lvl3pPr marL="914415" algn="l" defTabSz="457207" rtl="0" eaLnBrk="1" latinLnBrk="0" hangingPunct="1">
         <a:defRPr sz="1800" kern="1200">
           <a:solidFill>
             <a:schemeClr val="tx1"/>
@@ -3022,7 +5855,7 @@
           <a:cs typeface="+mn-cs"/>
         </a:defRPr>
       </a:lvl3pPr>
-      <a:lvl4pPr marL="1371600" algn="l" defTabSz="457200" rtl="0" eaLnBrk="1" latinLnBrk="0" hangingPunct="1">
+      <a:lvl4pPr marL="1371622" algn="l" defTabSz="457207" rtl="0" eaLnBrk="1" latinLnBrk="0" hangingPunct="1">
         <a:defRPr sz="1800" kern="1200">
           <a:solidFill>
             <a:schemeClr val="tx1"/>
@@ -3032,7 +5865,7 @@
           <a:cs typeface="+mn-cs"/>
         </a:defRPr>
       </a:lvl4pPr>
-      <a:lvl5pPr marL="1828800" algn="l" defTabSz="457200" rtl="0" eaLnBrk="1" latinLnBrk="0" hangingPunct="1">
+      <a:lvl5pPr marL="1828831" algn="l" defTabSz="457207" rtl="0" eaLnBrk="1" latinLnBrk="0" hangingPunct="1">
         <a:defRPr sz="1800" kern="1200">
           <a:solidFill>
             <a:schemeClr val="tx1"/>
@@ -3042,7 +5875,7 @@
           <a:cs typeface="+mn-cs"/>
         </a:defRPr>
       </a:lvl5pPr>
-      <a:lvl6pPr marL="2286000" algn="l" defTabSz="457200" rtl="0" eaLnBrk="1" latinLnBrk="0" hangingPunct="1">
+      <a:lvl6pPr marL="2286038" algn="l" defTabSz="457207" rtl="0" eaLnBrk="1" latinLnBrk="0" hangingPunct="1">
         <a:defRPr sz="1800" kern="1200">
           <a:solidFill>
             <a:schemeClr val="tx1"/>
@@ -3052,7 +5885,7 @@
           <a:cs typeface="+mn-cs"/>
         </a:defRPr>
       </a:lvl6pPr>
-      <a:lvl7pPr marL="2743200" algn="l" defTabSz="457200" rtl="0" eaLnBrk="1" latinLnBrk="0" hangingPunct="1">
+      <a:lvl7pPr marL="2743246" algn="l" defTabSz="457207" rtl="0" eaLnBrk="1" latinLnBrk="0" hangingPunct="1">
         <a:defRPr sz="1800" kern="1200">
           <a:solidFill>
             <a:schemeClr val="tx1"/>
@@ -3062,7 +5895,7 @@
           <a:cs typeface="+mn-cs"/>
         </a:defRPr>
       </a:lvl7pPr>
-      <a:lvl8pPr marL="3200400" algn="l" defTabSz="457200" rtl="0" eaLnBrk="1" latinLnBrk="0" hangingPunct="1">
+      <a:lvl8pPr marL="3200453" algn="l" defTabSz="457207" rtl="0" eaLnBrk="1" latinLnBrk="0" hangingPunct="1">
         <a:defRPr sz="1800" kern="1200">
           <a:solidFill>
             <a:schemeClr val="tx1"/>
@@ -3072,7 +5905,7 @@
           <a:cs typeface="+mn-cs"/>
         </a:defRPr>
       </a:lvl8pPr>
-      <a:lvl9pPr marL="3657600" algn="l" defTabSz="457200" rtl="0" eaLnBrk="1" latinLnBrk="0" hangingPunct="1">
+      <a:lvl9pPr marL="3657661" algn="l" defTabSz="457207" rtl="0" eaLnBrk="1" latinLnBrk="0" hangingPunct="1">
         <a:defRPr sz="1800" kern="1200">
           <a:solidFill>
             <a:schemeClr val="tx1"/>
@@ -3088,7 +5921,7 @@
 </file>
 
 <file path=ppt/slides/slide1.xml><?xml version="1.0" encoding="utf-8"?>
-<p:sld xmlns:a="http://schemas.openxmlformats.org/drawingml/2006/main" xmlns:p="http://schemas.openxmlformats.org/presentationml/2006/main" xmlns:r="http://schemas.openxmlformats.org/officeDocument/2006/relationships">
+<p:sld xmlns:a="http://schemas.openxmlformats.org/drawingml/2006/main" xmlns:r="http://schemas.openxmlformats.org/officeDocument/2006/relationships" xmlns:p="http://schemas.openxmlformats.org/presentationml/2006/main">
   <p:cSld>
     <p:spTree>
       <p:nvGrpSpPr>
@@ -3096,7 +5929,14 @@
         <p:cNvGrpSpPr/>
         <p:nvPr/>
       </p:nvGrpSpPr>
-      <p:grpSpPr/>
+      <p:grpSpPr>
+        <a:xfrm>
+          <a:off x="0" y="0"/>
+          <a:ext cx="0" cy="0"/>
+          <a:chOff x="0" y="0"/>
+          <a:chExt cx="0" cy="0"/>
+        </a:xfrm>
+      </p:grpSpPr>
       <p:sp>
         <p:nvSpPr>
           <p:cNvPr id="2" name="Title 1"/>
@@ -3104,21 +5944,449 @@
             <a:spLocks noGrp="1"/>
           </p:cNvSpPr>
           <p:nvPr>
+            <p:ph type="ctrTitle"/>
+          </p:nvPr>
+        </p:nvSpPr>
+        <p:spPr>
+          <a:xfrm>
+            <a:off x="91441" y="1312164"/>
+            <a:ext cx="9096554" cy="2497186"/>
+          </a:xfrm>
+        </p:spPr>
+        <p:txBody>
+          <a:bodyPr>
+            <a:normAutofit/>
+          </a:bodyPr>
+          <a:lstStyle/>
+          <a:p>
+            <a:pPr algn="ctr"/>
+            <a:r>
+              <a:rPr lang="ur-PK" sz="8800" dirty="0"/>
+              <a:t>بِسْمِ ٱللَّهِ ٱلرَّحْمَٰنِ ٱلرَّحِيمِ</a:t>
+            </a:r>
+            <a:endParaRPr lang="en-US" sz="8800" b="1" dirty="0"/>
+          </a:p>
+        </p:txBody>
+      </p:sp>
+    </p:spTree>
+    <p:extLst>
+      <p:ext uri="{BB962C8B-B14F-4D97-AF65-F5344CB8AC3E}">
+        <p14:creationId xmlns:p14="http://schemas.microsoft.com/office/powerpoint/2010/main" val="2236583471"/>
+      </p:ext>
+    </p:extLst>
+  </p:cSld>
+  <p:clrMapOvr>
+    <a:masterClrMapping/>
+  </p:clrMapOvr>
+  <p:transition spd="slow">
+    <p:cover/>
+  </p:transition>
+  <p:timing>
+    <p:tnLst>
+      <p:par>
+        <p:cTn id="1" dur="indefinite" restart="never" nodeType="tmRoot">
+          <p:childTnLst>
+            <p:seq concurrent="1" nextAc="seek">
+              <p:cTn id="2" dur="indefinite" nodeType="mainSeq">
+                <p:childTnLst>
+                  <p:par>
+                    <p:cTn id="3" fill="hold">
+                      <p:stCondLst>
+                        <p:cond delay="indefinite"/>
+                      </p:stCondLst>
+                      <p:childTnLst>
+                        <p:par>
+                          <p:cTn id="4" fill="hold">
+                            <p:stCondLst>
+                              <p:cond delay="0"/>
+                            </p:stCondLst>
+                            <p:childTnLst>
+                              <p:par>
+                                <p:cTn id="5" presetID="2" presetClass="entr" presetSubtype="4" fill="hold" grpId="0" nodeType="clickEffect">
+                                  <p:stCondLst>
+                                    <p:cond delay="0"/>
+                                  </p:stCondLst>
+                                  <p:childTnLst>
+                                    <p:set>
+                                      <p:cBhvr>
+                                        <p:cTn id="6" dur="1" fill="hold">
+                                          <p:stCondLst>
+                                            <p:cond delay="0"/>
+                                          </p:stCondLst>
+                                        </p:cTn>
+                                        <p:tgtEl>
+                                          <p:spTgt spid="2"/>
+                                        </p:tgtEl>
+                                        <p:attrNameLst>
+                                          <p:attrName>style.visibility</p:attrName>
+                                        </p:attrNameLst>
+                                      </p:cBhvr>
+                                      <p:to>
+                                        <p:strVal val="visible"/>
+                                      </p:to>
+                                    </p:set>
+                                    <p:anim calcmode="lin" valueType="num">
+                                      <p:cBhvr additive="base">
+                                        <p:cTn id="7" dur="500" fill="hold"/>
+                                        <p:tgtEl>
+                                          <p:spTgt spid="2"/>
+                                        </p:tgtEl>
+                                        <p:attrNameLst>
+                                          <p:attrName>ppt_x</p:attrName>
+                                        </p:attrNameLst>
+                                      </p:cBhvr>
+                                      <p:tavLst>
+                                        <p:tav tm="0">
+                                          <p:val>
+                                            <p:strVal val="#ppt_x"/>
+                                          </p:val>
+                                        </p:tav>
+                                        <p:tav tm="100000">
+                                          <p:val>
+                                            <p:strVal val="#ppt_x"/>
+                                          </p:val>
+                                        </p:tav>
+                                      </p:tavLst>
+                                    </p:anim>
+                                    <p:anim calcmode="lin" valueType="num">
+                                      <p:cBhvr additive="base">
+                                        <p:cTn id="8" dur="500" fill="hold"/>
+                                        <p:tgtEl>
+                                          <p:spTgt spid="2"/>
+                                        </p:tgtEl>
+                                        <p:attrNameLst>
+                                          <p:attrName>ppt_y</p:attrName>
+                                        </p:attrNameLst>
+                                      </p:cBhvr>
+                                      <p:tavLst>
+                                        <p:tav tm="0">
+                                          <p:val>
+                                            <p:strVal val="1+#ppt_h/2"/>
+                                          </p:val>
+                                        </p:tav>
+                                        <p:tav tm="100000">
+                                          <p:val>
+                                            <p:strVal val="#ppt_y"/>
+                                          </p:val>
+                                        </p:tav>
+                                      </p:tavLst>
+                                    </p:anim>
+                                  </p:childTnLst>
+                                </p:cTn>
+                              </p:par>
+                            </p:childTnLst>
+                          </p:cTn>
+                        </p:par>
+                      </p:childTnLst>
+                    </p:cTn>
+                  </p:par>
+                </p:childTnLst>
+              </p:cTn>
+              <p:prevCondLst>
+                <p:cond evt="onPrev" delay="0">
+                  <p:tgtEl>
+                    <p:sldTgt/>
+                  </p:tgtEl>
+                </p:cond>
+              </p:prevCondLst>
+              <p:nextCondLst>
+                <p:cond evt="onNext" delay="0">
+                  <p:tgtEl>
+                    <p:sldTgt/>
+                  </p:tgtEl>
+                </p:cond>
+              </p:nextCondLst>
+            </p:seq>
+          </p:childTnLst>
+        </p:cTn>
+      </p:par>
+    </p:tnLst>
+    <p:bldLst>
+      <p:bldP spid="2" grpId="0"/>
+    </p:bldLst>
+  </p:timing>
+</p:sld>
+</file>
+
+<file path=ppt/slides/slide10.xml><?xml version="1.0" encoding="utf-8"?>
+<p:sld xmlns:a="http://schemas.openxmlformats.org/drawingml/2006/main" xmlns:r="http://schemas.openxmlformats.org/officeDocument/2006/relationships" xmlns:p="http://schemas.openxmlformats.org/presentationml/2006/main">
+  <p:cSld>
+    <p:spTree>
+      <p:nvGrpSpPr>
+        <p:cNvPr id="1" name=""/>
+        <p:cNvGrpSpPr/>
+        <p:nvPr/>
+      </p:nvGrpSpPr>
+      <p:grpSpPr>
+        <a:xfrm>
+          <a:off x="0" y="0"/>
+          <a:ext cx="0" cy="0"/>
+          <a:chOff x="0" y="0"/>
+          <a:chExt cx="0" cy="0"/>
+        </a:xfrm>
+      </p:grpSpPr>
+      <p:pic>
+        <p:nvPicPr>
+          <p:cNvPr id="4" name="Picture 3"/>
+          <p:cNvPicPr>
+            <a:picLocks noChangeAspect="1"/>
+          </p:cNvPicPr>
+          <p:nvPr/>
+        </p:nvPicPr>
+        <p:blipFill>
+          <a:blip r:embed="rId2">
+            <a:extLst>
+              <a:ext uri="{28A0092B-C50C-407E-A947-70E740481C1C}">
+                <a14:useLocalDpi xmlns:a14="http://schemas.microsoft.com/office/drawing/2010/main" val="0"/>
+              </a:ext>
+            </a:extLst>
+          </a:blip>
+          <a:stretch>
+            <a:fillRect/>
+          </a:stretch>
+        </p:blipFill>
+        <p:spPr>
+          <a:xfrm>
+            <a:off x="929913" y="1124712"/>
+            <a:ext cx="6578738" cy="4773168"/>
+          </a:xfrm>
+          <a:prstGeom prst="rect">
+            <a:avLst/>
+          </a:prstGeom>
+        </p:spPr>
+      </p:pic>
+      <p:sp>
+        <p:nvSpPr>
+          <p:cNvPr id="7" name="Title 1"/>
+          <p:cNvSpPr>
+            <a:spLocks noGrp="1"/>
+          </p:cNvSpPr>
+          <p:nvPr>
             <p:ph type="title"/>
           </p:nvPr>
         </p:nvSpPr>
+        <p:spPr>
+          <a:xfrm>
+            <a:off x="567006" y="233262"/>
+            <a:ext cx="7055380" cy="1400530"/>
+          </a:xfrm>
+        </p:spPr>
+        <p:txBody>
+          <a:bodyPr>
+            <a:normAutofit/>
+          </a:bodyPr>
+          <a:lstStyle/>
+          <a:p>
+            <a:r>
+              <a:rPr lang="en-US" dirty="0" smtClean="0"/>
+              <a:t>Web Designing</a:t>
+            </a:r>
+            <a:endParaRPr dirty="0"/>
+          </a:p>
+        </p:txBody>
+      </p:sp>
+    </p:spTree>
+    <p:extLst>
+      <p:ext uri="{BB962C8B-B14F-4D97-AF65-F5344CB8AC3E}">
+        <p14:creationId xmlns:p14="http://schemas.microsoft.com/office/powerpoint/2010/main" val="365211148"/>
+      </p:ext>
+    </p:extLst>
+  </p:cSld>
+  <p:clrMapOvr>
+    <a:masterClrMapping/>
+  </p:clrMapOvr>
+  <p:timing>
+    <p:tnLst>
+      <p:par>
+        <p:cTn id="1" dur="indefinite" restart="never" nodeType="tmRoot">
+          <p:childTnLst>
+            <p:seq concurrent="1" nextAc="seek">
+              <p:cTn id="2" dur="indefinite" nodeType="mainSeq">
+                <p:childTnLst>
+                  <p:par>
+                    <p:cTn id="3" fill="hold">
+                      <p:stCondLst>
+                        <p:cond delay="indefinite"/>
+                      </p:stCondLst>
+                      <p:childTnLst>
+                        <p:par>
+                          <p:cTn id="4" fill="hold">
+                            <p:stCondLst>
+                              <p:cond delay="0"/>
+                            </p:stCondLst>
+                            <p:childTnLst>
+                              <p:par>
+                                <p:cTn id="5" presetID="31" presetClass="entr" presetSubtype="0" fill="hold" nodeType="clickEffect">
+                                  <p:stCondLst>
+                                    <p:cond delay="0"/>
+                                  </p:stCondLst>
+                                  <p:childTnLst>
+                                    <p:set>
+                                      <p:cBhvr>
+                                        <p:cTn id="6" dur="1" fill="hold">
+                                          <p:stCondLst>
+                                            <p:cond delay="0"/>
+                                          </p:stCondLst>
+                                        </p:cTn>
+                                        <p:tgtEl>
+                                          <p:spTgt spid="4"/>
+                                        </p:tgtEl>
+                                        <p:attrNameLst>
+                                          <p:attrName>style.visibility</p:attrName>
+                                        </p:attrNameLst>
+                                      </p:cBhvr>
+                                      <p:to>
+                                        <p:strVal val="visible"/>
+                                      </p:to>
+                                    </p:set>
+                                    <p:anim calcmode="lin" valueType="num">
+                                      <p:cBhvr>
+                                        <p:cTn id="7" dur="1000" fill="hold"/>
+                                        <p:tgtEl>
+                                          <p:spTgt spid="4"/>
+                                        </p:tgtEl>
+                                        <p:attrNameLst>
+                                          <p:attrName>ppt_w</p:attrName>
+                                        </p:attrNameLst>
+                                      </p:cBhvr>
+                                      <p:tavLst>
+                                        <p:tav tm="0">
+                                          <p:val>
+                                            <p:fltVal val="0"/>
+                                          </p:val>
+                                        </p:tav>
+                                        <p:tav tm="100000">
+                                          <p:val>
+                                            <p:strVal val="#ppt_w"/>
+                                          </p:val>
+                                        </p:tav>
+                                      </p:tavLst>
+                                    </p:anim>
+                                    <p:anim calcmode="lin" valueType="num">
+                                      <p:cBhvr>
+                                        <p:cTn id="8" dur="1000" fill="hold"/>
+                                        <p:tgtEl>
+                                          <p:spTgt spid="4"/>
+                                        </p:tgtEl>
+                                        <p:attrNameLst>
+                                          <p:attrName>ppt_h</p:attrName>
+                                        </p:attrNameLst>
+                                      </p:cBhvr>
+                                      <p:tavLst>
+                                        <p:tav tm="0">
+                                          <p:val>
+                                            <p:fltVal val="0"/>
+                                          </p:val>
+                                        </p:tav>
+                                        <p:tav tm="100000">
+                                          <p:val>
+                                            <p:strVal val="#ppt_h"/>
+                                          </p:val>
+                                        </p:tav>
+                                      </p:tavLst>
+                                    </p:anim>
+                                    <p:anim calcmode="lin" valueType="num">
+                                      <p:cBhvr>
+                                        <p:cTn id="9" dur="1000" fill="hold"/>
+                                        <p:tgtEl>
+                                          <p:spTgt spid="4"/>
+                                        </p:tgtEl>
+                                        <p:attrNameLst>
+                                          <p:attrName>style.rotation</p:attrName>
+                                        </p:attrNameLst>
+                                      </p:cBhvr>
+                                      <p:tavLst>
+                                        <p:tav tm="0">
+                                          <p:val>
+                                            <p:fltVal val="90"/>
+                                          </p:val>
+                                        </p:tav>
+                                        <p:tav tm="100000">
+                                          <p:val>
+                                            <p:fltVal val="0"/>
+                                          </p:val>
+                                        </p:tav>
+                                      </p:tavLst>
+                                    </p:anim>
+                                    <p:animEffect transition="in" filter="fade">
+                                      <p:cBhvr>
+                                        <p:cTn id="10" dur="1000"/>
+                                        <p:tgtEl>
+                                          <p:spTgt spid="4"/>
+                                        </p:tgtEl>
+                                      </p:cBhvr>
+                                    </p:animEffect>
+                                  </p:childTnLst>
+                                </p:cTn>
+                              </p:par>
+                            </p:childTnLst>
+                          </p:cTn>
+                        </p:par>
+                      </p:childTnLst>
+                    </p:cTn>
+                  </p:par>
+                </p:childTnLst>
+              </p:cTn>
+              <p:prevCondLst>
+                <p:cond evt="onPrev" delay="0">
+                  <p:tgtEl>
+                    <p:sldTgt/>
+                  </p:tgtEl>
+                </p:cond>
+              </p:prevCondLst>
+              <p:nextCondLst>
+                <p:cond evt="onNext" delay="0">
+                  <p:tgtEl>
+                    <p:sldTgt/>
+                  </p:tgtEl>
+                </p:cond>
+              </p:nextCondLst>
+            </p:seq>
+          </p:childTnLst>
+        </p:cTn>
+      </p:par>
+    </p:tnLst>
+  </p:timing>
+</p:sld>
+</file>
+
+<file path=ppt/slides/slide11.xml><?xml version="1.0" encoding="utf-8"?>
+<p:sld xmlns:a="http://schemas.openxmlformats.org/drawingml/2006/main" xmlns:r="http://schemas.openxmlformats.org/officeDocument/2006/relationships" xmlns:p="http://schemas.openxmlformats.org/presentationml/2006/main">
+  <p:cSld>
+    <p:spTree>
+      <p:nvGrpSpPr>
+        <p:cNvPr id="1" name=""/>
+        <p:cNvGrpSpPr/>
+        <p:nvPr/>
+      </p:nvGrpSpPr>
+      <p:grpSpPr>
+        <a:xfrm>
+          <a:off x="0" y="0"/>
+          <a:ext cx="0" cy="0"/>
+          <a:chOff x="0" y="0"/>
+          <a:chExt cx="0" cy="0"/>
+        </a:xfrm>
+      </p:grpSpPr>
+      <p:sp>
+        <p:nvSpPr>
+          <p:cNvPr id="2" name="Title 1"/>
+          <p:cNvSpPr>
+            <a:spLocks noGrp="1"/>
+          </p:cNvSpPr>
+          <p:nvPr>
+            <p:ph type="title"/>
+          </p:nvPr>
+        </p:nvSpPr>
         <p:spPr/>
         <p:txBody>
-          <a:bodyPr/>
+          <a:bodyPr>
+            <a:normAutofit fontScale="90000"/>
+          </a:bodyPr>
           <a:lstStyle/>
           <a:p>
             <a:r>
-              <a:t>Web Designing &amp; Web Development</a:t>
-            </a:r>
-          </a:p>
-          <a:p>
-            <a:r>
-              <a:t>Demo Class</a:t>
+              <a:rPr dirty="0"/>
+              <a:t>What You Will Learn – Month 2 &amp; 3 (Web Development)</a:t>
             </a:r>
           </a:p>
         </p:txBody>
@@ -3135,29 +6403,143 @@
         </p:nvSpPr>
         <p:spPr/>
         <p:txBody>
-          <a:bodyPr/>
+          <a:bodyPr>
+            <a:noAutofit/>
+          </a:bodyPr>
           <a:lstStyle/>
           <a:p>
-            <a:r>
-              <a:t>Instructor: Muhammad Sahil</a:t>
-            </a:r>
-          </a:p>
-          <a:p>
-            <a:pPr lvl="1"/>
-            <a:r>
-              <a:t>Institute: Corvit Systems Peshawar</a:t>
-            </a:r>
-          </a:p>
-          <a:p>
-            <a:pPr lvl="1"/>
-            <a:r>
-              <a:t>Course Duration: 3 Months</a:t>
-            </a:r>
-          </a:p>
-          <a:p>
-            <a:pPr lvl="1"/>
-            <a:r>
-              <a:t>Demo Class Overview</a:t>
+            <a:pPr marL="514350" indent="-514350">
+              <a:buFont typeface="+mj-lt"/>
+              <a:buAutoNum type="arabicPeriod"/>
+            </a:pPr>
+            <a:r>
+              <a:rPr sz="2800" dirty="0"/>
+              <a:t>Advanced </a:t>
+            </a:r>
+            <a:r>
+              <a:rPr sz="2800" dirty="0" smtClean="0"/>
+              <a:t>JavaScript</a:t>
+            </a:r>
+            <a:endParaRPr lang="en-US" sz="2800" dirty="0" smtClean="0"/>
+          </a:p>
+          <a:p>
+            <a:pPr marL="914400" lvl="1" indent="-514350">
+              <a:buFont typeface="Wingdings" panose="05000000000000000000" pitchFamily="2" charset="2"/>
+              <a:buChar char="§"/>
+            </a:pPr>
+            <a:r>
+              <a:rPr sz="2400" dirty="0" smtClean="0"/>
+              <a:t>DOM </a:t>
+            </a:r>
+            <a:r>
+              <a:rPr sz="2400" dirty="0"/>
+              <a:t>&amp; </a:t>
+            </a:r>
+            <a:r>
+              <a:rPr sz="2400" dirty="0" smtClean="0"/>
+              <a:t>Events</a:t>
+            </a:r>
+            <a:r>
+              <a:rPr lang="en-US" sz="2400" dirty="0" smtClean="0"/>
+              <a:t> ,</a:t>
+            </a:r>
+            <a:r>
+              <a:rPr sz="2400" dirty="0" smtClean="0"/>
+              <a:t>APIs</a:t>
+            </a:r>
+            <a:r>
+              <a:rPr lang="en-US" sz="2400" dirty="0" smtClean="0"/>
+              <a:t>, </a:t>
+            </a:r>
+            <a:r>
+              <a:rPr sz="2400" dirty="0" smtClean="0"/>
+              <a:t>Real Projects</a:t>
+            </a:r>
+            <a:endParaRPr lang="en-US" sz="2400" dirty="0" smtClean="0"/>
+          </a:p>
+          <a:p>
+            <a:pPr marL="914400" lvl="1" indent="-514350">
+              <a:buFont typeface="Wingdings" panose="05000000000000000000" pitchFamily="2" charset="2"/>
+              <a:buChar char="§"/>
+            </a:pPr>
+            <a:r>
+              <a:rPr sz="2400" dirty="0" smtClean="0"/>
+              <a:t>Hosting </a:t>
+            </a:r>
+            <a:r>
+              <a:rPr sz="2400" dirty="0"/>
+              <a:t>&amp; </a:t>
+            </a:r>
+            <a:r>
+              <a:rPr sz="2400" dirty="0" smtClean="0"/>
+              <a:t>Deployment</a:t>
+            </a:r>
+            <a:endParaRPr lang="en-US" sz="2400" dirty="0" smtClean="0"/>
+          </a:p>
+          <a:p>
+            <a:pPr marL="914400" lvl="1" indent="-514350">
+              <a:buFont typeface="Wingdings" panose="05000000000000000000" pitchFamily="2" charset="2"/>
+              <a:buChar char="§"/>
+            </a:pPr>
+            <a:r>
+              <a:rPr sz="2400" dirty="0" smtClean="0"/>
+              <a:t>Introduction </a:t>
+            </a:r>
+            <a:r>
+              <a:rPr sz="2400" dirty="0"/>
+              <a:t>to </a:t>
+            </a:r>
+            <a:r>
+              <a:rPr sz="2400" dirty="0" smtClean="0"/>
+              <a:t>frameworks</a:t>
+            </a:r>
+            <a:endParaRPr lang="en-US" sz="2400" dirty="0"/>
+          </a:p>
+          <a:p>
+            <a:pPr marL="514350" indent="-514350">
+              <a:buFont typeface="+mj-lt"/>
+              <a:buAutoNum type="arabicPeriod"/>
+            </a:pPr>
+            <a:r>
+              <a:rPr lang="en-US" sz="2800" dirty="0" smtClean="0"/>
+              <a:t>React with Tailwind </a:t>
+            </a:r>
+            <a:r>
+              <a:rPr lang="en-US" sz="2800" dirty="0" err="1" smtClean="0"/>
+              <a:t>css</a:t>
+            </a:r>
+            <a:endParaRPr lang="en-US" sz="2800" dirty="0"/>
+          </a:p>
+          <a:p>
+            <a:pPr marL="514350" indent="-514350">
+              <a:buFont typeface="+mj-lt"/>
+              <a:buAutoNum type="arabicPeriod"/>
+            </a:pPr>
+            <a:r>
+              <a:rPr lang="en-US" sz="2800" dirty="0" err="1" smtClean="0"/>
+              <a:t>Nodejs</a:t>
+            </a:r>
+            <a:endParaRPr lang="en-US" sz="2800" dirty="0"/>
+          </a:p>
+          <a:p>
+            <a:pPr marL="514350" indent="-514350">
+              <a:buFont typeface="+mj-lt"/>
+              <a:buAutoNum type="arabicPeriod"/>
+            </a:pPr>
+            <a:r>
+              <a:rPr lang="en-US" sz="2800" dirty="0" smtClean="0"/>
+              <a:t>Express</a:t>
+            </a:r>
+            <a:endParaRPr lang="en-US" sz="2800" dirty="0"/>
+          </a:p>
+          <a:p>
+            <a:pPr marL="514350" indent="-514350">
+              <a:buFont typeface="+mj-lt"/>
+              <a:buAutoNum type="arabicPeriod"/>
+            </a:pPr>
+            <a:r>
+              <a:rPr lang="en-US" sz="2800" dirty="0" smtClean="0"/>
+              <a:t>MongoDB</a:t>
             </a:r>
           </a:p>
         </p:txBody>
@@ -3170,8 +6552,8 @@
 </p:sld>
 </file>
 
-<file path=ppt/slides/slide10.xml><?xml version="1.0" encoding="utf-8"?>
-<p:sld xmlns:a="http://schemas.openxmlformats.org/drawingml/2006/main" xmlns:p="http://schemas.openxmlformats.org/presentationml/2006/main" xmlns:r="http://schemas.openxmlformats.org/officeDocument/2006/relationships">
+<file path=ppt/slides/slide12.xml><?xml version="1.0" encoding="utf-8"?>
+<p:sld xmlns:a="http://schemas.openxmlformats.org/drawingml/2006/main" xmlns:r="http://schemas.openxmlformats.org/officeDocument/2006/relationships" xmlns:p="http://schemas.openxmlformats.org/presentationml/2006/main">
   <p:cSld>
     <p:spTree>
       <p:nvGrpSpPr>
@@ -3179,7 +6561,14 @@
         <p:cNvGrpSpPr/>
         <p:nvPr/>
       </p:nvGrpSpPr>
-      <p:grpSpPr/>
+      <p:grpSpPr>
+        <a:xfrm>
+          <a:off x="0" y="0"/>
+          <a:ext cx="0" cy="0"/>
+          <a:chOff x="0" y="0"/>
+          <a:chExt cx="0" cy="0"/>
+        </a:xfrm>
+      </p:grpSpPr>
       <p:sp>
         <p:nvSpPr>
           <p:cNvPr id="2" name="Title 1"/>
@@ -3196,7 +6585,8 @@
           <a:lstStyle/>
           <a:p>
             <a:r>
-              <a:t>Closing Message</a:t>
+              <a:rPr dirty="0"/>
+              <a:t>What I Expect from Students</a:t>
             </a:r>
           </a:p>
         </p:txBody>
@@ -3213,29 +6603,68 @@
         </p:nvSpPr>
         <p:spPr/>
         <p:txBody>
-          <a:bodyPr/>
+          <a:bodyPr>
+            <a:normAutofit/>
+          </a:bodyPr>
           <a:lstStyle/>
           <a:p>
-            <a:r>
-              <a:t>Today is your beginning</a:t>
-            </a:r>
-          </a:p>
-          <a:p>
-            <a:pPr lvl="1"/>
-            <a:r>
-              <a:t>This course can change your life</a:t>
-            </a:r>
-          </a:p>
-          <a:p>
-            <a:pPr lvl="1"/>
-            <a:r>
-              <a:t>Together, we will move toward the green garden of success 🌿</a:t>
-            </a:r>
-          </a:p>
-          <a:p>
-            <a:pPr lvl="1"/>
-            <a:r>
-              <a:t>Stay committed, work hard, and succeed</a:t>
+            <a:pPr lvl="1">
+              <a:buFont typeface="Wingdings" panose="05000000000000000000" pitchFamily="2" charset="2"/>
+              <a:buChar char="Ø"/>
+            </a:pPr>
+            <a:r>
+              <a:rPr sz="2600" dirty="0"/>
+              <a:t>Attend all classes</a:t>
+            </a:r>
+          </a:p>
+          <a:p>
+            <a:pPr lvl="1">
+              <a:buFont typeface="Wingdings" panose="05000000000000000000" pitchFamily="2" charset="2"/>
+              <a:buChar char="Ø"/>
+            </a:pPr>
+            <a:r>
+              <a:rPr sz="2400" dirty="0"/>
+              <a:t>Practice daily</a:t>
+            </a:r>
+          </a:p>
+          <a:p>
+            <a:pPr lvl="1">
+              <a:buFont typeface="Wingdings" panose="05000000000000000000" pitchFamily="2" charset="2"/>
+              <a:buChar char="Ø"/>
+            </a:pPr>
+            <a:r>
+              <a:rPr sz="2400" dirty="0"/>
+              <a:t>Ask questions</a:t>
+            </a:r>
+          </a:p>
+          <a:p>
+            <a:pPr lvl="1">
+              <a:buFont typeface="Wingdings" panose="05000000000000000000" pitchFamily="2" charset="2"/>
+              <a:buChar char="Ø"/>
+            </a:pPr>
+            <a:r>
+              <a:rPr sz="2400" dirty="0"/>
+              <a:t>Don’t fear mistakes</a:t>
+            </a:r>
+          </a:p>
+          <a:p>
+            <a:pPr lvl="1">
+              <a:buFont typeface="Wingdings" panose="05000000000000000000" pitchFamily="2" charset="2"/>
+              <a:buChar char="Ø"/>
+            </a:pPr>
+            <a:r>
+              <a:rPr sz="2400" dirty="0"/>
+              <a:t>Stay consistent</a:t>
+            </a:r>
+          </a:p>
+          <a:p>
+            <a:pPr lvl="1">
+              <a:buFont typeface="Wingdings" panose="05000000000000000000" pitchFamily="2" charset="2"/>
+              <a:buChar char="Ø"/>
+            </a:pPr>
+            <a:r>
+              <a:rPr sz="2400" dirty="0"/>
+              <a:t>Keep trying</a:t>
             </a:r>
           </a:p>
         </p:txBody>
@@ -3248,8 +6677,8 @@
 </p:sld>
 </file>
 
-<file path=ppt/slides/slide2.xml><?xml version="1.0" encoding="utf-8"?>
-<p:sld xmlns:a="http://schemas.openxmlformats.org/drawingml/2006/main" xmlns:p="http://schemas.openxmlformats.org/presentationml/2006/main" xmlns:r="http://schemas.openxmlformats.org/officeDocument/2006/relationships">
+<file path=ppt/slides/slide13.xml><?xml version="1.0" encoding="utf-8"?>
+<p:sld xmlns:a="http://schemas.openxmlformats.org/drawingml/2006/main" xmlns:r="http://schemas.openxmlformats.org/officeDocument/2006/relationships" xmlns:p="http://schemas.openxmlformats.org/presentationml/2006/main">
   <p:cSld>
     <p:spTree>
       <p:nvGrpSpPr>
@@ -3257,7 +6686,14 @@
         <p:cNvGrpSpPr/>
         <p:nvPr/>
       </p:nvGrpSpPr>
-      <p:grpSpPr/>
+      <p:grpSpPr>
+        <a:xfrm>
+          <a:off x="0" y="0"/>
+          <a:ext cx="0" cy="0"/>
+          <a:chOff x="0" y="0"/>
+          <a:chExt cx="0" cy="0"/>
+        </a:xfrm>
+      </p:grpSpPr>
       <p:sp>
         <p:nvSpPr>
           <p:cNvPr id="2" name="Title 1"/>
@@ -3274,8 +6710,10 @@
           <a:lstStyle/>
           <a:p>
             <a:r>
-              <a:t>What is Web Designing?</a:t>
-            </a:r>
+              <a:rPr lang="en-US" dirty="0" smtClean="0"/>
+              <a:t>Do you know ?</a:t>
+            </a:r>
+            <a:endParaRPr dirty="0"/>
           </a:p>
         </p:txBody>
       </p:sp>
@@ -3295,19 +6733,22 @@
           <a:lstStyle/>
           <a:p>
             <a:r>
-              <a:t>Art of creating the visual layout of websites</a:t>
+              <a:rPr dirty="0"/>
+              <a:t>Every developer started as a beginner</a:t>
             </a:r>
           </a:p>
           <a:p>
             <a:pPr lvl="1"/>
             <a:r>
-              <a:t>Focus: UI/UX, colors, typography, layout, responsiveness</a:t>
+              <a:rPr dirty="0"/>
+              <a:t>90 days of consistency = lifetime skill</a:t>
             </a:r>
           </a:p>
           <a:p>
             <a:pPr lvl="1"/>
             <a:r>
-              <a:t>Tools: HTML (Structure), CSS (Styling), JS (Interactivity)</a:t>
+              <a:rPr dirty="0"/>
+              <a:t>Your future depends on the effort you put today</a:t>
             </a:r>
           </a:p>
         </p:txBody>
@@ -3320,8 +6761,8 @@
 </p:sld>
 </file>
 
-<file path=ppt/slides/slide3.xml><?xml version="1.0" encoding="utf-8"?>
-<p:sld xmlns:a="http://schemas.openxmlformats.org/drawingml/2006/main" xmlns:p="http://schemas.openxmlformats.org/presentationml/2006/main" xmlns:r="http://schemas.openxmlformats.org/officeDocument/2006/relationships">
+<file path=ppt/slides/slide14.xml><?xml version="1.0" encoding="utf-8"?>
+<p:sld xmlns:a="http://schemas.openxmlformats.org/drawingml/2006/main" xmlns:r="http://schemas.openxmlformats.org/officeDocument/2006/relationships" xmlns:p="http://schemas.openxmlformats.org/presentationml/2006/main">
   <p:cSld>
     <p:spTree>
       <p:nvGrpSpPr>
@@ -3329,7 +6770,14 @@
         <p:cNvGrpSpPr/>
         <p:nvPr/>
       </p:nvGrpSpPr>
-      <p:grpSpPr/>
+      <p:grpSpPr>
+        <a:xfrm>
+          <a:off x="0" y="0"/>
+          <a:ext cx="0" cy="0"/>
+          <a:chOff x="0" y="0"/>
+          <a:chExt cx="0" cy="0"/>
+        </a:xfrm>
+      </p:grpSpPr>
       <p:sp>
         <p:nvSpPr>
           <p:cNvPr id="2" name="Title 1"/>
@@ -3346,7 +6794,16 @@
           <a:lstStyle/>
           <a:p>
             <a:r>
-              <a:t>What is Web Development?</a:t>
+              <a:rPr lang="en-US" dirty="0" smtClean="0"/>
+              <a:t>Last</a:t>
+            </a:r>
+            <a:r>
+              <a:rPr dirty="0" smtClean="0"/>
+              <a:t> </a:t>
+            </a:r>
+            <a:r>
+              <a:rPr dirty="0"/>
+              <a:t>Message</a:t>
             </a:r>
           </a:p>
         </p:txBody>
@@ -3363,29 +6820,41 @@
         </p:nvSpPr>
         <p:spPr/>
         <p:txBody>
-          <a:bodyPr/>
+          <a:bodyPr>
+            <a:normAutofit/>
+          </a:bodyPr>
           <a:lstStyle/>
           <a:p>
-            <a:r>
-              <a:t>Engineering behind websites</a:t>
-            </a:r>
-          </a:p>
-          <a:p>
             <a:pPr lvl="1"/>
             <a:r>
-              <a:t>Focus: Logic, functionality, databases, servers</a:t>
+              <a:rPr sz="2600" dirty="0"/>
+              <a:t>Today is your beginning</a:t>
             </a:r>
           </a:p>
           <a:p>
             <a:pPr lvl="1"/>
             <a:r>
-              <a:t>Frontend + Backend = Complete Development</a:t>
+              <a:rPr sz="2400" dirty="0"/>
+              <a:t>This course can change your life</a:t>
             </a:r>
           </a:p>
           <a:p>
             <a:pPr lvl="1"/>
             <a:r>
-              <a:t>Makes websites work</a:t>
+              <a:rPr sz="2400" dirty="0"/>
+              <a:t>Together, we will move toward </a:t>
+            </a:r>
+            <a:r>
+              <a:rPr lang="en-US" sz="2400" dirty="0" smtClean="0"/>
+              <a:t>professional developer.</a:t>
+            </a:r>
+            <a:endParaRPr sz="2400" dirty="0"/>
+          </a:p>
+          <a:p>
+            <a:pPr lvl="1"/>
+            <a:r>
+              <a:rPr sz="2400" dirty="0"/>
+              <a:t>Stay committed, work hard, and succeed</a:t>
             </a:r>
           </a:p>
         </p:txBody>
@@ -3398,8 +6867,8 @@
 </p:sld>
 </file>
 
-<file path=ppt/slides/slide4.xml><?xml version="1.0" encoding="utf-8"?>
-<p:sld xmlns:a="http://schemas.openxmlformats.org/drawingml/2006/main" xmlns:p="http://schemas.openxmlformats.org/presentationml/2006/main" xmlns:r="http://schemas.openxmlformats.org/officeDocument/2006/relationships">
+<file path=ppt/slides/slide15.xml><?xml version="1.0" encoding="utf-8"?>
+<p:sld xmlns:a="http://schemas.openxmlformats.org/drawingml/2006/main" xmlns:r="http://schemas.openxmlformats.org/officeDocument/2006/relationships" xmlns:p="http://schemas.openxmlformats.org/presentationml/2006/main">
   <p:cSld>
     <p:spTree>
       <p:nvGrpSpPr>
@@ -3407,7 +6876,14 @@
         <p:cNvGrpSpPr/>
         <p:nvPr/>
       </p:nvGrpSpPr>
-      <p:grpSpPr/>
+      <p:grpSpPr>
+        <a:xfrm>
+          <a:off x="0" y="0"/>
+          <a:ext cx="0" cy="0"/>
+          <a:chOff x="0" y="0"/>
+          <a:chExt cx="0" cy="0"/>
+        </a:xfrm>
+      </p:grpSpPr>
       <p:sp>
         <p:nvSpPr>
           <p:cNvPr id="2" name="Title 1"/>
@@ -3418,63 +6894,31 @@
             <p:ph type="title"/>
           </p:nvPr>
         </p:nvSpPr>
-        <p:spPr/>
+        <p:spPr>
+          <a:xfrm>
+            <a:off x="0" y="2981262"/>
+            <a:ext cx="9144000" cy="1143000"/>
+          </a:xfrm>
+        </p:spPr>
         <p:txBody>
           <a:bodyPr/>
           <a:lstStyle/>
           <a:p>
-            <a:r>
-              <a:t>Why Learn Web? (Future Scope)</a:t>
-            </a:r>
-          </a:p>
-        </p:txBody>
-      </p:sp>
-      <p:sp>
-        <p:nvSpPr>
-          <p:cNvPr id="3" name="Content Placeholder 2"/>
-          <p:cNvSpPr>
-            <a:spLocks noGrp="1"/>
-          </p:cNvSpPr>
-          <p:nvPr>
-            <p:ph idx="1"/>
-          </p:nvPr>
-        </p:nvSpPr>
-        <p:spPr/>
-        <p:txBody>
-          <a:bodyPr/>
-          <a:lstStyle/>
-          <a:p>
-            <a:r>
-              <a:t>Everything is online: business, education, banking, shopping</a:t>
-            </a:r>
-          </a:p>
-          <a:p>
-            <a:pPr lvl="1"/>
-            <a:r>
-              <a:t>High demand for skilled developers</a:t>
-            </a:r>
-          </a:p>
-          <a:p>
-            <a:pPr lvl="1"/>
-            <a:r>
-              <a:t>Unlimited job opportunities</a:t>
-            </a:r>
-          </a:p>
-          <a:p>
-            <a:pPr lvl="1"/>
-            <a:r>
-              <a:t>Freelancing &amp; remote earning</a:t>
-            </a:r>
-          </a:p>
-          <a:p>
-            <a:pPr lvl="1"/>
-            <a:r>
-              <a:t>Chance to build your own agency</a:t>
-            </a:r>
+            <a:pPr algn="ctr"/>
+            <a:r>
+              <a:rPr lang="en-US" sz="6000" b="1" dirty="0" smtClean="0"/>
+              <a:t>ANY QUESTION ?</a:t>
+            </a:r>
+            <a:endParaRPr lang="en-US" sz="6000" b="1" dirty="0"/>
           </a:p>
         </p:txBody>
       </p:sp>
     </p:spTree>
+    <p:extLst>
+      <p:ext uri="{BB962C8B-B14F-4D97-AF65-F5344CB8AC3E}">
+        <p14:creationId xmlns:p14="http://schemas.microsoft.com/office/powerpoint/2010/main" val="330180054"/>
+      </p:ext>
+    </p:extLst>
   </p:cSld>
   <p:clrMapOvr>
     <a:masterClrMapping/>
@@ -3482,8 +6926,8 @@
 </p:sld>
 </file>
 
-<file path=ppt/slides/slide5.xml><?xml version="1.0" encoding="utf-8"?>
-<p:sld xmlns:a="http://schemas.openxmlformats.org/drawingml/2006/main" xmlns:p="http://schemas.openxmlformats.org/presentationml/2006/main" xmlns:r="http://schemas.openxmlformats.org/officeDocument/2006/relationships">
+<file path=ppt/slides/slide2.xml><?xml version="1.0" encoding="utf-8"?>
+<p:sld xmlns:a="http://schemas.openxmlformats.org/drawingml/2006/main" xmlns:r="http://schemas.openxmlformats.org/officeDocument/2006/relationships" xmlns:p="http://schemas.openxmlformats.org/presentationml/2006/main">
   <p:cSld>
     <p:spTree>
       <p:nvGrpSpPr>
@@ -3491,7 +6935,14 @@
         <p:cNvGrpSpPr/>
         <p:nvPr/>
       </p:nvGrpSpPr>
-      <p:grpSpPr/>
+      <p:grpSpPr>
+        <a:xfrm>
+          <a:off x="0" y="0"/>
+          <a:ext cx="0" cy="0"/>
+          <a:chOff x="0" y="0"/>
+          <a:chExt cx="0" cy="0"/>
+        </a:xfrm>
+      </p:grpSpPr>
       <p:sp>
         <p:nvSpPr>
           <p:cNvPr id="2" name="Title 1"/>
@@ -3499,28 +6950,2908 @@
             <a:spLocks noGrp="1"/>
           </p:cNvSpPr>
           <p:nvPr>
-            <p:ph type="title"/>
-          </p:nvPr>
-        </p:nvSpPr>
-        <p:spPr/>
+            <p:ph type="ctrTitle"/>
+          </p:nvPr>
+        </p:nvSpPr>
+        <p:spPr>
+          <a:xfrm>
+            <a:off x="866442" y="890017"/>
+            <a:ext cx="6620968" cy="3329581"/>
+          </a:xfrm>
+        </p:spPr>
         <p:txBody>
           <a:bodyPr/>
           <a:lstStyle/>
           <a:p>
             <a:r>
-              <a:t>Green Gardens of Life Success 🌱</a:t>
-            </a:r>
-          </a:p>
-        </p:txBody>
-      </p:sp>
-      <p:sp>
-        <p:nvSpPr>
-          <p:cNvPr id="3" name="Content Placeholder 2"/>
-          <p:cNvSpPr>
-            <a:spLocks noGrp="1"/>
+              <a:rPr lang="en-US" sz="4500" b="1" dirty="0"/>
+              <a:t>Course: Web </a:t>
+            </a:r>
+            <a:r>
+              <a:rPr lang="en-US" sz="4500" b="1" dirty="0" smtClean="0"/>
+              <a:t>Designing &amp; Development</a:t>
+            </a:r>
+            <a:endParaRPr lang="en-US" sz="4500" b="1" dirty="0"/>
+          </a:p>
+        </p:txBody>
+      </p:sp>
+      <p:sp>
+        <p:nvSpPr>
+          <p:cNvPr id="3" name="Subtitle 2"/>
+          <p:cNvSpPr>
+            <a:spLocks noGrp="1"/>
+          </p:cNvSpPr>
+          <p:nvPr>
+            <p:ph type="subTitle" idx="1"/>
+          </p:nvPr>
+        </p:nvSpPr>
+        <p:spPr>
+          <a:xfrm>
+            <a:off x="866216" y="4440285"/>
+            <a:ext cx="6619244" cy="276044"/>
+          </a:xfrm>
+        </p:spPr>
+        <p:txBody>
+          <a:bodyPr>
+            <a:normAutofit fontScale="70000" lnSpcReduction="20000"/>
+          </a:bodyPr>
+          <a:lstStyle/>
+          <a:p>
+            <a:r>
+              <a:rPr lang="en-US" b="1" dirty="0">
+                <a:solidFill>
+                  <a:schemeClr val="tx1"/>
+                </a:solidFill>
+              </a:rPr>
+              <a:t>Institute: Corvit Systems Peshawar</a:t>
+            </a:r>
+          </a:p>
+        </p:txBody>
+      </p:sp>
+      <p:sp>
+        <p:nvSpPr>
+          <p:cNvPr id="4" name="Subtitle 2"/>
+          <p:cNvSpPr txBox="1">
+            <a:spLocks/>
+          </p:cNvSpPr>
+          <p:nvPr/>
+        </p:nvSpPr>
+        <p:spPr>
+          <a:xfrm>
+            <a:off x="870532" y="4716328"/>
+            <a:ext cx="6619244" cy="352769"/>
+          </a:xfrm>
+          <a:prstGeom prst="rect">
+            <a:avLst/>
+          </a:prstGeom>
+        </p:spPr>
+        <p:txBody>
+          <a:bodyPr vert="horz" lIns="68580" tIns="34290" rIns="68580" bIns="34290" rtlCol="0" anchor="t">
+            <a:normAutofit/>
+          </a:bodyPr>
+          <a:lstStyle>
+            <a:lvl1pPr marL="0" indent="0" algn="l" defTabSz="457200" rtl="0" eaLnBrk="1" latinLnBrk="0" hangingPunct="1">
+              <a:spcBef>
+                <a:spcPts val="1000"/>
+              </a:spcBef>
+              <a:spcAft>
+                <a:spcPts val="0"/>
+              </a:spcAft>
+              <a:buClr>
+                <a:schemeClr val="accent1"/>
+              </a:buClr>
+              <a:buSzPct val="80000"/>
+              <a:buFont typeface="Wingdings 3" charset="2"/>
+              <a:buNone/>
+              <a:defRPr sz="2000" b="0" i="0" kern="1200" cap="all">
+                <a:solidFill>
+                  <a:schemeClr val="accent1"/>
+                </a:solidFill>
+                <a:latin typeface="+mj-lt"/>
+                <a:ea typeface="+mj-ea"/>
+                <a:cs typeface="+mj-cs"/>
+              </a:defRPr>
+            </a:lvl1pPr>
+            <a:lvl2pPr marL="457200" indent="0" algn="ctr" defTabSz="457200" rtl="0" eaLnBrk="1" latinLnBrk="0" hangingPunct="1">
+              <a:spcBef>
+                <a:spcPts val="1000"/>
+              </a:spcBef>
+              <a:spcAft>
+                <a:spcPts val="0"/>
+              </a:spcAft>
+              <a:buClr>
+                <a:schemeClr val="accent1"/>
+              </a:buClr>
+              <a:buSzPct val="80000"/>
+              <a:buFont typeface="Wingdings 3" charset="2"/>
+              <a:buNone/>
+              <a:defRPr sz="1800" b="0" i="0" kern="1200">
+                <a:solidFill>
+                  <a:schemeClr val="tx1">
+                    <a:tint val="75000"/>
+                  </a:schemeClr>
+                </a:solidFill>
+                <a:latin typeface="+mj-lt"/>
+                <a:ea typeface="+mj-ea"/>
+                <a:cs typeface="+mj-cs"/>
+              </a:defRPr>
+            </a:lvl2pPr>
+            <a:lvl3pPr marL="914400" indent="0" algn="ctr" defTabSz="457200" rtl="0" eaLnBrk="1" latinLnBrk="0" hangingPunct="1">
+              <a:spcBef>
+                <a:spcPts val="1000"/>
+              </a:spcBef>
+              <a:spcAft>
+                <a:spcPts val="0"/>
+              </a:spcAft>
+              <a:buClr>
+                <a:schemeClr val="accent1"/>
+              </a:buClr>
+              <a:buSzPct val="80000"/>
+              <a:buFont typeface="Wingdings 3" charset="2"/>
+              <a:buNone/>
+              <a:defRPr sz="1600" b="0" i="0" kern="1200">
+                <a:solidFill>
+                  <a:schemeClr val="tx1">
+                    <a:tint val="75000"/>
+                  </a:schemeClr>
+                </a:solidFill>
+                <a:latin typeface="+mj-lt"/>
+                <a:ea typeface="+mj-ea"/>
+                <a:cs typeface="+mj-cs"/>
+              </a:defRPr>
+            </a:lvl3pPr>
+            <a:lvl4pPr marL="1371600" indent="0" algn="ctr" defTabSz="457200" rtl="0" eaLnBrk="1" latinLnBrk="0" hangingPunct="1">
+              <a:spcBef>
+                <a:spcPts val="1000"/>
+              </a:spcBef>
+              <a:spcAft>
+                <a:spcPts val="0"/>
+              </a:spcAft>
+              <a:buClr>
+                <a:schemeClr val="accent1"/>
+              </a:buClr>
+              <a:buSzPct val="80000"/>
+              <a:buFont typeface="Wingdings 3" charset="2"/>
+              <a:buNone/>
+              <a:defRPr sz="1400" b="0" i="0" kern="1200">
+                <a:solidFill>
+                  <a:schemeClr val="tx1">
+                    <a:tint val="75000"/>
+                  </a:schemeClr>
+                </a:solidFill>
+                <a:latin typeface="+mj-lt"/>
+                <a:ea typeface="+mj-ea"/>
+                <a:cs typeface="+mj-cs"/>
+              </a:defRPr>
+            </a:lvl4pPr>
+            <a:lvl5pPr marL="1828800" indent="0" algn="ctr" defTabSz="457200" rtl="0" eaLnBrk="1" latinLnBrk="0" hangingPunct="1">
+              <a:spcBef>
+                <a:spcPts val="1000"/>
+              </a:spcBef>
+              <a:spcAft>
+                <a:spcPts val="0"/>
+              </a:spcAft>
+              <a:buClr>
+                <a:schemeClr val="accent1"/>
+              </a:buClr>
+              <a:buSzPct val="80000"/>
+              <a:buFont typeface="Wingdings 3" charset="2"/>
+              <a:buNone/>
+              <a:defRPr sz="1400" b="0" i="0" kern="1200">
+                <a:solidFill>
+                  <a:schemeClr val="tx1">
+                    <a:tint val="75000"/>
+                  </a:schemeClr>
+                </a:solidFill>
+                <a:latin typeface="+mj-lt"/>
+                <a:ea typeface="+mj-ea"/>
+                <a:cs typeface="+mj-cs"/>
+              </a:defRPr>
+            </a:lvl5pPr>
+            <a:lvl6pPr marL="2286000" indent="0" algn="ctr" defTabSz="457200" rtl="0" eaLnBrk="1" latinLnBrk="0" hangingPunct="1">
+              <a:spcBef>
+                <a:spcPts val="1000"/>
+              </a:spcBef>
+              <a:spcAft>
+                <a:spcPts val="0"/>
+              </a:spcAft>
+              <a:buClr>
+                <a:schemeClr val="accent1"/>
+              </a:buClr>
+              <a:buSzPct val="80000"/>
+              <a:buFont typeface="Wingdings 3" charset="2"/>
+              <a:buNone/>
+              <a:defRPr sz="1400" b="0" i="0" kern="1200">
+                <a:solidFill>
+                  <a:schemeClr val="tx1">
+                    <a:tint val="75000"/>
+                  </a:schemeClr>
+                </a:solidFill>
+                <a:latin typeface="+mj-lt"/>
+                <a:ea typeface="+mj-ea"/>
+                <a:cs typeface="+mj-cs"/>
+              </a:defRPr>
+            </a:lvl6pPr>
+            <a:lvl7pPr marL="2743200" indent="0" algn="ctr" defTabSz="457200" rtl="0" eaLnBrk="1" latinLnBrk="0" hangingPunct="1">
+              <a:spcBef>
+                <a:spcPts val="1000"/>
+              </a:spcBef>
+              <a:spcAft>
+                <a:spcPts val="0"/>
+              </a:spcAft>
+              <a:buClr>
+                <a:schemeClr val="accent1"/>
+              </a:buClr>
+              <a:buSzPct val="80000"/>
+              <a:buFont typeface="Wingdings 3" charset="2"/>
+              <a:buNone/>
+              <a:defRPr sz="1400" b="0" i="0" kern="1200">
+                <a:solidFill>
+                  <a:schemeClr val="tx1">
+                    <a:tint val="75000"/>
+                  </a:schemeClr>
+                </a:solidFill>
+                <a:latin typeface="+mj-lt"/>
+                <a:ea typeface="+mj-ea"/>
+                <a:cs typeface="+mj-cs"/>
+              </a:defRPr>
+            </a:lvl7pPr>
+            <a:lvl8pPr marL="3200400" indent="0" algn="ctr" defTabSz="457200" rtl="0" eaLnBrk="1" latinLnBrk="0" hangingPunct="1">
+              <a:spcBef>
+                <a:spcPts val="1000"/>
+              </a:spcBef>
+              <a:spcAft>
+                <a:spcPts val="0"/>
+              </a:spcAft>
+              <a:buClr>
+                <a:schemeClr val="accent1"/>
+              </a:buClr>
+              <a:buSzPct val="80000"/>
+              <a:buFont typeface="Wingdings 3" charset="2"/>
+              <a:buNone/>
+              <a:defRPr sz="1400" b="0" i="0" kern="1200">
+                <a:solidFill>
+                  <a:schemeClr val="tx1">
+                    <a:tint val="75000"/>
+                  </a:schemeClr>
+                </a:solidFill>
+                <a:latin typeface="+mj-lt"/>
+                <a:ea typeface="+mj-ea"/>
+                <a:cs typeface="+mj-cs"/>
+              </a:defRPr>
+            </a:lvl8pPr>
+            <a:lvl9pPr marL="3657600" indent="0" algn="ctr" defTabSz="457200" rtl="0" eaLnBrk="1" latinLnBrk="0" hangingPunct="1">
+              <a:spcBef>
+                <a:spcPts val="1000"/>
+              </a:spcBef>
+              <a:spcAft>
+                <a:spcPts val="0"/>
+              </a:spcAft>
+              <a:buClr>
+                <a:schemeClr val="accent1"/>
+              </a:buClr>
+              <a:buSzPct val="80000"/>
+              <a:buFont typeface="Wingdings 3" charset="2"/>
+              <a:buNone/>
+              <a:defRPr sz="1400" b="0" i="0" kern="1200">
+                <a:solidFill>
+                  <a:schemeClr val="tx1">
+                    <a:tint val="75000"/>
+                  </a:schemeClr>
+                </a:solidFill>
+                <a:latin typeface="+mj-lt"/>
+                <a:ea typeface="+mj-ea"/>
+                <a:cs typeface="+mj-cs"/>
+              </a:defRPr>
+            </a:lvl9pPr>
+          </a:lstStyle>
+          <a:p>
+            <a:r>
+              <a:rPr lang="en-US" sz="1500" b="1" dirty="0">
+                <a:solidFill>
+                  <a:schemeClr val="tx1">
+                    <a:lumMod val="95000"/>
+                  </a:schemeClr>
+                </a:solidFill>
+              </a:rPr>
+              <a:t>Duration: </a:t>
+            </a:r>
+            <a:r>
+              <a:rPr lang="en-US" sz="1500" b="1" dirty="0" smtClean="0">
+                <a:solidFill>
+                  <a:schemeClr val="tx1">
+                    <a:lumMod val="95000"/>
+                  </a:schemeClr>
+                </a:solidFill>
+              </a:rPr>
+              <a:t>3-Month</a:t>
+            </a:r>
+            <a:endParaRPr lang="en-US" sz="1500" b="1" dirty="0">
+              <a:solidFill>
+                <a:schemeClr val="tx1">
+                  <a:lumMod val="95000"/>
+                </a:schemeClr>
+              </a:solidFill>
+            </a:endParaRPr>
+          </a:p>
+        </p:txBody>
+      </p:sp>
+      <p:sp>
+        <p:nvSpPr>
+          <p:cNvPr id="5" name="Subtitle 2"/>
+          <p:cNvSpPr txBox="1">
+            <a:spLocks/>
+          </p:cNvSpPr>
+          <p:nvPr/>
+        </p:nvSpPr>
+        <p:spPr>
+          <a:xfrm>
+            <a:off x="874849" y="5005309"/>
+            <a:ext cx="6619244" cy="352769"/>
+          </a:xfrm>
+          <a:prstGeom prst="rect">
+            <a:avLst/>
+          </a:prstGeom>
+        </p:spPr>
+        <p:txBody>
+          <a:bodyPr vert="horz" lIns="68580" tIns="34290" rIns="68580" bIns="34290" rtlCol="0" anchor="t">
+            <a:normAutofit/>
+          </a:bodyPr>
+          <a:lstStyle>
+            <a:lvl1pPr marL="0" indent="0" algn="l" defTabSz="457200" rtl="0" eaLnBrk="1" latinLnBrk="0" hangingPunct="1">
+              <a:spcBef>
+                <a:spcPts val="1000"/>
+              </a:spcBef>
+              <a:spcAft>
+                <a:spcPts val="0"/>
+              </a:spcAft>
+              <a:buClr>
+                <a:schemeClr val="accent1"/>
+              </a:buClr>
+              <a:buSzPct val="80000"/>
+              <a:buFont typeface="Wingdings 3" charset="2"/>
+              <a:buNone/>
+              <a:defRPr sz="2000" b="0" i="0" kern="1200" cap="all">
+                <a:solidFill>
+                  <a:schemeClr val="accent1"/>
+                </a:solidFill>
+                <a:latin typeface="+mj-lt"/>
+                <a:ea typeface="+mj-ea"/>
+                <a:cs typeface="+mj-cs"/>
+              </a:defRPr>
+            </a:lvl1pPr>
+            <a:lvl2pPr marL="457200" indent="0" algn="ctr" defTabSz="457200" rtl="0" eaLnBrk="1" latinLnBrk="0" hangingPunct="1">
+              <a:spcBef>
+                <a:spcPts val="1000"/>
+              </a:spcBef>
+              <a:spcAft>
+                <a:spcPts val="0"/>
+              </a:spcAft>
+              <a:buClr>
+                <a:schemeClr val="accent1"/>
+              </a:buClr>
+              <a:buSzPct val="80000"/>
+              <a:buFont typeface="Wingdings 3" charset="2"/>
+              <a:buNone/>
+              <a:defRPr sz="1800" b="0" i="0" kern="1200">
+                <a:solidFill>
+                  <a:schemeClr val="tx1">
+                    <a:tint val="75000"/>
+                  </a:schemeClr>
+                </a:solidFill>
+                <a:latin typeface="+mj-lt"/>
+                <a:ea typeface="+mj-ea"/>
+                <a:cs typeface="+mj-cs"/>
+              </a:defRPr>
+            </a:lvl2pPr>
+            <a:lvl3pPr marL="914400" indent="0" algn="ctr" defTabSz="457200" rtl="0" eaLnBrk="1" latinLnBrk="0" hangingPunct="1">
+              <a:spcBef>
+                <a:spcPts val="1000"/>
+              </a:spcBef>
+              <a:spcAft>
+                <a:spcPts val="0"/>
+              </a:spcAft>
+              <a:buClr>
+                <a:schemeClr val="accent1"/>
+              </a:buClr>
+              <a:buSzPct val="80000"/>
+              <a:buFont typeface="Wingdings 3" charset="2"/>
+              <a:buNone/>
+              <a:defRPr sz="1600" b="0" i="0" kern="1200">
+                <a:solidFill>
+                  <a:schemeClr val="tx1">
+                    <a:tint val="75000"/>
+                  </a:schemeClr>
+                </a:solidFill>
+                <a:latin typeface="+mj-lt"/>
+                <a:ea typeface="+mj-ea"/>
+                <a:cs typeface="+mj-cs"/>
+              </a:defRPr>
+            </a:lvl3pPr>
+            <a:lvl4pPr marL="1371600" indent="0" algn="ctr" defTabSz="457200" rtl="0" eaLnBrk="1" latinLnBrk="0" hangingPunct="1">
+              <a:spcBef>
+                <a:spcPts val="1000"/>
+              </a:spcBef>
+              <a:spcAft>
+                <a:spcPts val="0"/>
+              </a:spcAft>
+              <a:buClr>
+                <a:schemeClr val="accent1"/>
+              </a:buClr>
+              <a:buSzPct val="80000"/>
+              <a:buFont typeface="Wingdings 3" charset="2"/>
+              <a:buNone/>
+              <a:defRPr sz="1400" b="0" i="0" kern="1200">
+                <a:solidFill>
+                  <a:schemeClr val="tx1">
+                    <a:tint val="75000"/>
+                  </a:schemeClr>
+                </a:solidFill>
+                <a:latin typeface="+mj-lt"/>
+                <a:ea typeface="+mj-ea"/>
+                <a:cs typeface="+mj-cs"/>
+              </a:defRPr>
+            </a:lvl4pPr>
+            <a:lvl5pPr marL="1828800" indent="0" algn="ctr" defTabSz="457200" rtl="0" eaLnBrk="1" latinLnBrk="0" hangingPunct="1">
+              <a:spcBef>
+                <a:spcPts val="1000"/>
+              </a:spcBef>
+              <a:spcAft>
+                <a:spcPts val="0"/>
+              </a:spcAft>
+              <a:buClr>
+                <a:schemeClr val="accent1"/>
+              </a:buClr>
+              <a:buSzPct val="80000"/>
+              <a:buFont typeface="Wingdings 3" charset="2"/>
+              <a:buNone/>
+              <a:defRPr sz="1400" b="0" i="0" kern="1200">
+                <a:solidFill>
+                  <a:schemeClr val="tx1">
+                    <a:tint val="75000"/>
+                  </a:schemeClr>
+                </a:solidFill>
+                <a:latin typeface="+mj-lt"/>
+                <a:ea typeface="+mj-ea"/>
+                <a:cs typeface="+mj-cs"/>
+              </a:defRPr>
+            </a:lvl5pPr>
+            <a:lvl6pPr marL="2286000" indent="0" algn="ctr" defTabSz="457200" rtl="0" eaLnBrk="1" latinLnBrk="0" hangingPunct="1">
+              <a:spcBef>
+                <a:spcPts val="1000"/>
+              </a:spcBef>
+              <a:spcAft>
+                <a:spcPts val="0"/>
+              </a:spcAft>
+              <a:buClr>
+                <a:schemeClr val="accent1"/>
+              </a:buClr>
+              <a:buSzPct val="80000"/>
+              <a:buFont typeface="Wingdings 3" charset="2"/>
+              <a:buNone/>
+              <a:defRPr sz="1400" b="0" i="0" kern="1200">
+                <a:solidFill>
+                  <a:schemeClr val="tx1">
+                    <a:tint val="75000"/>
+                  </a:schemeClr>
+                </a:solidFill>
+                <a:latin typeface="+mj-lt"/>
+                <a:ea typeface="+mj-ea"/>
+                <a:cs typeface="+mj-cs"/>
+              </a:defRPr>
+            </a:lvl6pPr>
+            <a:lvl7pPr marL="2743200" indent="0" algn="ctr" defTabSz="457200" rtl="0" eaLnBrk="1" latinLnBrk="0" hangingPunct="1">
+              <a:spcBef>
+                <a:spcPts val="1000"/>
+              </a:spcBef>
+              <a:spcAft>
+                <a:spcPts val="0"/>
+              </a:spcAft>
+              <a:buClr>
+                <a:schemeClr val="accent1"/>
+              </a:buClr>
+              <a:buSzPct val="80000"/>
+              <a:buFont typeface="Wingdings 3" charset="2"/>
+              <a:buNone/>
+              <a:defRPr sz="1400" b="0" i="0" kern="1200">
+                <a:solidFill>
+                  <a:schemeClr val="tx1">
+                    <a:tint val="75000"/>
+                  </a:schemeClr>
+                </a:solidFill>
+                <a:latin typeface="+mj-lt"/>
+                <a:ea typeface="+mj-ea"/>
+                <a:cs typeface="+mj-cs"/>
+              </a:defRPr>
+            </a:lvl7pPr>
+            <a:lvl8pPr marL="3200400" indent="0" algn="ctr" defTabSz="457200" rtl="0" eaLnBrk="1" latinLnBrk="0" hangingPunct="1">
+              <a:spcBef>
+                <a:spcPts val="1000"/>
+              </a:spcBef>
+              <a:spcAft>
+                <a:spcPts val="0"/>
+              </a:spcAft>
+              <a:buClr>
+                <a:schemeClr val="accent1"/>
+              </a:buClr>
+              <a:buSzPct val="80000"/>
+              <a:buFont typeface="Wingdings 3" charset="2"/>
+              <a:buNone/>
+              <a:defRPr sz="1400" b="0" i="0" kern="1200">
+                <a:solidFill>
+                  <a:schemeClr val="tx1">
+                    <a:tint val="75000"/>
+                  </a:schemeClr>
+                </a:solidFill>
+                <a:latin typeface="+mj-lt"/>
+                <a:ea typeface="+mj-ea"/>
+                <a:cs typeface="+mj-cs"/>
+              </a:defRPr>
+            </a:lvl8pPr>
+            <a:lvl9pPr marL="3657600" indent="0" algn="ctr" defTabSz="457200" rtl="0" eaLnBrk="1" latinLnBrk="0" hangingPunct="1">
+              <a:spcBef>
+                <a:spcPts val="1000"/>
+              </a:spcBef>
+              <a:spcAft>
+                <a:spcPts val="0"/>
+              </a:spcAft>
+              <a:buClr>
+                <a:schemeClr val="accent1"/>
+              </a:buClr>
+              <a:buSzPct val="80000"/>
+              <a:buFont typeface="Wingdings 3" charset="2"/>
+              <a:buNone/>
+              <a:defRPr sz="1400" b="0" i="0" kern="1200">
+                <a:solidFill>
+                  <a:schemeClr val="tx1">
+                    <a:tint val="75000"/>
+                  </a:schemeClr>
+                </a:solidFill>
+                <a:latin typeface="+mj-lt"/>
+                <a:ea typeface="+mj-ea"/>
+                <a:cs typeface="+mj-cs"/>
+              </a:defRPr>
+            </a:lvl9pPr>
+          </a:lstStyle>
+          <a:p>
+            <a:r>
+              <a:rPr lang="en-US" sz="1500" b="1" dirty="0" smtClean="0">
+                <a:solidFill>
+                  <a:schemeClr val="tx1"/>
+                </a:solidFill>
+              </a:rPr>
+              <a:t>Demo class of your course</a:t>
+            </a:r>
+            <a:endParaRPr lang="en-US" sz="1500" b="1" dirty="0">
+              <a:solidFill>
+                <a:schemeClr val="tx1"/>
+              </a:solidFill>
+            </a:endParaRPr>
+          </a:p>
+        </p:txBody>
+      </p:sp>
+    </p:spTree>
+    <p:extLst>
+      <p:ext uri="{BB962C8B-B14F-4D97-AF65-F5344CB8AC3E}">
+        <p14:creationId xmlns:p14="http://schemas.microsoft.com/office/powerpoint/2010/main" val="3689803277"/>
+      </p:ext>
+    </p:extLst>
+  </p:cSld>
+  <p:clrMapOvr>
+    <a:masterClrMapping/>
+  </p:clrMapOvr>
+  <p:transition spd="slow">
+    <p:cover/>
+  </p:transition>
+  <p:timing>
+    <p:tnLst>
+      <p:par>
+        <p:cTn id="1" dur="indefinite" restart="never" nodeType="tmRoot">
+          <p:childTnLst>
+            <p:seq concurrent="1" nextAc="seek">
+              <p:cTn id="2" dur="indefinite" nodeType="mainSeq">
+                <p:childTnLst>
+                  <p:par>
+                    <p:cTn id="3" fill="hold">
+                      <p:stCondLst>
+                        <p:cond delay="indefinite"/>
+                      </p:stCondLst>
+                      <p:childTnLst>
+                        <p:par>
+                          <p:cTn id="4" fill="hold">
+                            <p:stCondLst>
+                              <p:cond delay="0"/>
+                            </p:stCondLst>
+                            <p:childTnLst>
+                              <p:par>
+                                <p:cTn id="5" presetID="2" presetClass="entr" presetSubtype="4" fill="hold" grpId="0" nodeType="clickEffect">
+                                  <p:stCondLst>
+                                    <p:cond delay="0"/>
+                                  </p:stCondLst>
+                                  <p:childTnLst>
+                                    <p:set>
+                                      <p:cBhvr>
+                                        <p:cTn id="6" dur="1" fill="hold">
+                                          <p:stCondLst>
+                                            <p:cond delay="0"/>
+                                          </p:stCondLst>
+                                        </p:cTn>
+                                        <p:tgtEl>
+                                          <p:spTgt spid="2"/>
+                                        </p:tgtEl>
+                                        <p:attrNameLst>
+                                          <p:attrName>style.visibility</p:attrName>
+                                        </p:attrNameLst>
+                                      </p:cBhvr>
+                                      <p:to>
+                                        <p:strVal val="visible"/>
+                                      </p:to>
+                                    </p:set>
+                                    <p:anim calcmode="lin" valueType="num">
+                                      <p:cBhvr additive="base">
+                                        <p:cTn id="7" dur="500" fill="hold"/>
+                                        <p:tgtEl>
+                                          <p:spTgt spid="2"/>
+                                        </p:tgtEl>
+                                        <p:attrNameLst>
+                                          <p:attrName>ppt_x</p:attrName>
+                                        </p:attrNameLst>
+                                      </p:cBhvr>
+                                      <p:tavLst>
+                                        <p:tav tm="0">
+                                          <p:val>
+                                            <p:strVal val="#ppt_x"/>
+                                          </p:val>
+                                        </p:tav>
+                                        <p:tav tm="100000">
+                                          <p:val>
+                                            <p:strVal val="#ppt_x"/>
+                                          </p:val>
+                                        </p:tav>
+                                      </p:tavLst>
+                                    </p:anim>
+                                    <p:anim calcmode="lin" valueType="num">
+                                      <p:cBhvr additive="base">
+                                        <p:cTn id="8" dur="500" fill="hold"/>
+                                        <p:tgtEl>
+                                          <p:spTgt spid="2"/>
+                                        </p:tgtEl>
+                                        <p:attrNameLst>
+                                          <p:attrName>ppt_y</p:attrName>
+                                        </p:attrNameLst>
+                                      </p:cBhvr>
+                                      <p:tavLst>
+                                        <p:tav tm="0">
+                                          <p:val>
+                                            <p:strVal val="1+#ppt_h/2"/>
+                                          </p:val>
+                                        </p:tav>
+                                        <p:tav tm="100000">
+                                          <p:val>
+                                            <p:strVal val="#ppt_y"/>
+                                          </p:val>
+                                        </p:tav>
+                                      </p:tavLst>
+                                    </p:anim>
+                                  </p:childTnLst>
+                                </p:cTn>
+                              </p:par>
+                            </p:childTnLst>
+                          </p:cTn>
+                        </p:par>
+                      </p:childTnLst>
+                    </p:cTn>
+                  </p:par>
+                  <p:par>
+                    <p:cTn id="9" fill="hold">
+                      <p:stCondLst>
+                        <p:cond delay="indefinite"/>
+                      </p:stCondLst>
+                      <p:childTnLst>
+                        <p:par>
+                          <p:cTn id="10" fill="hold">
+                            <p:stCondLst>
+                              <p:cond delay="0"/>
+                            </p:stCondLst>
+                            <p:childTnLst>
+                              <p:par>
+                                <p:cTn id="11" presetID="2" presetClass="entr" presetSubtype="4" fill="hold" grpId="0" nodeType="clickEffect">
+                                  <p:stCondLst>
+                                    <p:cond delay="0"/>
+                                  </p:stCondLst>
+                                  <p:childTnLst>
+                                    <p:set>
+                                      <p:cBhvr>
+                                        <p:cTn id="12" dur="1" fill="hold">
+                                          <p:stCondLst>
+                                            <p:cond delay="0"/>
+                                          </p:stCondLst>
+                                        </p:cTn>
+                                        <p:tgtEl>
+                                          <p:spTgt spid="3">
+                                            <p:txEl>
+                                              <p:pRg st="0" end="0"/>
+                                            </p:txEl>
+                                          </p:spTgt>
+                                        </p:tgtEl>
+                                        <p:attrNameLst>
+                                          <p:attrName>style.visibility</p:attrName>
+                                        </p:attrNameLst>
+                                      </p:cBhvr>
+                                      <p:to>
+                                        <p:strVal val="visible"/>
+                                      </p:to>
+                                    </p:set>
+                                    <p:anim calcmode="lin" valueType="num">
+                                      <p:cBhvr additive="base">
+                                        <p:cTn id="13" dur="500" fill="hold"/>
+                                        <p:tgtEl>
+                                          <p:spTgt spid="3">
+                                            <p:txEl>
+                                              <p:pRg st="0" end="0"/>
+                                            </p:txEl>
+                                          </p:spTgt>
+                                        </p:tgtEl>
+                                        <p:attrNameLst>
+                                          <p:attrName>ppt_x</p:attrName>
+                                        </p:attrNameLst>
+                                      </p:cBhvr>
+                                      <p:tavLst>
+                                        <p:tav tm="0">
+                                          <p:val>
+                                            <p:strVal val="#ppt_x"/>
+                                          </p:val>
+                                        </p:tav>
+                                        <p:tav tm="100000">
+                                          <p:val>
+                                            <p:strVal val="#ppt_x"/>
+                                          </p:val>
+                                        </p:tav>
+                                      </p:tavLst>
+                                    </p:anim>
+                                    <p:anim calcmode="lin" valueType="num">
+                                      <p:cBhvr additive="base">
+                                        <p:cTn id="14" dur="500" fill="hold"/>
+                                        <p:tgtEl>
+                                          <p:spTgt spid="3">
+                                            <p:txEl>
+                                              <p:pRg st="0" end="0"/>
+                                            </p:txEl>
+                                          </p:spTgt>
+                                        </p:tgtEl>
+                                        <p:attrNameLst>
+                                          <p:attrName>ppt_y</p:attrName>
+                                        </p:attrNameLst>
+                                      </p:cBhvr>
+                                      <p:tavLst>
+                                        <p:tav tm="0">
+                                          <p:val>
+                                            <p:strVal val="1+#ppt_h/2"/>
+                                          </p:val>
+                                        </p:tav>
+                                        <p:tav tm="100000">
+                                          <p:val>
+                                            <p:strVal val="#ppt_y"/>
+                                          </p:val>
+                                        </p:tav>
+                                      </p:tavLst>
+                                    </p:anim>
+                                  </p:childTnLst>
+                                </p:cTn>
+                              </p:par>
+                            </p:childTnLst>
+                          </p:cTn>
+                        </p:par>
+                      </p:childTnLst>
+                    </p:cTn>
+                  </p:par>
+                  <p:par>
+                    <p:cTn id="15" fill="hold">
+                      <p:stCondLst>
+                        <p:cond delay="indefinite"/>
+                      </p:stCondLst>
+                      <p:childTnLst>
+                        <p:par>
+                          <p:cTn id="16" fill="hold">
+                            <p:stCondLst>
+                              <p:cond delay="0"/>
+                            </p:stCondLst>
+                            <p:childTnLst>
+                              <p:par>
+                                <p:cTn id="17" presetID="2" presetClass="entr" presetSubtype="4" fill="hold" grpId="0" nodeType="clickEffect">
+                                  <p:stCondLst>
+                                    <p:cond delay="0"/>
+                                  </p:stCondLst>
+                                  <p:childTnLst>
+                                    <p:set>
+                                      <p:cBhvr>
+                                        <p:cTn id="18" dur="1" fill="hold">
+                                          <p:stCondLst>
+                                            <p:cond delay="0"/>
+                                          </p:stCondLst>
+                                        </p:cTn>
+                                        <p:tgtEl>
+                                          <p:spTgt spid="4"/>
+                                        </p:tgtEl>
+                                        <p:attrNameLst>
+                                          <p:attrName>style.visibility</p:attrName>
+                                        </p:attrNameLst>
+                                      </p:cBhvr>
+                                      <p:to>
+                                        <p:strVal val="visible"/>
+                                      </p:to>
+                                    </p:set>
+                                    <p:anim calcmode="lin" valueType="num">
+                                      <p:cBhvr additive="base">
+                                        <p:cTn id="19" dur="500" fill="hold"/>
+                                        <p:tgtEl>
+                                          <p:spTgt spid="4"/>
+                                        </p:tgtEl>
+                                        <p:attrNameLst>
+                                          <p:attrName>ppt_x</p:attrName>
+                                        </p:attrNameLst>
+                                      </p:cBhvr>
+                                      <p:tavLst>
+                                        <p:tav tm="0">
+                                          <p:val>
+                                            <p:strVal val="#ppt_x"/>
+                                          </p:val>
+                                        </p:tav>
+                                        <p:tav tm="100000">
+                                          <p:val>
+                                            <p:strVal val="#ppt_x"/>
+                                          </p:val>
+                                        </p:tav>
+                                      </p:tavLst>
+                                    </p:anim>
+                                    <p:anim calcmode="lin" valueType="num">
+                                      <p:cBhvr additive="base">
+                                        <p:cTn id="20" dur="500" fill="hold"/>
+                                        <p:tgtEl>
+                                          <p:spTgt spid="4"/>
+                                        </p:tgtEl>
+                                        <p:attrNameLst>
+                                          <p:attrName>ppt_y</p:attrName>
+                                        </p:attrNameLst>
+                                      </p:cBhvr>
+                                      <p:tavLst>
+                                        <p:tav tm="0">
+                                          <p:val>
+                                            <p:strVal val="1+#ppt_h/2"/>
+                                          </p:val>
+                                        </p:tav>
+                                        <p:tav tm="100000">
+                                          <p:val>
+                                            <p:strVal val="#ppt_y"/>
+                                          </p:val>
+                                        </p:tav>
+                                      </p:tavLst>
+                                    </p:anim>
+                                  </p:childTnLst>
+                                </p:cTn>
+                              </p:par>
+                            </p:childTnLst>
+                          </p:cTn>
+                        </p:par>
+                      </p:childTnLst>
+                    </p:cTn>
+                  </p:par>
+                  <p:par>
+                    <p:cTn id="21" fill="hold">
+                      <p:stCondLst>
+                        <p:cond delay="indefinite"/>
+                      </p:stCondLst>
+                      <p:childTnLst>
+                        <p:par>
+                          <p:cTn id="22" fill="hold">
+                            <p:stCondLst>
+                              <p:cond delay="0"/>
+                            </p:stCondLst>
+                            <p:childTnLst>
+                              <p:par>
+                                <p:cTn id="23" presetID="2" presetClass="entr" presetSubtype="4" fill="hold" grpId="0" nodeType="clickEffect">
+                                  <p:stCondLst>
+                                    <p:cond delay="0"/>
+                                  </p:stCondLst>
+                                  <p:childTnLst>
+                                    <p:set>
+                                      <p:cBhvr>
+                                        <p:cTn id="24" dur="1" fill="hold">
+                                          <p:stCondLst>
+                                            <p:cond delay="0"/>
+                                          </p:stCondLst>
+                                        </p:cTn>
+                                        <p:tgtEl>
+                                          <p:spTgt spid="5"/>
+                                        </p:tgtEl>
+                                        <p:attrNameLst>
+                                          <p:attrName>style.visibility</p:attrName>
+                                        </p:attrNameLst>
+                                      </p:cBhvr>
+                                      <p:to>
+                                        <p:strVal val="visible"/>
+                                      </p:to>
+                                    </p:set>
+                                    <p:anim calcmode="lin" valueType="num">
+                                      <p:cBhvr additive="base">
+                                        <p:cTn id="25" dur="500" fill="hold"/>
+                                        <p:tgtEl>
+                                          <p:spTgt spid="5"/>
+                                        </p:tgtEl>
+                                        <p:attrNameLst>
+                                          <p:attrName>ppt_x</p:attrName>
+                                        </p:attrNameLst>
+                                      </p:cBhvr>
+                                      <p:tavLst>
+                                        <p:tav tm="0">
+                                          <p:val>
+                                            <p:strVal val="#ppt_x"/>
+                                          </p:val>
+                                        </p:tav>
+                                        <p:tav tm="100000">
+                                          <p:val>
+                                            <p:strVal val="#ppt_x"/>
+                                          </p:val>
+                                        </p:tav>
+                                      </p:tavLst>
+                                    </p:anim>
+                                    <p:anim calcmode="lin" valueType="num">
+                                      <p:cBhvr additive="base">
+                                        <p:cTn id="26" dur="500" fill="hold"/>
+                                        <p:tgtEl>
+                                          <p:spTgt spid="5"/>
+                                        </p:tgtEl>
+                                        <p:attrNameLst>
+                                          <p:attrName>ppt_y</p:attrName>
+                                        </p:attrNameLst>
+                                      </p:cBhvr>
+                                      <p:tavLst>
+                                        <p:tav tm="0">
+                                          <p:val>
+                                            <p:strVal val="1+#ppt_h/2"/>
+                                          </p:val>
+                                        </p:tav>
+                                        <p:tav tm="100000">
+                                          <p:val>
+                                            <p:strVal val="#ppt_y"/>
+                                          </p:val>
+                                        </p:tav>
+                                      </p:tavLst>
+                                    </p:anim>
+                                  </p:childTnLst>
+                                </p:cTn>
+                              </p:par>
+                            </p:childTnLst>
+                          </p:cTn>
+                        </p:par>
+                      </p:childTnLst>
+                    </p:cTn>
+                  </p:par>
+                </p:childTnLst>
+              </p:cTn>
+              <p:prevCondLst>
+                <p:cond evt="onPrev" delay="0">
+                  <p:tgtEl>
+                    <p:sldTgt/>
+                  </p:tgtEl>
+                </p:cond>
+              </p:prevCondLst>
+              <p:nextCondLst>
+                <p:cond evt="onNext" delay="0">
+                  <p:tgtEl>
+                    <p:sldTgt/>
+                  </p:tgtEl>
+                </p:cond>
+              </p:nextCondLst>
+            </p:seq>
+          </p:childTnLst>
+        </p:cTn>
+      </p:par>
+    </p:tnLst>
+    <p:bldLst>
+      <p:bldP spid="2" grpId="0"/>
+      <p:bldP spid="3" grpId="0" build="p"/>
+      <p:bldP spid="4" grpId="0"/>
+      <p:bldP spid="5" grpId="0"/>
+    </p:bldLst>
+  </p:timing>
+</p:sld>
+</file>
+
+<file path=ppt/slides/slide3.xml><?xml version="1.0" encoding="utf-8"?>
+<p:sld xmlns:a="http://schemas.openxmlformats.org/drawingml/2006/main" xmlns:r="http://schemas.openxmlformats.org/officeDocument/2006/relationships" xmlns:p="http://schemas.openxmlformats.org/presentationml/2006/main">
+  <p:cSld>
+    <p:spTree>
+      <p:nvGrpSpPr>
+        <p:cNvPr id="1" name=""/>
+        <p:cNvGrpSpPr/>
+        <p:nvPr/>
+      </p:nvGrpSpPr>
+      <p:grpSpPr>
+        <a:xfrm>
+          <a:off x="0" y="0"/>
+          <a:ext cx="0" cy="0"/>
+          <a:chOff x="0" y="0"/>
+          <a:chExt cx="0" cy="0"/>
+        </a:xfrm>
+      </p:grpSpPr>
+      <p:sp>
+        <p:nvSpPr>
+          <p:cNvPr id="2" name="Title 1"/>
+          <p:cNvSpPr>
+            <a:spLocks noGrp="1"/>
+          </p:cNvSpPr>
+          <p:nvPr>
+            <p:ph type="title"/>
+          </p:nvPr>
+        </p:nvSpPr>
+        <p:spPr>
+          <a:xfrm>
+            <a:off x="484584" y="1196789"/>
+            <a:ext cx="7053542" cy="572705"/>
+          </a:xfrm>
+        </p:spPr>
+        <p:txBody>
+          <a:bodyPr>
+            <a:normAutofit fontScale="90000"/>
+          </a:bodyPr>
+          <a:lstStyle/>
+          <a:p>
+            <a:pPr algn="ctr"/>
+            <a:r>
+              <a:rPr lang="en-US" b="1" dirty="0"/>
+              <a:t>Instructor: Muhammad Sahil</a:t>
+            </a:r>
+          </a:p>
+        </p:txBody>
+      </p:sp>
+      <p:sp>
+        <p:nvSpPr>
+          <p:cNvPr id="4" name="Rectangle 1"/>
+          <p:cNvSpPr>
+            <a:spLocks noGrp="1" noChangeArrowheads="1"/>
           </p:cNvSpPr>
           <p:nvPr>
             <p:ph idx="1"/>
+          </p:nvPr>
+        </p:nvSpPr>
+        <p:spPr bwMode="auto">
+          <a:xfrm>
+            <a:off x="827484" y="2403246"/>
+            <a:ext cx="7576498" cy="2008242"/>
+          </a:xfrm>
+          <a:prstGeom prst="rect">
+            <a:avLst/>
+          </a:prstGeom>
+          <a:noFill/>
+          <a:ln>
+            <a:noFill/>
+          </a:ln>
+          <a:effectLst/>
+          <a:extLst>
+            <a:ext uri="{909E8E84-426E-40DD-AFC4-6F175D3DCCD1}">
+              <a14:hiddenFill xmlns:a14="http://schemas.microsoft.com/office/drawing/2010/main">
+                <a:solidFill>
+                  <a:schemeClr val="accent1"/>
+                </a:solidFill>
+              </a14:hiddenFill>
+            </a:ext>
+            <a:ext uri="{91240B29-F687-4F45-9708-019B960494DF}">
+              <a14:hiddenLine xmlns:a14="http://schemas.microsoft.com/office/drawing/2010/main" w="9525">
+                <a:solidFill>
+                  <a:schemeClr val="tx1"/>
+                </a:solidFill>
+                <a:miter lim="800000"/>
+                <a:headEnd/>
+                <a:tailEnd/>
+              </a14:hiddenLine>
+            </a:ext>
+            <a:ext uri="{AF507438-7753-43E0-B8FC-AC1667EBCBE1}">
+              <a14:hiddenEffects xmlns:a14="http://schemas.microsoft.com/office/drawing/2010/main">
+                <a:effectLst>
+                  <a:outerShdw dist="35921" dir="2700000" algn="ctr" rotWithShape="0">
+                    <a:schemeClr val="bg2"/>
+                  </a:outerShdw>
+                </a:effectLst>
+              </a14:hiddenEffects>
+            </a:ext>
+          </a:extLst>
+        </p:spPr>
+        <p:txBody>
+          <a:bodyPr vert="horz" wrap="none" lIns="68580" tIns="34290" rIns="68580" bIns="34290" numCol="1" rtlCol="0" anchor="ctr" anchorCtr="0" compatLnSpc="1">
+            <a:prstTxWarp prst="textNoShape">
+              <a:avLst/>
+            </a:prstTxWarp>
+            <a:spAutoFit/>
+          </a:bodyPr>
+          <a:lstStyle/>
+          <a:p>
+            <a:pPr defTabSz="685800" eaLnBrk="0" fontAlgn="base" hangingPunct="0">
+              <a:spcBef>
+                <a:spcPct val="0"/>
+              </a:spcBef>
+              <a:spcAft>
+                <a:spcPct val="0"/>
+              </a:spcAft>
+              <a:buClrTx/>
+              <a:buSzTx/>
+              <a:buFont typeface="Wingdings" panose="05000000000000000000" pitchFamily="2" charset="2"/>
+              <a:buChar char="q"/>
+            </a:pPr>
+            <a:r>
+              <a:rPr lang="en-US" altLang="en-US" sz="2100" dirty="0">
+                <a:latin typeface="Arial" panose="020B0604020202020204" pitchFamily="34" charset="0"/>
+              </a:rPr>
+              <a:t>BS in Computer Science – University of Peshawar</a:t>
+            </a:r>
+          </a:p>
+          <a:p>
+            <a:pPr defTabSz="685800" eaLnBrk="0" fontAlgn="base" hangingPunct="0">
+              <a:spcBef>
+                <a:spcPct val="0"/>
+              </a:spcBef>
+              <a:spcAft>
+                <a:spcPct val="0"/>
+              </a:spcAft>
+              <a:buClrTx/>
+              <a:buSzTx/>
+              <a:buFont typeface="Wingdings" panose="05000000000000000000" pitchFamily="2" charset="2"/>
+              <a:buChar char="q"/>
+            </a:pPr>
+            <a:r>
+              <a:rPr lang="en-US" altLang="en-US" sz="2100" dirty="0">
+                <a:latin typeface="Arial" panose="020B0604020202020204" pitchFamily="34" charset="0"/>
+              </a:rPr>
+              <a:t>1 Year MERN Stack Developer – E Digital Pakistan (KPITB)</a:t>
+            </a:r>
+          </a:p>
+          <a:p>
+            <a:pPr defTabSz="685800" eaLnBrk="0" fontAlgn="base" hangingPunct="0">
+              <a:spcBef>
+                <a:spcPct val="0"/>
+              </a:spcBef>
+              <a:spcAft>
+                <a:spcPct val="0"/>
+              </a:spcAft>
+              <a:buClrTx/>
+              <a:buSzTx/>
+              <a:buFont typeface="Wingdings" panose="05000000000000000000" pitchFamily="2" charset="2"/>
+              <a:buChar char="q"/>
+            </a:pPr>
+            <a:r>
+              <a:rPr lang="en-US" altLang="en-US" sz="2100" dirty="0">
+                <a:latin typeface="Arial" panose="020B0604020202020204" pitchFamily="34" charset="0"/>
+              </a:rPr>
+              <a:t>1 Year Web Instructor – E Digital Pakistan</a:t>
+            </a:r>
+          </a:p>
+          <a:p>
+            <a:pPr defTabSz="685800" eaLnBrk="0" fontAlgn="base" hangingPunct="0">
+              <a:spcBef>
+                <a:spcPct val="0"/>
+              </a:spcBef>
+              <a:spcAft>
+                <a:spcPct val="0"/>
+              </a:spcAft>
+              <a:buClrTx/>
+              <a:buSzTx/>
+              <a:buFont typeface="Wingdings" panose="05000000000000000000" pitchFamily="2" charset="2"/>
+              <a:buChar char="q"/>
+            </a:pPr>
+            <a:r>
+              <a:rPr lang="en-US" altLang="en-US" sz="2100" dirty="0">
+                <a:latin typeface="Arial" panose="020B0604020202020204" pitchFamily="34" charset="0"/>
+              </a:rPr>
+              <a:t>6 Months Web Instructor – University of Peshawar</a:t>
+            </a:r>
+          </a:p>
+          <a:p>
+            <a:pPr defTabSz="685800" eaLnBrk="0" fontAlgn="base" hangingPunct="0">
+              <a:spcBef>
+                <a:spcPct val="0"/>
+              </a:spcBef>
+              <a:spcAft>
+                <a:spcPct val="0"/>
+              </a:spcAft>
+              <a:buClrTx/>
+              <a:buSzTx/>
+              <a:buFont typeface="Wingdings" panose="05000000000000000000" pitchFamily="2" charset="2"/>
+              <a:buChar char="q"/>
+            </a:pPr>
+            <a:r>
+              <a:rPr lang="en-US" altLang="en-US" sz="2100" dirty="0">
+                <a:latin typeface="Arial" panose="020B0604020202020204" pitchFamily="34" charset="0"/>
+              </a:rPr>
+              <a:t>Computer Science Teacher – </a:t>
+            </a:r>
+            <a:r>
+              <a:rPr lang="en-US" altLang="en-US" sz="2100" dirty="0" err="1">
+                <a:latin typeface="Arial" panose="020B0604020202020204" pitchFamily="34" charset="0"/>
+              </a:rPr>
+              <a:t>Alflah</a:t>
+            </a:r>
+            <a:r>
+              <a:rPr lang="en-US" altLang="en-US" sz="2100" dirty="0">
+                <a:latin typeface="Arial" panose="020B0604020202020204" pitchFamily="34" charset="0"/>
+              </a:rPr>
+              <a:t> Model College, </a:t>
+            </a:r>
+            <a:r>
+              <a:rPr lang="en-US" altLang="en-US" sz="2100" dirty="0" err="1">
+                <a:latin typeface="Arial" panose="020B0604020202020204" pitchFamily="34" charset="0"/>
+              </a:rPr>
+              <a:t>Sarband</a:t>
+            </a:r>
+            <a:endParaRPr lang="en-US" altLang="en-US" sz="2100" dirty="0">
+              <a:latin typeface="Arial" panose="020B0604020202020204" pitchFamily="34" charset="0"/>
+            </a:endParaRPr>
+          </a:p>
+          <a:p>
+            <a:pPr defTabSz="685800" eaLnBrk="0" fontAlgn="base" hangingPunct="0">
+              <a:spcBef>
+                <a:spcPct val="0"/>
+              </a:spcBef>
+              <a:spcAft>
+                <a:spcPct val="0"/>
+              </a:spcAft>
+              <a:buClrTx/>
+              <a:buSzTx/>
+              <a:buFont typeface="Wingdings" panose="05000000000000000000" pitchFamily="2" charset="2"/>
+              <a:buChar char="q"/>
+            </a:pPr>
+            <a:r>
+              <a:rPr lang="en-US" altLang="en-US" sz="2100" dirty="0">
+                <a:latin typeface="Arial" panose="020B0604020202020204" pitchFamily="34" charset="0"/>
+              </a:rPr>
+              <a:t>Experience with multiple local client projects</a:t>
+            </a:r>
+          </a:p>
+        </p:txBody>
+      </p:sp>
+      <p:sp>
+        <p:nvSpPr>
+          <p:cNvPr id="5" name="Title 1"/>
+          <p:cNvSpPr txBox="1">
+            <a:spLocks/>
+          </p:cNvSpPr>
+          <p:nvPr/>
+        </p:nvSpPr>
+        <p:spPr>
+          <a:xfrm>
+            <a:off x="482430" y="5251191"/>
+            <a:ext cx="7053542" cy="572705"/>
+          </a:xfrm>
+          <a:prstGeom prst="rect">
+            <a:avLst/>
+          </a:prstGeom>
+        </p:spPr>
+        <p:txBody>
+          <a:bodyPr vert="horz" lIns="68580" tIns="34290" rIns="68580" bIns="34290" rtlCol="0" anchor="t">
+            <a:noAutofit/>
+          </a:bodyPr>
+          <a:lstStyle>
+            <a:lvl1pPr algn="l" defTabSz="457200" rtl="0" eaLnBrk="1" latinLnBrk="0" hangingPunct="1">
+              <a:spcBef>
+                <a:spcPct val="0"/>
+              </a:spcBef>
+              <a:buNone/>
+              <a:defRPr sz="4200" b="0" i="0" kern="1200">
+                <a:solidFill>
+                  <a:schemeClr val="tx2"/>
+                </a:solidFill>
+                <a:latin typeface="+mj-lt"/>
+                <a:ea typeface="+mj-ea"/>
+                <a:cs typeface="+mj-cs"/>
+              </a:defRPr>
+            </a:lvl1pPr>
+            <a:lvl2pPr eaLnBrk="1" hangingPunct="1">
+              <a:defRPr>
+                <a:solidFill>
+                  <a:schemeClr val="tx2"/>
+                </a:solidFill>
+              </a:defRPr>
+            </a:lvl2pPr>
+            <a:lvl3pPr eaLnBrk="1" hangingPunct="1">
+              <a:defRPr>
+                <a:solidFill>
+                  <a:schemeClr val="tx2"/>
+                </a:solidFill>
+              </a:defRPr>
+            </a:lvl3pPr>
+            <a:lvl4pPr eaLnBrk="1" hangingPunct="1">
+              <a:defRPr>
+                <a:solidFill>
+                  <a:schemeClr val="tx2"/>
+                </a:solidFill>
+              </a:defRPr>
+            </a:lvl4pPr>
+            <a:lvl5pPr eaLnBrk="1" hangingPunct="1">
+              <a:defRPr>
+                <a:solidFill>
+                  <a:schemeClr val="tx2"/>
+                </a:solidFill>
+              </a:defRPr>
+            </a:lvl5pPr>
+            <a:lvl6pPr eaLnBrk="1" hangingPunct="1">
+              <a:defRPr>
+                <a:solidFill>
+                  <a:schemeClr val="tx2"/>
+                </a:solidFill>
+              </a:defRPr>
+            </a:lvl6pPr>
+            <a:lvl7pPr eaLnBrk="1" hangingPunct="1">
+              <a:defRPr>
+                <a:solidFill>
+                  <a:schemeClr val="tx2"/>
+                </a:solidFill>
+              </a:defRPr>
+            </a:lvl7pPr>
+            <a:lvl8pPr eaLnBrk="1" hangingPunct="1">
+              <a:defRPr>
+                <a:solidFill>
+                  <a:schemeClr val="tx2"/>
+                </a:solidFill>
+              </a:defRPr>
+            </a:lvl8pPr>
+            <a:lvl9pPr eaLnBrk="1" hangingPunct="1">
+              <a:defRPr>
+                <a:solidFill>
+                  <a:schemeClr val="tx2"/>
+                </a:solidFill>
+              </a:defRPr>
+            </a:lvl9pPr>
+          </a:lstStyle>
+          <a:p>
+            <a:pPr algn="ctr"/>
+            <a:r>
+              <a:rPr lang="en-US" sz="1800" b="1" dirty="0"/>
+              <a:t>Full Stack / MERN Stack Web Developer | Web Instructor</a:t>
+            </a:r>
+          </a:p>
+        </p:txBody>
+      </p:sp>
+    </p:spTree>
+    <p:extLst>
+      <p:ext uri="{BB962C8B-B14F-4D97-AF65-F5344CB8AC3E}">
+        <p14:creationId xmlns:p14="http://schemas.microsoft.com/office/powerpoint/2010/main" val="3988509268"/>
+      </p:ext>
+    </p:extLst>
+  </p:cSld>
+  <p:clrMapOvr>
+    <a:masterClrMapping/>
+  </p:clrMapOvr>
+  <p:transition spd="slow">
+    <p:cover/>
+  </p:transition>
+  <p:timing>
+    <p:tnLst>
+      <p:par>
+        <p:cTn id="1" dur="indefinite" restart="never" nodeType="tmRoot">
+          <p:childTnLst>
+            <p:seq concurrent="1" nextAc="seek">
+              <p:cTn id="2" dur="indefinite" nodeType="mainSeq">
+                <p:childTnLst>
+                  <p:par>
+                    <p:cTn id="3" fill="hold">
+                      <p:stCondLst>
+                        <p:cond delay="indefinite"/>
+                      </p:stCondLst>
+                      <p:childTnLst>
+                        <p:par>
+                          <p:cTn id="4" fill="hold">
+                            <p:stCondLst>
+                              <p:cond delay="0"/>
+                            </p:stCondLst>
+                            <p:childTnLst>
+                              <p:par>
+                                <p:cTn id="5" presetID="42" presetClass="entr" presetSubtype="0" fill="hold" grpId="0" nodeType="clickEffect">
+                                  <p:stCondLst>
+                                    <p:cond delay="0"/>
+                                  </p:stCondLst>
+                                  <p:childTnLst>
+                                    <p:set>
+                                      <p:cBhvr>
+                                        <p:cTn id="6" dur="1" fill="hold">
+                                          <p:stCondLst>
+                                            <p:cond delay="0"/>
+                                          </p:stCondLst>
+                                        </p:cTn>
+                                        <p:tgtEl>
+                                          <p:spTgt spid="2"/>
+                                        </p:tgtEl>
+                                        <p:attrNameLst>
+                                          <p:attrName>style.visibility</p:attrName>
+                                        </p:attrNameLst>
+                                      </p:cBhvr>
+                                      <p:to>
+                                        <p:strVal val="visible"/>
+                                      </p:to>
+                                    </p:set>
+                                    <p:animEffect transition="in" filter="fade">
+                                      <p:cBhvr>
+                                        <p:cTn id="7" dur="1000"/>
+                                        <p:tgtEl>
+                                          <p:spTgt spid="2"/>
+                                        </p:tgtEl>
+                                      </p:cBhvr>
+                                    </p:animEffect>
+                                    <p:anim calcmode="lin" valueType="num">
+                                      <p:cBhvr>
+                                        <p:cTn id="8" dur="1000" fill="hold"/>
+                                        <p:tgtEl>
+                                          <p:spTgt spid="2"/>
+                                        </p:tgtEl>
+                                        <p:attrNameLst>
+                                          <p:attrName>ppt_x</p:attrName>
+                                        </p:attrNameLst>
+                                      </p:cBhvr>
+                                      <p:tavLst>
+                                        <p:tav tm="0">
+                                          <p:val>
+                                            <p:strVal val="#ppt_x"/>
+                                          </p:val>
+                                        </p:tav>
+                                        <p:tav tm="100000">
+                                          <p:val>
+                                            <p:strVal val="#ppt_x"/>
+                                          </p:val>
+                                        </p:tav>
+                                      </p:tavLst>
+                                    </p:anim>
+                                    <p:anim calcmode="lin" valueType="num">
+                                      <p:cBhvr>
+                                        <p:cTn id="9" dur="1000" fill="hold"/>
+                                        <p:tgtEl>
+                                          <p:spTgt spid="2"/>
+                                        </p:tgtEl>
+                                        <p:attrNameLst>
+                                          <p:attrName>ppt_y</p:attrName>
+                                        </p:attrNameLst>
+                                      </p:cBhvr>
+                                      <p:tavLst>
+                                        <p:tav tm="0">
+                                          <p:val>
+                                            <p:strVal val="#ppt_y+.1"/>
+                                          </p:val>
+                                        </p:tav>
+                                        <p:tav tm="100000">
+                                          <p:val>
+                                            <p:strVal val="#ppt_y"/>
+                                          </p:val>
+                                        </p:tav>
+                                      </p:tavLst>
+                                    </p:anim>
+                                  </p:childTnLst>
+                                </p:cTn>
+                              </p:par>
+                            </p:childTnLst>
+                          </p:cTn>
+                        </p:par>
+                      </p:childTnLst>
+                    </p:cTn>
+                  </p:par>
+                  <p:par>
+                    <p:cTn id="10" fill="hold">
+                      <p:stCondLst>
+                        <p:cond delay="indefinite"/>
+                      </p:stCondLst>
+                      <p:childTnLst>
+                        <p:par>
+                          <p:cTn id="11" fill="hold">
+                            <p:stCondLst>
+                              <p:cond delay="0"/>
+                            </p:stCondLst>
+                            <p:childTnLst>
+                              <p:par>
+                                <p:cTn id="12" presetID="2" presetClass="entr" presetSubtype="4" fill="hold" grpId="0" nodeType="clickEffect">
+                                  <p:stCondLst>
+                                    <p:cond delay="0"/>
+                                  </p:stCondLst>
+                                  <p:childTnLst>
+                                    <p:set>
+                                      <p:cBhvr>
+                                        <p:cTn id="13" dur="1" fill="hold">
+                                          <p:stCondLst>
+                                            <p:cond delay="0"/>
+                                          </p:stCondLst>
+                                        </p:cTn>
+                                        <p:tgtEl>
+                                          <p:spTgt spid="4">
+                                            <p:txEl>
+                                              <p:pRg st="0" end="0"/>
+                                            </p:txEl>
+                                          </p:spTgt>
+                                        </p:tgtEl>
+                                        <p:attrNameLst>
+                                          <p:attrName>style.visibility</p:attrName>
+                                        </p:attrNameLst>
+                                      </p:cBhvr>
+                                      <p:to>
+                                        <p:strVal val="visible"/>
+                                      </p:to>
+                                    </p:set>
+                                    <p:anim calcmode="lin" valueType="num">
+                                      <p:cBhvr additive="base">
+                                        <p:cTn id="14" dur="500" fill="hold"/>
+                                        <p:tgtEl>
+                                          <p:spTgt spid="4">
+                                            <p:txEl>
+                                              <p:pRg st="0" end="0"/>
+                                            </p:txEl>
+                                          </p:spTgt>
+                                        </p:tgtEl>
+                                        <p:attrNameLst>
+                                          <p:attrName>ppt_x</p:attrName>
+                                        </p:attrNameLst>
+                                      </p:cBhvr>
+                                      <p:tavLst>
+                                        <p:tav tm="0">
+                                          <p:val>
+                                            <p:strVal val="#ppt_x"/>
+                                          </p:val>
+                                        </p:tav>
+                                        <p:tav tm="100000">
+                                          <p:val>
+                                            <p:strVal val="#ppt_x"/>
+                                          </p:val>
+                                        </p:tav>
+                                      </p:tavLst>
+                                    </p:anim>
+                                    <p:anim calcmode="lin" valueType="num">
+                                      <p:cBhvr additive="base">
+                                        <p:cTn id="15" dur="500" fill="hold"/>
+                                        <p:tgtEl>
+                                          <p:spTgt spid="4">
+                                            <p:txEl>
+                                              <p:pRg st="0" end="0"/>
+                                            </p:txEl>
+                                          </p:spTgt>
+                                        </p:tgtEl>
+                                        <p:attrNameLst>
+                                          <p:attrName>ppt_y</p:attrName>
+                                        </p:attrNameLst>
+                                      </p:cBhvr>
+                                      <p:tavLst>
+                                        <p:tav tm="0">
+                                          <p:val>
+                                            <p:strVal val="1+#ppt_h/2"/>
+                                          </p:val>
+                                        </p:tav>
+                                        <p:tav tm="100000">
+                                          <p:val>
+                                            <p:strVal val="#ppt_y"/>
+                                          </p:val>
+                                        </p:tav>
+                                      </p:tavLst>
+                                    </p:anim>
+                                  </p:childTnLst>
+                                </p:cTn>
+                              </p:par>
+                            </p:childTnLst>
+                          </p:cTn>
+                        </p:par>
+                      </p:childTnLst>
+                    </p:cTn>
+                  </p:par>
+                  <p:par>
+                    <p:cTn id="16" fill="hold">
+                      <p:stCondLst>
+                        <p:cond delay="indefinite"/>
+                      </p:stCondLst>
+                      <p:childTnLst>
+                        <p:par>
+                          <p:cTn id="17" fill="hold">
+                            <p:stCondLst>
+                              <p:cond delay="0"/>
+                            </p:stCondLst>
+                            <p:childTnLst>
+                              <p:par>
+                                <p:cTn id="18" presetID="2" presetClass="entr" presetSubtype="4" fill="hold" grpId="0" nodeType="clickEffect">
+                                  <p:stCondLst>
+                                    <p:cond delay="0"/>
+                                  </p:stCondLst>
+                                  <p:childTnLst>
+                                    <p:set>
+                                      <p:cBhvr>
+                                        <p:cTn id="19" dur="1" fill="hold">
+                                          <p:stCondLst>
+                                            <p:cond delay="0"/>
+                                          </p:stCondLst>
+                                        </p:cTn>
+                                        <p:tgtEl>
+                                          <p:spTgt spid="4">
+                                            <p:txEl>
+                                              <p:pRg st="1" end="1"/>
+                                            </p:txEl>
+                                          </p:spTgt>
+                                        </p:tgtEl>
+                                        <p:attrNameLst>
+                                          <p:attrName>style.visibility</p:attrName>
+                                        </p:attrNameLst>
+                                      </p:cBhvr>
+                                      <p:to>
+                                        <p:strVal val="visible"/>
+                                      </p:to>
+                                    </p:set>
+                                    <p:anim calcmode="lin" valueType="num">
+                                      <p:cBhvr additive="base">
+                                        <p:cTn id="20" dur="500" fill="hold"/>
+                                        <p:tgtEl>
+                                          <p:spTgt spid="4">
+                                            <p:txEl>
+                                              <p:pRg st="1" end="1"/>
+                                            </p:txEl>
+                                          </p:spTgt>
+                                        </p:tgtEl>
+                                        <p:attrNameLst>
+                                          <p:attrName>ppt_x</p:attrName>
+                                        </p:attrNameLst>
+                                      </p:cBhvr>
+                                      <p:tavLst>
+                                        <p:tav tm="0">
+                                          <p:val>
+                                            <p:strVal val="#ppt_x"/>
+                                          </p:val>
+                                        </p:tav>
+                                        <p:tav tm="100000">
+                                          <p:val>
+                                            <p:strVal val="#ppt_x"/>
+                                          </p:val>
+                                        </p:tav>
+                                      </p:tavLst>
+                                    </p:anim>
+                                    <p:anim calcmode="lin" valueType="num">
+                                      <p:cBhvr additive="base">
+                                        <p:cTn id="21" dur="500" fill="hold"/>
+                                        <p:tgtEl>
+                                          <p:spTgt spid="4">
+                                            <p:txEl>
+                                              <p:pRg st="1" end="1"/>
+                                            </p:txEl>
+                                          </p:spTgt>
+                                        </p:tgtEl>
+                                        <p:attrNameLst>
+                                          <p:attrName>ppt_y</p:attrName>
+                                        </p:attrNameLst>
+                                      </p:cBhvr>
+                                      <p:tavLst>
+                                        <p:tav tm="0">
+                                          <p:val>
+                                            <p:strVal val="1+#ppt_h/2"/>
+                                          </p:val>
+                                        </p:tav>
+                                        <p:tav tm="100000">
+                                          <p:val>
+                                            <p:strVal val="#ppt_y"/>
+                                          </p:val>
+                                        </p:tav>
+                                      </p:tavLst>
+                                    </p:anim>
+                                  </p:childTnLst>
+                                </p:cTn>
+                              </p:par>
+                            </p:childTnLst>
+                          </p:cTn>
+                        </p:par>
+                      </p:childTnLst>
+                    </p:cTn>
+                  </p:par>
+                  <p:par>
+                    <p:cTn id="22" fill="hold">
+                      <p:stCondLst>
+                        <p:cond delay="indefinite"/>
+                      </p:stCondLst>
+                      <p:childTnLst>
+                        <p:par>
+                          <p:cTn id="23" fill="hold">
+                            <p:stCondLst>
+                              <p:cond delay="0"/>
+                            </p:stCondLst>
+                            <p:childTnLst>
+                              <p:par>
+                                <p:cTn id="24" presetID="2" presetClass="entr" presetSubtype="4" fill="hold" grpId="0" nodeType="clickEffect">
+                                  <p:stCondLst>
+                                    <p:cond delay="0"/>
+                                  </p:stCondLst>
+                                  <p:childTnLst>
+                                    <p:set>
+                                      <p:cBhvr>
+                                        <p:cTn id="25" dur="1" fill="hold">
+                                          <p:stCondLst>
+                                            <p:cond delay="0"/>
+                                          </p:stCondLst>
+                                        </p:cTn>
+                                        <p:tgtEl>
+                                          <p:spTgt spid="4">
+                                            <p:txEl>
+                                              <p:pRg st="2" end="2"/>
+                                            </p:txEl>
+                                          </p:spTgt>
+                                        </p:tgtEl>
+                                        <p:attrNameLst>
+                                          <p:attrName>style.visibility</p:attrName>
+                                        </p:attrNameLst>
+                                      </p:cBhvr>
+                                      <p:to>
+                                        <p:strVal val="visible"/>
+                                      </p:to>
+                                    </p:set>
+                                    <p:anim calcmode="lin" valueType="num">
+                                      <p:cBhvr additive="base">
+                                        <p:cTn id="26" dur="500" fill="hold"/>
+                                        <p:tgtEl>
+                                          <p:spTgt spid="4">
+                                            <p:txEl>
+                                              <p:pRg st="2" end="2"/>
+                                            </p:txEl>
+                                          </p:spTgt>
+                                        </p:tgtEl>
+                                        <p:attrNameLst>
+                                          <p:attrName>ppt_x</p:attrName>
+                                        </p:attrNameLst>
+                                      </p:cBhvr>
+                                      <p:tavLst>
+                                        <p:tav tm="0">
+                                          <p:val>
+                                            <p:strVal val="#ppt_x"/>
+                                          </p:val>
+                                        </p:tav>
+                                        <p:tav tm="100000">
+                                          <p:val>
+                                            <p:strVal val="#ppt_x"/>
+                                          </p:val>
+                                        </p:tav>
+                                      </p:tavLst>
+                                    </p:anim>
+                                    <p:anim calcmode="lin" valueType="num">
+                                      <p:cBhvr additive="base">
+                                        <p:cTn id="27" dur="500" fill="hold"/>
+                                        <p:tgtEl>
+                                          <p:spTgt spid="4">
+                                            <p:txEl>
+                                              <p:pRg st="2" end="2"/>
+                                            </p:txEl>
+                                          </p:spTgt>
+                                        </p:tgtEl>
+                                        <p:attrNameLst>
+                                          <p:attrName>ppt_y</p:attrName>
+                                        </p:attrNameLst>
+                                      </p:cBhvr>
+                                      <p:tavLst>
+                                        <p:tav tm="0">
+                                          <p:val>
+                                            <p:strVal val="1+#ppt_h/2"/>
+                                          </p:val>
+                                        </p:tav>
+                                        <p:tav tm="100000">
+                                          <p:val>
+                                            <p:strVal val="#ppt_y"/>
+                                          </p:val>
+                                        </p:tav>
+                                      </p:tavLst>
+                                    </p:anim>
+                                  </p:childTnLst>
+                                </p:cTn>
+                              </p:par>
+                            </p:childTnLst>
+                          </p:cTn>
+                        </p:par>
+                      </p:childTnLst>
+                    </p:cTn>
+                  </p:par>
+                  <p:par>
+                    <p:cTn id="28" fill="hold">
+                      <p:stCondLst>
+                        <p:cond delay="indefinite"/>
+                      </p:stCondLst>
+                      <p:childTnLst>
+                        <p:par>
+                          <p:cTn id="29" fill="hold">
+                            <p:stCondLst>
+                              <p:cond delay="0"/>
+                            </p:stCondLst>
+                            <p:childTnLst>
+                              <p:par>
+                                <p:cTn id="30" presetID="2" presetClass="entr" presetSubtype="4" fill="hold" grpId="0" nodeType="clickEffect">
+                                  <p:stCondLst>
+                                    <p:cond delay="0"/>
+                                  </p:stCondLst>
+                                  <p:childTnLst>
+                                    <p:set>
+                                      <p:cBhvr>
+                                        <p:cTn id="31" dur="1" fill="hold">
+                                          <p:stCondLst>
+                                            <p:cond delay="0"/>
+                                          </p:stCondLst>
+                                        </p:cTn>
+                                        <p:tgtEl>
+                                          <p:spTgt spid="4">
+                                            <p:txEl>
+                                              <p:pRg st="3" end="3"/>
+                                            </p:txEl>
+                                          </p:spTgt>
+                                        </p:tgtEl>
+                                        <p:attrNameLst>
+                                          <p:attrName>style.visibility</p:attrName>
+                                        </p:attrNameLst>
+                                      </p:cBhvr>
+                                      <p:to>
+                                        <p:strVal val="visible"/>
+                                      </p:to>
+                                    </p:set>
+                                    <p:anim calcmode="lin" valueType="num">
+                                      <p:cBhvr additive="base">
+                                        <p:cTn id="32" dur="500" fill="hold"/>
+                                        <p:tgtEl>
+                                          <p:spTgt spid="4">
+                                            <p:txEl>
+                                              <p:pRg st="3" end="3"/>
+                                            </p:txEl>
+                                          </p:spTgt>
+                                        </p:tgtEl>
+                                        <p:attrNameLst>
+                                          <p:attrName>ppt_x</p:attrName>
+                                        </p:attrNameLst>
+                                      </p:cBhvr>
+                                      <p:tavLst>
+                                        <p:tav tm="0">
+                                          <p:val>
+                                            <p:strVal val="#ppt_x"/>
+                                          </p:val>
+                                        </p:tav>
+                                        <p:tav tm="100000">
+                                          <p:val>
+                                            <p:strVal val="#ppt_x"/>
+                                          </p:val>
+                                        </p:tav>
+                                      </p:tavLst>
+                                    </p:anim>
+                                    <p:anim calcmode="lin" valueType="num">
+                                      <p:cBhvr additive="base">
+                                        <p:cTn id="33" dur="500" fill="hold"/>
+                                        <p:tgtEl>
+                                          <p:spTgt spid="4">
+                                            <p:txEl>
+                                              <p:pRg st="3" end="3"/>
+                                            </p:txEl>
+                                          </p:spTgt>
+                                        </p:tgtEl>
+                                        <p:attrNameLst>
+                                          <p:attrName>ppt_y</p:attrName>
+                                        </p:attrNameLst>
+                                      </p:cBhvr>
+                                      <p:tavLst>
+                                        <p:tav tm="0">
+                                          <p:val>
+                                            <p:strVal val="1+#ppt_h/2"/>
+                                          </p:val>
+                                        </p:tav>
+                                        <p:tav tm="100000">
+                                          <p:val>
+                                            <p:strVal val="#ppt_y"/>
+                                          </p:val>
+                                        </p:tav>
+                                      </p:tavLst>
+                                    </p:anim>
+                                  </p:childTnLst>
+                                </p:cTn>
+                              </p:par>
+                            </p:childTnLst>
+                          </p:cTn>
+                        </p:par>
+                      </p:childTnLst>
+                    </p:cTn>
+                  </p:par>
+                  <p:par>
+                    <p:cTn id="34" fill="hold">
+                      <p:stCondLst>
+                        <p:cond delay="indefinite"/>
+                      </p:stCondLst>
+                      <p:childTnLst>
+                        <p:par>
+                          <p:cTn id="35" fill="hold">
+                            <p:stCondLst>
+                              <p:cond delay="0"/>
+                            </p:stCondLst>
+                            <p:childTnLst>
+                              <p:par>
+                                <p:cTn id="36" presetID="2" presetClass="entr" presetSubtype="4" fill="hold" grpId="0" nodeType="clickEffect">
+                                  <p:stCondLst>
+                                    <p:cond delay="0"/>
+                                  </p:stCondLst>
+                                  <p:childTnLst>
+                                    <p:set>
+                                      <p:cBhvr>
+                                        <p:cTn id="37" dur="1" fill="hold">
+                                          <p:stCondLst>
+                                            <p:cond delay="0"/>
+                                          </p:stCondLst>
+                                        </p:cTn>
+                                        <p:tgtEl>
+                                          <p:spTgt spid="4">
+                                            <p:txEl>
+                                              <p:pRg st="4" end="4"/>
+                                            </p:txEl>
+                                          </p:spTgt>
+                                        </p:tgtEl>
+                                        <p:attrNameLst>
+                                          <p:attrName>style.visibility</p:attrName>
+                                        </p:attrNameLst>
+                                      </p:cBhvr>
+                                      <p:to>
+                                        <p:strVal val="visible"/>
+                                      </p:to>
+                                    </p:set>
+                                    <p:anim calcmode="lin" valueType="num">
+                                      <p:cBhvr additive="base">
+                                        <p:cTn id="38" dur="500" fill="hold"/>
+                                        <p:tgtEl>
+                                          <p:spTgt spid="4">
+                                            <p:txEl>
+                                              <p:pRg st="4" end="4"/>
+                                            </p:txEl>
+                                          </p:spTgt>
+                                        </p:tgtEl>
+                                        <p:attrNameLst>
+                                          <p:attrName>ppt_x</p:attrName>
+                                        </p:attrNameLst>
+                                      </p:cBhvr>
+                                      <p:tavLst>
+                                        <p:tav tm="0">
+                                          <p:val>
+                                            <p:strVal val="#ppt_x"/>
+                                          </p:val>
+                                        </p:tav>
+                                        <p:tav tm="100000">
+                                          <p:val>
+                                            <p:strVal val="#ppt_x"/>
+                                          </p:val>
+                                        </p:tav>
+                                      </p:tavLst>
+                                    </p:anim>
+                                    <p:anim calcmode="lin" valueType="num">
+                                      <p:cBhvr additive="base">
+                                        <p:cTn id="39" dur="500" fill="hold"/>
+                                        <p:tgtEl>
+                                          <p:spTgt spid="4">
+                                            <p:txEl>
+                                              <p:pRg st="4" end="4"/>
+                                            </p:txEl>
+                                          </p:spTgt>
+                                        </p:tgtEl>
+                                        <p:attrNameLst>
+                                          <p:attrName>ppt_y</p:attrName>
+                                        </p:attrNameLst>
+                                      </p:cBhvr>
+                                      <p:tavLst>
+                                        <p:tav tm="0">
+                                          <p:val>
+                                            <p:strVal val="1+#ppt_h/2"/>
+                                          </p:val>
+                                        </p:tav>
+                                        <p:tav tm="100000">
+                                          <p:val>
+                                            <p:strVal val="#ppt_y"/>
+                                          </p:val>
+                                        </p:tav>
+                                      </p:tavLst>
+                                    </p:anim>
+                                  </p:childTnLst>
+                                </p:cTn>
+                              </p:par>
+                            </p:childTnLst>
+                          </p:cTn>
+                        </p:par>
+                      </p:childTnLst>
+                    </p:cTn>
+                  </p:par>
+                  <p:par>
+                    <p:cTn id="40" fill="hold">
+                      <p:stCondLst>
+                        <p:cond delay="indefinite"/>
+                      </p:stCondLst>
+                      <p:childTnLst>
+                        <p:par>
+                          <p:cTn id="41" fill="hold">
+                            <p:stCondLst>
+                              <p:cond delay="0"/>
+                            </p:stCondLst>
+                            <p:childTnLst>
+                              <p:par>
+                                <p:cTn id="42" presetID="2" presetClass="entr" presetSubtype="4" fill="hold" grpId="0" nodeType="clickEffect">
+                                  <p:stCondLst>
+                                    <p:cond delay="0"/>
+                                  </p:stCondLst>
+                                  <p:childTnLst>
+                                    <p:set>
+                                      <p:cBhvr>
+                                        <p:cTn id="43" dur="1" fill="hold">
+                                          <p:stCondLst>
+                                            <p:cond delay="0"/>
+                                          </p:stCondLst>
+                                        </p:cTn>
+                                        <p:tgtEl>
+                                          <p:spTgt spid="4">
+                                            <p:txEl>
+                                              <p:pRg st="5" end="5"/>
+                                            </p:txEl>
+                                          </p:spTgt>
+                                        </p:tgtEl>
+                                        <p:attrNameLst>
+                                          <p:attrName>style.visibility</p:attrName>
+                                        </p:attrNameLst>
+                                      </p:cBhvr>
+                                      <p:to>
+                                        <p:strVal val="visible"/>
+                                      </p:to>
+                                    </p:set>
+                                    <p:anim calcmode="lin" valueType="num">
+                                      <p:cBhvr additive="base">
+                                        <p:cTn id="44" dur="500" fill="hold"/>
+                                        <p:tgtEl>
+                                          <p:spTgt spid="4">
+                                            <p:txEl>
+                                              <p:pRg st="5" end="5"/>
+                                            </p:txEl>
+                                          </p:spTgt>
+                                        </p:tgtEl>
+                                        <p:attrNameLst>
+                                          <p:attrName>ppt_x</p:attrName>
+                                        </p:attrNameLst>
+                                      </p:cBhvr>
+                                      <p:tavLst>
+                                        <p:tav tm="0">
+                                          <p:val>
+                                            <p:strVal val="#ppt_x"/>
+                                          </p:val>
+                                        </p:tav>
+                                        <p:tav tm="100000">
+                                          <p:val>
+                                            <p:strVal val="#ppt_x"/>
+                                          </p:val>
+                                        </p:tav>
+                                      </p:tavLst>
+                                    </p:anim>
+                                    <p:anim calcmode="lin" valueType="num">
+                                      <p:cBhvr additive="base">
+                                        <p:cTn id="45" dur="500" fill="hold"/>
+                                        <p:tgtEl>
+                                          <p:spTgt spid="4">
+                                            <p:txEl>
+                                              <p:pRg st="5" end="5"/>
+                                            </p:txEl>
+                                          </p:spTgt>
+                                        </p:tgtEl>
+                                        <p:attrNameLst>
+                                          <p:attrName>ppt_y</p:attrName>
+                                        </p:attrNameLst>
+                                      </p:cBhvr>
+                                      <p:tavLst>
+                                        <p:tav tm="0">
+                                          <p:val>
+                                            <p:strVal val="1+#ppt_h/2"/>
+                                          </p:val>
+                                        </p:tav>
+                                        <p:tav tm="100000">
+                                          <p:val>
+                                            <p:strVal val="#ppt_y"/>
+                                          </p:val>
+                                        </p:tav>
+                                      </p:tavLst>
+                                    </p:anim>
+                                  </p:childTnLst>
+                                </p:cTn>
+                              </p:par>
+                            </p:childTnLst>
+                          </p:cTn>
+                        </p:par>
+                      </p:childTnLst>
+                    </p:cTn>
+                  </p:par>
+                  <p:par>
+                    <p:cTn id="46" fill="hold">
+                      <p:stCondLst>
+                        <p:cond delay="indefinite"/>
+                      </p:stCondLst>
+                      <p:childTnLst>
+                        <p:par>
+                          <p:cTn id="47" fill="hold">
+                            <p:stCondLst>
+                              <p:cond delay="0"/>
+                            </p:stCondLst>
+                            <p:childTnLst>
+                              <p:par>
+                                <p:cTn id="48" presetID="42" presetClass="entr" presetSubtype="0" fill="hold" grpId="0" nodeType="clickEffect">
+                                  <p:stCondLst>
+                                    <p:cond delay="0"/>
+                                  </p:stCondLst>
+                                  <p:childTnLst>
+                                    <p:set>
+                                      <p:cBhvr>
+                                        <p:cTn id="49" dur="1" fill="hold">
+                                          <p:stCondLst>
+                                            <p:cond delay="0"/>
+                                          </p:stCondLst>
+                                        </p:cTn>
+                                        <p:tgtEl>
+                                          <p:spTgt spid="5"/>
+                                        </p:tgtEl>
+                                        <p:attrNameLst>
+                                          <p:attrName>style.visibility</p:attrName>
+                                        </p:attrNameLst>
+                                      </p:cBhvr>
+                                      <p:to>
+                                        <p:strVal val="visible"/>
+                                      </p:to>
+                                    </p:set>
+                                    <p:animEffect transition="in" filter="fade">
+                                      <p:cBhvr>
+                                        <p:cTn id="50" dur="1000"/>
+                                        <p:tgtEl>
+                                          <p:spTgt spid="5"/>
+                                        </p:tgtEl>
+                                      </p:cBhvr>
+                                    </p:animEffect>
+                                    <p:anim calcmode="lin" valueType="num">
+                                      <p:cBhvr>
+                                        <p:cTn id="51" dur="1000" fill="hold"/>
+                                        <p:tgtEl>
+                                          <p:spTgt spid="5"/>
+                                        </p:tgtEl>
+                                        <p:attrNameLst>
+                                          <p:attrName>ppt_x</p:attrName>
+                                        </p:attrNameLst>
+                                      </p:cBhvr>
+                                      <p:tavLst>
+                                        <p:tav tm="0">
+                                          <p:val>
+                                            <p:strVal val="#ppt_x"/>
+                                          </p:val>
+                                        </p:tav>
+                                        <p:tav tm="100000">
+                                          <p:val>
+                                            <p:strVal val="#ppt_x"/>
+                                          </p:val>
+                                        </p:tav>
+                                      </p:tavLst>
+                                    </p:anim>
+                                    <p:anim calcmode="lin" valueType="num">
+                                      <p:cBhvr>
+                                        <p:cTn id="52" dur="1000" fill="hold"/>
+                                        <p:tgtEl>
+                                          <p:spTgt spid="5"/>
+                                        </p:tgtEl>
+                                        <p:attrNameLst>
+                                          <p:attrName>ppt_y</p:attrName>
+                                        </p:attrNameLst>
+                                      </p:cBhvr>
+                                      <p:tavLst>
+                                        <p:tav tm="0">
+                                          <p:val>
+                                            <p:strVal val="#ppt_y+.1"/>
+                                          </p:val>
+                                        </p:tav>
+                                        <p:tav tm="100000">
+                                          <p:val>
+                                            <p:strVal val="#ppt_y"/>
+                                          </p:val>
+                                        </p:tav>
+                                      </p:tavLst>
+                                    </p:anim>
+                                  </p:childTnLst>
+                                </p:cTn>
+                              </p:par>
+                            </p:childTnLst>
+                          </p:cTn>
+                        </p:par>
+                      </p:childTnLst>
+                    </p:cTn>
+                  </p:par>
+                </p:childTnLst>
+              </p:cTn>
+              <p:prevCondLst>
+                <p:cond evt="onPrev" delay="0">
+                  <p:tgtEl>
+                    <p:sldTgt/>
+                  </p:tgtEl>
+                </p:cond>
+              </p:prevCondLst>
+              <p:nextCondLst>
+                <p:cond evt="onNext" delay="0">
+                  <p:tgtEl>
+                    <p:sldTgt/>
+                  </p:tgtEl>
+                </p:cond>
+              </p:nextCondLst>
+            </p:seq>
+          </p:childTnLst>
+        </p:cTn>
+      </p:par>
+    </p:tnLst>
+    <p:bldLst>
+      <p:bldP spid="2" grpId="0"/>
+      <p:bldP spid="4" grpId="0" build="p"/>
+      <p:bldP spid="5" grpId="0"/>
+    </p:bldLst>
+  </p:timing>
+</p:sld>
+</file>
+
+<file path=ppt/slides/slide4.xml><?xml version="1.0" encoding="utf-8"?>
+<p:sld xmlns:a="http://schemas.openxmlformats.org/drawingml/2006/main" xmlns:r="http://schemas.openxmlformats.org/officeDocument/2006/relationships" xmlns:p="http://schemas.openxmlformats.org/presentationml/2006/main">
+  <p:cSld>
+    <p:spTree>
+      <p:nvGrpSpPr>
+        <p:cNvPr id="1" name=""/>
+        <p:cNvGrpSpPr/>
+        <p:nvPr/>
+      </p:nvGrpSpPr>
+      <p:grpSpPr>
+        <a:xfrm>
+          <a:off x="0" y="0"/>
+          <a:ext cx="0" cy="0"/>
+          <a:chOff x="0" y="0"/>
+          <a:chExt cx="0" cy="0"/>
+        </a:xfrm>
+      </p:grpSpPr>
+      <p:sp>
+        <p:nvSpPr>
+          <p:cNvPr id="2" name="Title 1"/>
+          <p:cNvSpPr>
+            <a:spLocks noGrp="1"/>
+          </p:cNvSpPr>
+          <p:nvPr>
+            <p:ph type="title"/>
+          </p:nvPr>
+        </p:nvSpPr>
+        <p:spPr>
+          <a:xfrm>
+            <a:off x="484584" y="604721"/>
+            <a:ext cx="7053542" cy="572705"/>
+          </a:xfrm>
+        </p:spPr>
+        <p:txBody>
+          <a:bodyPr>
+            <a:normAutofit fontScale="90000"/>
+          </a:bodyPr>
+          <a:lstStyle/>
+          <a:p>
+            <a:pPr algn="ctr"/>
+            <a:r>
+              <a:rPr lang="en-US" b="1" dirty="0" smtClean="0"/>
+              <a:t>Answer these question</a:t>
+            </a:r>
+            <a:endParaRPr lang="en-US" b="1" dirty="0"/>
+          </a:p>
+        </p:txBody>
+      </p:sp>
+      <p:sp>
+        <p:nvSpPr>
+          <p:cNvPr id="4" name="Rectangle 1"/>
+          <p:cNvSpPr>
+            <a:spLocks noGrp="1" noChangeArrowheads="1"/>
+          </p:cNvSpPr>
+          <p:nvPr>
+            <p:ph idx="1"/>
+          </p:nvPr>
+        </p:nvSpPr>
+        <p:spPr bwMode="auto">
+          <a:xfrm>
+            <a:off x="827484" y="2264748"/>
+            <a:ext cx="7895892" cy="2285241"/>
+          </a:xfrm>
+          <a:prstGeom prst="rect">
+            <a:avLst/>
+          </a:prstGeom>
+          <a:noFill/>
+          <a:ln>
+            <a:noFill/>
+          </a:ln>
+          <a:effectLst/>
+          <a:extLst>
+            <a:ext uri="{909E8E84-426E-40DD-AFC4-6F175D3DCCD1}">
+              <a14:hiddenFill xmlns:a14="http://schemas.microsoft.com/office/drawing/2010/main">
+                <a:solidFill>
+                  <a:schemeClr val="accent1"/>
+                </a:solidFill>
+              </a14:hiddenFill>
+            </a:ext>
+            <a:ext uri="{91240B29-F687-4F45-9708-019B960494DF}">
+              <a14:hiddenLine xmlns:a14="http://schemas.microsoft.com/office/drawing/2010/main" w="9525">
+                <a:solidFill>
+                  <a:schemeClr val="tx1"/>
+                </a:solidFill>
+                <a:miter lim="800000"/>
+                <a:headEnd/>
+                <a:tailEnd/>
+              </a14:hiddenLine>
+            </a:ext>
+            <a:ext uri="{AF507438-7753-43E0-B8FC-AC1667EBCBE1}">
+              <a14:hiddenEffects xmlns:a14="http://schemas.microsoft.com/office/drawing/2010/main">
+                <a:effectLst>
+                  <a:outerShdw dist="35921" dir="2700000" algn="ctr" rotWithShape="0">
+                    <a:schemeClr val="bg2"/>
+                  </a:outerShdw>
+                </a:effectLst>
+              </a14:hiddenEffects>
+            </a:ext>
+          </a:extLst>
+        </p:spPr>
+        <p:txBody>
+          <a:bodyPr vert="horz" wrap="square" lIns="68580" tIns="34290" rIns="68580" bIns="34290" numCol="1" rtlCol="0" anchor="ctr" anchorCtr="0" compatLnSpc="1">
+            <a:prstTxWarp prst="textNoShape">
+              <a:avLst/>
+            </a:prstTxWarp>
+            <a:spAutoFit/>
+          </a:bodyPr>
+          <a:lstStyle/>
+          <a:p>
+            <a:pPr defTabSz="685800" eaLnBrk="0" fontAlgn="base" hangingPunct="0">
+              <a:lnSpc>
+                <a:spcPct val="150000"/>
+              </a:lnSpc>
+              <a:spcBef>
+                <a:spcPct val="0"/>
+              </a:spcBef>
+              <a:spcAft>
+                <a:spcPct val="0"/>
+              </a:spcAft>
+              <a:buClrTx/>
+              <a:buSzTx/>
+              <a:buFont typeface="Wingdings" panose="05000000000000000000" pitchFamily="2" charset="2"/>
+              <a:buChar char="q"/>
+            </a:pPr>
+            <a:r>
+              <a:rPr lang="en-US" sz="2400" dirty="0" smtClean="0"/>
+              <a:t>How many of you are from computer background.</a:t>
+            </a:r>
+          </a:p>
+          <a:p>
+            <a:pPr defTabSz="685800" eaLnBrk="0" fontAlgn="base" hangingPunct="0">
+              <a:lnSpc>
+                <a:spcPct val="150000"/>
+              </a:lnSpc>
+              <a:spcBef>
+                <a:spcPct val="0"/>
+              </a:spcBef>
+              <a:spcAft>
+                <a:spcPct val="0"/>
+              </a:spcAft>
+              <a:buClrTx/>
+              <a:buSzTx/>
+              <a:buFont typeface="Wingdings" panose="05000000000000000000" pitchFamily="2" charset="2"/>
+              <a:buChar char="q"/>
+            </a:pPr>
+            <a:r>
+              <a:rPr lang="en-US" sz="2400" dirty="0" smtClean="0"/>
+              <a:t>How </a:t>
+            </a:r>
+            <a:r>
+              <a:rPr lang="en-US" sz="2400" dirty="0"/>
+              <a:t>many are completely </a:t>
+            </a:r>
+            <a:r>
+              <a:rPr lang="en-US" sz="2400" dirty="0" smtClean="0"/>
+              <a:t>new.</a:t>
+            </a:r>
+          </a:p>
+          <a:p>
+            <a:pPr defTabSz="685800" eaLnBrk="0" fontAlgn="base" hangingPunct="0">
+              <a:lnSpc>
+                <a:spcPct val="150000"/>
+              </a:lnSpc>
+              <a:spcBef>
+                <a:spcPct val="0"/>
+              </a:spcBef>
+              <a:spcAft>
+                <a:spcPct val="0"/>
+              </a:spcAft>
+              <a:buClrTx/>
+              <a:buSzTx/>
+              <a:buFont typeface="Wingdings" panose="05000000000000000000" pitchFamily="2" charset="2"/>
+              <a:buChar char="q"/>
+            </a:pPr>
+            <a:r>
+              <a:rPr lang="en-US" sz="2400" dirty="0" smtClean="0"/>
+              <a:t>Anyone </a:t>
+            </a:r>
+            <a:r>
+              <a:rPr lang="en-US" sz="2400" dirty="0"/>
+              <a:t>here who thinks programming is </a:t>
+            </a:r>
+            <a:r>
+              <a:rPr lang="en-US" sz="2400" dirty="0" smtClean="0"/>
+              <a:t>difficult.</a:t>
+            </a:r>
+            <a:endParaRPr lang="en-US" altLang="en-US" sz="2400" dirty="0">
+              <a:latin typeface="Arial" panose="020B0604020202020204" pitchFamily="34" charset="0"/>
+            </a:endParaRPr>
+          </a:p>
+        </p:txBody>
+      </p:sp>
+    </p:spTree>
+    <p:extLst>
+      <p:ext uri="{BB962C8B-B14F-4D97-AF65-F5344CB8AC3E}">
+        <p14:creationId xmlns:p14="http://schemas.microsoft.com/office/powerpoint/2010/main" val="948191657"/>
+      </p:ext>
+    </p:extLst>
+  </p:cSld>
+  <p:clrMapOvr>
+    <a:masterClrMapping/>
+  </p:clrMapOvr>
+  <p:transition spd="slow">
+    <p:cover/>
+  </p:transition>
+  <p:timing>
+    <p:tnLst>
+      <p:par>
+        <p:cTn id="1" dur="indefinite" restart="never" nodeType="tmRoot">
+          <p:childTnLst>
+            <p:seq concurrent="1" nextAc="seek">
+              <p:cTn id="2" dur="indefinite" nodeType="mainSeq">
+                <p:childTnLst>
+                  <p:par>
+                    <p:cTn id="3" fill="hold">
+                      <p:stCondLst>
+                        <p:cond delay="indefinite"/>
+                      </p:stCondLst>
+                      <p:childTnLst>
+                        <p:par>
+                          <p:cTn id="4" fill="hold">
+                            <p:stCondLst>
+                              <p:cond delay="0"/>
+                            </p:stCondLst>
+                            <p:childTnLst>
+                              <p:par>
+                                <p:cTn id="5" presetID="42" presetClass="entr" presetSubtype="0" fill="hold" grpId="0" nodeType="clickEffect">
+                                  <p:stCondLst>
+                                    <p:cond delay="0"/>
+                                  </p:stCondLst>
+                                  <p:childTnLst>
+                                    <p:set>
+                                      <p:cBhvr>
+                                        <p:cTn id="6" dur="1" fill="hold">
+                                          <p:stCondLst>
+                                            <p:cond delay="0"/>
+                                          </p:stCondLst>
+                                        </p:cTn>
+                                        <p:tgtEl>
+                                          <p:spTgt spid="2"/>
+                                        </p:tgtEl>
+                                        <p:attrNameLst>
+                                          <p:attrName>style.visibility</p:attrName>
+                                        </p:attrNameLst>
+                                      </p:cBhvr>
+                                      <p:to>
+                                        <p:strVal val="visible"/>
+                                      </p:to>
+                                    </p:set>
+                                    <p:animEffect transition="in" filter="fade">
+                                      <p:cBhvr>
+                                        <p:cTn id="7" dur="1000"/>
+                                        <p:tgtEl>
+                                          <p:spTgt spid="2"/>
+                                        </p:tgtEl>
+                                      </p:cBhvr>
+                                    </p:animEffect>
+                                    <p:anim calcmode="lin" valueType="num">
+                                      <p:cBhvr>
+                                        <p:cTn id="8" dur="1000" fill="hold"/>
+                                        <p:tgtEl>
+                                          <p:spTgt spid="2"/>
+                                        </p:tgtEl>
+                                        <p:attrNameLst>
+                                          <p:attrName>ppt_x</p:attrName>
+                                        </p:attrNameLst>
+                                      </p:cBhvr>
+                                      <p:tavLst>
+                                        <p:tav tm="0">
+                                          <p:val>
+                                            <p:strVal val="#ppt_x"/>
+                                          </p:val>
+                                        </p:tav>
+                                        <p:tav tm="100000">
+                                          <p:val>
+                                            <p:strVal val="#ppt_x"/>
+                                          </p:val>
+                                        </p:tav>
+                                      </p:tavLst>
+                                    </p:anim>
+                                    <p:anim calcmode="lin" valueType="num">
+                                      <p:cBhvr>
+                                        <p:cTn id="9" dur="1000" fill="hold"/>
+                                        <p:tgtEl>
+                                          <p:spTgt spid="2"/>
+                                        </p:tgtEl>
+                                        <p:attrNameLst>
+                                          <p:attrName>ppt_y</p:attrName>
+                                        </p:attrNameLst>
+                                      </p:cBhvr>
+                                      <p:tavLst>
+                                        <p:tav tm="0">
+                                          <p:val>
+                                            <p:strVal val="#ppt_y+.1"/>
+                                          </p:val>
+                                        </p:tav>
+                                        <p:tav tm="100000">
+                                          <p:val>
+                                            <p:strVal val="#ppt_y"/>
+                                          </p:val>
+                                        </p:tav>
+                                      </p:tavLst>
+                                    </p:anim>
+                                  </p:childTnLst>
+                                </p:cTn>
+                              </p:par>
+                            </p:childTnLst>
+                          </p:cTn>
+                        </p:par>
+                      </p:childTnLst>
+                    </p:cTn>
+                  </p:par>
+                  <p:par>
+                    <p:cTn id="10" fill="hold">
+                      <p:stCondLst>
+                        <p:cond delay="indefinite"/>
+                      </p:stCondLst>
+                      <p:childTnLst>
+                        <p:par>
+                          <p:cTn id="11" fill="hold">
+                            <p:stCondLst>
+                              <p:cond delay="0"/>
+                            </p:stCondLst>
+                            <p:childTnLst>
+                              <p:par>
+                                <p:cTn id="12" presetID="2" presetClass="entr" presetSubtype="4" fill="hold" grpId="0" nodeType="clickEffect">
+                                  <p:stCondLst>
+                                    <p:cond delay="0"/>
+                                  </p:stCondLst>
+                                  <p:childTnLst>
+                                    <p:set>
+                                      <p:cBhvr>
+                                        <p:cTn id="13" dur="1" fill="hold">
+                                          <p:stCondLst>
+                                            <p:cond delay="0"/>
+                                          </p:stCondLst>
+                                        </p:cTn>
+                                        <p:tgtEl>
+                                          <p:spTgt spid="4">
+                                            <p:txEl>
+                                              <p:pRg st="0" end="0"/>
+                                            </p:txEl>
+                                          </p:spTgt>
+                                        </p:tgtEl>
+                                        <p:attrNameLst>
+                                          <p:attrName>style.visibility</p:attrName>
+                                        </p:attrNameLst>
+                                      </p:cBhvr>
+                                      <p:to>
+                                        <p:strVal val="visible"/>
+                                      </p:to>
+                                    </p:set>
+                                    <p:anim calcmode="lin" valueType="num">
+                                      <p:cBhvr additive="base">
+                                        <p:cTn id="14" dur="500" fill="hold"/>
+                                        <p:tgtEl>
+                                          <p:spTgt spid="4">
+                                            <p:txEl>
+                                              <p:pRg st="0" end="0"/>
+                                            </p:txEl>
+                                          </p:spTgt>
+                                        </p:tgtEl>
+                                        <p:attrNameLst>
+                                          <p:attrName>ppt_x</p:attrName>
+                                        </p:attrNameLst>
+                                      </p:cBhvr>
+                                      <p:tavLst>
+                                        <p:tav tm="0">
+                                          <p:val>
+                                            <p:strVal val="#ppt_x"/>
+                                          </p:val>
+                                        </p:tav>
+                                        <p:tav tm="100000">
+                                          <p:val>
+                                            <p:strVal val="#ppt_x"/>
+                                          </p:val>
+                                        </p:tav>
+                                      </p:tavLst>
+                                    </p:anim>
+                                    <p:anim calcmode="lin" valueType="num">
+                                      <p:cBhvr additive="base">
+                                        <p:cTn id="15" dur="500" fill="hold"/>
+                                        <p:tgtEl>
+                                          <p:spTgt spid="4">
+                                            <p:txEl>
+                                              <p:pRg st="0" end="0"/>
+                                            </p:txEl>
+                                          </p:spTgt>
+                                        </p:tgtEl>
+                                        <p:attrNameLst>
+                                          <p:attrName>ppt_y</p:attrName>
+                                        </p:attrNameLst>
+                                      </p:cBhvr>
+                                      <p:tavLst>
+                                        <p:tav tm="0">
+                                          <p:val>
+                                            <p:strVal val="1+#ppt_h/2"/>
+                                          </p:val>
+                                        </p:tav>
+                                        <p:tav tm="100000">
+                                          <p:val>
+                                            <p:strVal val="#ppt_y"/>
+                                          </p:val>
+                                        </p:tav>
+                                      </p:tavLst>
+                                    </p:anim>
+                                  </p:childTnLst>
+                                </p:cTn>
+                              </p:par>
+                            </p:childTnLst>
+                          </p:cTn>
+                        </p:par>
+                      </p:childTnLst>
+                    </p:cTn>
+                  </p:par>
+                  <p:par>
+                    <p:cTn id="16" fill="hold">
+                      <p:stCondLst>
+                        <p:cond delay="indefinite"/>
+                      </p:stCondLst>
+                      <p:childTnLst>
+                        <p:par>
+                          <p:cTn id="17" fill="hold">
+                            <p:stCondLst>
+                              <p:cond delay="0"/>
+                            </p:stCondLst>
+                            <p:childTnLst>
+                              <p:par>
+                                <p:cTn id="18" presetID="2" presetClass="entr" presetSubtype="4" fill="hold" grpId="0" nodeType="clickEffect">
+                                  <p:stCondLst>
+                                    <p:cond delay="0"/>
+                                  </p:stCondLst>
+                                  <p:childTnLst>
+                                    <p:set>
+                                      <p:cBhvr>
+                                        <p:cTn id="19" dur="1" fill="hold">
+                                          <p:stCondLst>
+                                            <p:cond delay="0"/>
+                                          </p:stCondLst>
+                                        </p:cTn>
+                                        <p:tgtEl>
+                                          <p:spTgt spid="4">
+                                            <p:txEl>
+                                              <p:pRg st="1" end="1"/>
+                                            </p:txEl>
+                                          </p:spTgt>
+                                        </p:tgtEl>
+                                        <p:attrNameLst>
+                                          <p:attrName>style.visibility</p:attrName>
+                                        </p:attrNameLst>
+                                      </p:cBhvr>
+                                      <p:to>
+                                        <p:strVal val="visible"/>
+                                      </p:to>
+                                    </p:set>
+                                    <p:anim calcmode="lin" valueType="num">
+                                      <p:cBhvr additive="base">
+                                        <p:cTn id="20" dur="500" fill="hold"/>
+                                        <p:tgtEl>
+                                          <p:spTgt spid="4">
+                                            <p:txEl>
+                                              <p:pRg st="1" end="1"/>
+                                            </p:txEl>
+                                          </p:spTgt>
+                                        </p:tgtEl>
+                                        <p:attrNameLst>
+                                          <p:attrName>ppt_x</p:attrName>
+                                        </p:attrNameLst>
+                                      </p:cBhvr>
+                                      <p:tavLst>
+                                        <p:tav tm="0">
+                                          <p:val>
+                                            <p:strVal val="#ppt_x"/>
+                                          </p:val>
+                                        </p:tav>
+                                        <p:tav tm="100000">
+                                          <p:val>
+                                            <p:strVal val="#ppt_x"/>
+                                          </p:val>
+                                        </p:tav>
+                                      </p:tavLst>
+                                    </p:anim>
+                                    <p:anim calcmode="lin" valueType="num">
+                                      <p:cBhvr additive="base">
+                                        <p:cTn id="21" dur="500" fill="hold"/>
+                                        <p:tgtEl>
+                                          <p:spTgt spid="4">
+                                            <p:txEl>
+                                              <p:pRg st="1" end="1"/>
+                                            </p:txEl>
+                                          </p:spTgt>
+                                        </p:tgtEl>
+                                        <p:attrNameLst>
+                                          <p:attrName>ppt_y</p:attrName>
+                                        </p:attrNameLst>
+                                      </p:cBhvr>
+                                      <p:tavLst>
+                                        <p:tav tm="0">
+                                          <p:val>
+                                            <p:strVal val="1+#ppt_h/2"/>
+                                          </p:val>
+                                        </p:tav>
+                                        <p:tav tm="100000">
+                                          <p:val>
+                                            <p:strVal val="#ppt_y"/>
+                                          </p:val>
+                                        </p:tav>
+                                      </p:tavLst>
+                                    </p:anim>
+                                  </p:childTnLst>
+                                </p:cTn>
+                              </p:par>
+                            </p:childTnLst>
+                          </p:cTn>
+                        </p:par>
+                      </p:childTnLst>
+                    </p:cTn>
+                  </p:par>
+                  <p:par>
+                    <p:cTn id="22" fill="hold">
+                      <p:stCondLst>
+                        <p:cond delay="indefinite"/>
+                      </p:stCondLst>
+                      <p:childTnLst>
+                        <p:par>
+                          <p:cTn id="23" fill="hold">
+                            <p:stCondLst>
+                              <p:cond delay="0"/>
+                            </p:stCondLst>
+                            <p:childTnLst>
+                              <p:par>
+                                <p:cTn id="24" presetID="2" presetClass="entr" presetSubtype="4" fill="hold" grpId="0" nodeType="clickEffect">
+                                  <p:stCondLst>
+                                    <p:cond delay="0"/>
+                                  </p:stCondLst>
+                                  <p:childTnLst>
+                                    <p:set>
+                                      <p:cBhvr>
+                                        <p:cTn id="25" dur="1" fill="hold">
+                                          <p:stCondLst>
+                                            <p:cond delay="0"/>
+                                          </p:stCondLst>
+                                        </p:cTn>
+                                        <p:tgtEl>
+                                          <p:spTgt spid="4">
+                                            <p:txEl>
+                                              <p:pRg st="2" end="2"/>
+                                            </p:txEl>
+                                          </p:spTgt>
+                                        </p:tgtEl>
+                                        <p:attrNameLst>
+                                          <p:attrName>style.visibility</p:attrName>
+                                        </p:attrNameLst>
+                                      </p:cBhvr>
+                                      <p:to>
+                                        <p:strVal val="visible"/>
+                                      </p:to>
+                                    </p:set>
+                                    <p:anim calcmode="lin" valueType="num">
+                                      <p:cBhvr additive="base">
+                                        <p:cTn id="26" dur="500" fill="hold"/>
+                                        <p:tgtEl>
+                                          <p:spTgt spid="4">
+                                            <p:txEl>
+                                              <p:pRg st="2" end="2"/>
+                                            </p:txEl>
+                                          </p:spTgt>
+                                        </p:tgtEl>
+                                        <p:attrNameLst>
+                                          <p:attrName>ppt_x</p:attrName>
+                                        </p:attrNameLst>
+                                      </p:cBhvr>
+                                      <p:tavLst>
+                                        <p:tav tm="0">
+                                          <p:val>
+                                            <p:strVal val="#ppt_x"/>
+                                          </p:val>
+                                        </p:tav>
+                                        <p:tav tm="100000">
+                                          <p:val>
+                                            <p:strVal val="#ppt_x"/>
+                                          </p:val>
+                                        </p:tav>
+                                      </p:tavLst>
+                                    </p:anim>
+                                    <p:anim calcmode="lin" valueType="num">
+                                      <p:cBhvr additive="base">
+                                        <p:cTn id="27" dur="500" fill="hold"/>
+                                        <p:tgtEl>
+                                          <p:spTgt spid="4">
+                                            <p:txEl>
+                                              <p:pRg st="2" end="2"/>
+                                            </p:txEl>
+                                          </p:spTgt>
+                                        </p:tgtEl>
+                                        <p:attrNameLst>
+                                          <p:attrName>ppt_y</p:attrName>
+                                        </p:attrNameLst>
+                                      </p:cBhvr>
+                                      <p:tavLst>
+                                        <p:tav tm="0">
+                                          <p:val>
+                                            <p:strVal val="1+#ppt_h/2"/>
+                                          </p:val>
+                                        </p:tav>
+                                        <p:tav tm="100000">
+                                          <p:val>
+                                            <p:strVal val="#ppt_y"/>
+                                          </p:val>
+                                        </p:tav>
+                                      </p:tavLst>
+                                    </p:anim>
+                                  </p:childTnLst>
+                                </p:cTn>
+                              </p:par>
+                            </p:childTnLst>
+                          </p:cTn>
+                        </p:par>
+                      </p:childTnLst>
+                    </p:cTn>
+                  </p:par>
+                </p:childTnLst>
+              </p:cTn>
+              <p:prevCondLst>
+                <p:cond evt="onPrev" delay="0">
+                  <p:tgtEl>
+                    <p:sldTgt/>
+                  </p:tgtEl>
+                </p:cond>
+              </p:prevCondLst>
+              <p:nextCondLst>
+                <p:cond evt="onNext" delay="0">
+                  <p:tgtEl>
+                    <p:sldTgt/>
+                  </p:tgtEl>
+                </p:cond>
+              </p:nextCondLst>
+            </p:seq>
+          </p:childTnLst>
+        </p:cTn>
+      </p:par>
+    </p:tnLst>
+    <p:bldLst>
+      <p:bldP spid="2" grpId="0"/>
+      <p:bldP spid="4" grpId="0" build="p"/>
+    </p:bldLst>
+  </p:timing>
+</p:sld>
+</file>
+
+<file path=ppt/slides/slide5.xml><?xml version="1.0" encoding="utf-8"?>
+<p:sld xmlns:a="http://schemas.openxmlformats.org/drawingml/2006/main" xmlns:r="http://schemas.openxmlformats.org/officeDocument/2006/relationships" xmlns:p="http://schemas.openxmlformats.org/presentationml/2006/main">
+  <p:cSld>
+    <p:spTree>
+      <p:nvGrpSpPr>
+        <p:cNvPr id="1" name=""/>
+        <p:cNvGrpSpPr/>
+        <p:nvPr/>
+      </p:nvGrpSpPr>
+      <p:grpSpPr>
+        <a:xfrm>
+          <a:off x="0" y="0"/>
+          <a:ext cx="0" cy="0"/>
+          <a:chOff x="0" y="0"/>
+          <a:chExt cx="0" cy="0"/>
+        </a:xfrm>
+      </p:grpSpPr>
+      <p:sp>
+        <p:nvSpPr>
+          <p:cNvPr id="2" name="Title 1"/>
+          <p:cNvSpPr>
+            <a:spLocks noGrp="1"/>
+          </p:cNvSpPr>
+          <p:nvPr>
+            <p:ph type="title"/>
           </p:nvPr>
         </p:nvSpPr>
         <p:spPr/>
@@ -3529,31 +9860,44 @@
           <a:lstStyle/>
           <a:p>
             <a:r>
-              <a:t>Earn from home</a:t>
+              <a:rPr dirty="0"/>
+              <a:t>What is Web Designing?</a:t>
+            </a:r>
+          </a:p>
+        </p:txBody>
+      </p:sp>
+      <p:sp>
+        <p:nvSpPr>
+          <p:cNvPr id="3" name="Content Placeholder 2"/>
+          <p:cNvSpPr>
+            <a:spLocks noGrp="1"/>
+          </p:cNvSpPr>
+          <p:nvPr>
+            <p:ph idx="1"/>
+          </p:nvPr>
+        </p:nvSpPr>
+        <p:spPr/>
+        <p:txBody>
+          <a:bodyPr/>
+          <a:lstStyle/>
+          <a:p>
+            <a:r>
+              <a:rPr dirty="0"/>
+              <a:t>Art of creating the visual layout of websites</a:t>
             </a:r>
           </a:p>
           <a:p>
             <a:pPr lvl="1"/>
             <a:r>
-              <a:t>Work for global companies from Pakistan</a:t>
+              <a:rPr dirty="0"/>
+              <a:t>Focus: UI/UX, colors, typography, layout, responsiveness</a:t>
             </a:r>
           </a:p>
           <a:p>
             <a:pPr lvl="1"/>
             <a:r>
-              <a:t>Earn in dollars via freelancing</a:t>
-            </a:r>
-          </a:p>
-          <a:p>
-            <a:pPr lvl="1"/>
-            <a:r>
-              <a:t>Start your own digital business</a:t>
-            </a:r>
-          </a:p>
-          <a:p>
-            <a:pPr lvl="1"/>
-            <a:r>
-              <a:t>Become a respected skilled professional</a:t>
+              <a:rPr dirty="0"/>
+              <a:t>Tools: HTML (Structure), CSS (Styling), JS (Interactivity)</a:t>
             </a:r>
           </a:p>
         </p:txBody>
@@ -3567,7 +9911,7 @@
 </file>
 
 <file path=ppt/slides/slide6.xml><?xml version="1.0" encoding="utf-8"?>
-<p:sld xmlns:a="http://schemas.openxmlformats.org/drawingml/2006/main" xmlns:p="http://schemas.openxmlformats.org/presentationml/2006/main" xmlns:r="http://schemas.openxmlformats.org/officeDocument/2006/relationships">
+<p:sld xmlns:a="http://schemas.openxmlformats.org/drawingml/2006/main" xmlns:r="http://schemas.openxmlformats.org/officeDocument/2006/relationships" xmlns:p="http://schemas.openxmlformats.org/presentationml/2006/main">
   <p:cSld>
     <p:spTree>
       <p:nvGrpSpPr>
@@ -3575,7 +9919,14 @@
         <p:cNvGrpSpPr/>
         <p:nvPr/>
       </p:nvGrpSpPr>
-      <p:grpSpPr/>
+      <p:grpSpPr>
+        <a:xfrm>
+          <a:off x="0" y="0"/>
+          <a:ext cx="0" cy="0"/>
+          <a:chOff x="0" y="0"/>
+          <a:chExt cx="0" cy="0"/>
+        </a:xfrm>
+      </p:grpSpPr>
       <p:sp>
         <p:nvSpPr>
           <p:cNvPr id="2" name="Title 1"/>
@@ -3592,8 +9943,18 @@
           <a:lstStyle/>
           <a:p>
             <a:r>
-              <a:t>What You Will Learn – Month 1 (Web Designing)</a:t>
-            </a:r>
+              <a:rPr sz="3600" dirty="0"/>
+              <a:t>What is Web </a:t>
+            </a:r>
+            <a:r>
+              <a:rPr sz="3600" dirty="0" smtClean="0"/>
+              <a:t>Development</a:t>
+            </a:r>
+            <a:r>
+              <a:rPr lang="en-US" sz="3600" dirty="0" smtClean="0"/>
+              <a:t> !</a:t>
+            </a:r>
+            <a:endParaRPr sz="3600" dirty="0"/>
           </a:p>
         </p:txBody>
       </p:sp>
@@ -3613,31 +9974,29 @@
           <a:lstStyle/>
           <a:p>
             <a:r>
-              <a:t>HTML – Structure</a:t>
+              <a:rPr dirty="0"/>
+              <a:t>Engineering behind websites</a:t>
             </a:r>
           </a:p>
           <a:p>
             <a:pPr lvl="1"/>
             <a:r>
-              <a:t>CSS – Styling</a:t>
+              <a:rPr dirty="0"/>
+              <a:t>Focus: Logic, functionality, databases, servers</a:t>
             </a:r>
           </a:p>
           <a:p>
             <a:pPr lvl="1"/>
             <a:r>
-              <a:t>Basic JavaScript – Interactivity</a:t>
+              <a:rPr dirty="0"/>
+              <a:t>Frontend + Backend = Complete Development</a:t>
             </a:r>
           </a:p>
           <a:p>
             <a:pPr lvl="1"/>
             <a:r>
-              <a:t>Responsive layouts</a:t>
-            </a:r>
-          </a:p>
-          <a:p>
-            <a:pPr lvl="1"/>
-            <a:r>
-              <a:t>Professional website building</a:t>
+              <a:rPr dirty="0"/>
+              <a:t>Makes websites work</a:t>
             </a:r>
           </a:p>
         </p:txBody>
@@ -3651,7 +10010,7 @@
 </file>
 
 <file path=ppt/slides/slide7.xml><?xml version="1.0" encoding="utf-8"?>
-<p:sld xmlns:a="http://schemas.openxmlformats.org/drawingml/2006/main" xmlns:p="http://schemas.openxmlformats.org/presentationml/2006/main" xmlns:r="http://schemas.openxmlformats.org/officeDocument/2006/relationships">
+<p:sld xmlns:a="http://schemas.openxmlformats.org/drawingml/2006/main" xmlns:r="http://schemas.openxmlformats.org/officeDocument/2006/relationships" xmlns:p="http://schemas.openxmlformats.org/presentationml/2006/main">
   <p:cSld>
     <p:spTree>
       <p:nvGrpSpPr>
@@ -3659,7 +10018,14 @@
         <p:cNvGrpSpPr/>
         <p:nvPr/>
       </p:nvGrpSpPr>
-      <p:grpSpPr/>
+      <p:grpSpPr>
+        <a:xfrm>
+          <a:off x="0" y="0"/>
+          <a:ext cx="0" cy="0"/>
+          <a:chOff x="0" y="0"/>
+          <a:chExt cx="0" cy="0"/>
+        </a:xfrm>
+      </p:grpSpPr>
       <p:sp>
         <p:nvSpPr>
           <p:cNvPr id="2" name="Title 1"/>
@@ -3676,8 +10042,18 @@
           <a:lstStyle/>
           <a:p>
             <a:r>
-              <a:t>What You Will Learn – Month 2 &amp; 3 (Web Development)</a:t>
-            </a:r>
+              <a:rPr dirty="0"/>
+              <a:t>Why </a:t>
+            </a:r>
+            <a:r>
+              <a:rPr dirty="0" smtClean="0"/>
+              <a:t>Learn Web</a:t>
+            </a:r>
+            <a:r>
+              <a:rPr lang="en-US" dirty="0" smtClean="0"/>
+              <a:t> !</a:t>
+            </a:r>
+            <a:endParaRPr dirty="0"/>
           </a:p>
         </p:txBody>
       </p:sp>
@@ -3697,37 +10073,36 @@
           <a:lstStyle/>
           <a:p>
             <a:r>
-              <a:t>Advanced JavaScript</a:t>
+              <a:rPr dirty="0"/>
+              <a:t>Everything is online: business, education, banking, shopping</a:t>
             </a:r>
           </a:p>
           <a:p>
             <a:pPr lvl="1"/>
             <a:r>
-              <a:t>DOM &amp; Events</a:t>
+              <a:rPr dirty="0"/>
+              <a:t>High demand for skilled developers</a:t>
             </a:r>
           </a:p>
           <a:p>
             <a:pPr lvl="1"/>
             <a:r>
-              <a:t>APIs</a:t>
+              <a:rPr dirty="0"/>
+              <a:t>Unlimited job opportunities</a:t>
             </a:r>
           </a:p>
           <a:p>
             <a:pPr lvl="1"/>
             <a:r>
-              <a:t>Real Projects</a:t>
+              <a:rPr dirty="0"/>
+              <a:t>Freelancing &amp; remote earning</a:t>
             </a:r>
           </a:p>
           <a:p>
             <a:pPr lvl="1"/>
             <a:r>
-              <a:t>Hosting &amp; Deployment</a:t>
-            </a:r>
-          </a:p>
-          <a:p>
-            <a:pPr lvl="1"/>
-            <a:r>
-              <a:t>Introduction to frameworks</a:t>
+              <a:rPr dirty="0"/>
+              <a:t>Chance to build your own agency</a:t>
             </a:r>
           </a:p>
         </p:txBody>
@@ -3741,7 +10116,7 @@
 </file>
 
 <file path=ppt/slides/slide8.xml><?xml version="1.0" encoding="utf-8"?>
-<p:sld xmlns:a="http://schemas.openxmlformats.org/drawingml/2006/main" xmlns:p="http://schemas.openxmlformats.org/presentationml/2006/main" xmlns:r="http://schemas.openxmlformats.org/officeDocument/2006/relationships">
+<p:sld xmlns:a="http://schemas.openxmlformats.org/drawingml/2006/main" xmlns:r="http://schemas.openxmlformats.org/officeDocument/2006/relationships" xmlns:p="http://schemas.openxmlformats.org/presentationml/2006/main">
   <p:cSld>
     <p:spTree>
       <p:nvGrpSpPr>
@@ -3749,7 +10124,14 @@
         <p:cNvGrpSpPr/>
         <p:nvPr/>
       </p:nvGrpSpPr>
-      <p:grpSpPr/>
+      <p:grpSpPr>
+        <a:xfrm>
+          <a:off x="0" y="0"/>
+          <a:ext cx="0" cy="0"/>
+          <a:chOff x="0" y="0"/>
+          <a:chExt cx="0" cy="0"/>
+        </a:xfrm>
+      </p:grpSpPr>
       <p:sp>
         <p:nvSpPr>
           <p:cNvPr id="2" name="Title 1"/>
@@ -3766,8 +10148,10 @@
           <a:lstStyle/>
           <a:p>
             <a:r>
-              <a:t>What I Expect from Students</a:t>
-            </a:r>
+              <a:rPr lang="en-US" dirty="0" smtClean="0"/>
+              <a:t>Opportunities</a:t>
+            </a:r>
+            <a:endParaRPr dirty="0"/>
           </a:p>
         </p:txBody>
       </p:sp>
@@ -3783,41 +10167,43 @@
         </p:nvSpPr>
         <p:spPr/>
         <p:txBody>
-          <a:bodyPr/>
+          <a:bodyPr>
+            <a:normAutofit/>
+          </a:bodyPr>
           <a:lstStyle/>
           <a:p>
-            <a:r>
-              <a:t>Attend all classes</a:t>
-            </a:r>
-          </a:p>
-          <a:p>
             <a:pPr lvl="1"/>
             <a:r>
-              <a:t>Practice daily</a:t>
+              <a:rPr sz="2400" dirty="0"/>
+              <a:t>Earn from home</a:t>
             </a:r>
           </a:p>
           <a:p>
             <a:pPr lvl="1"/>
             <a:r>
-              <a:t>Ask questions</a:t>
+              <a:rPr sz="2400" dirty="0"/>
+              <a:t>Work for global companies from Pakistan</a:t>
             </a:r>
           </a:p>
           <a:p>
             <a:pPr lvl="1"/>
             <a:r>
-              <a:t>Don’t fear mistakes</a:t>
+              <a:rPr sz="2400" dirty="0"/>
+              <a:t>Earn in dollars via freelancing</a:t>
             </a:r>
           </a:p>
           <a:p>
             <a:pPr lvl="1"/>
             <a:r>
-              <a:t>Stay consistent</a:t>
+              <a:rPr sz="2400" dirty="0"/>
+              <a:t>Start your own digital business</a:t>
             </a:r>
           </a:p>
           <a:p>
             <a:pPr lvl="1"/>
             <a:r>
-              <a:t>Keep trying</a:t>
+              <a:rPr sz="2400" dirty="0"/>
+              <a:t>Become a respected skilled professional</a:t>
             </a:r>
           </a:p>
         </p:txBody>
@@ -3831,7 +10217,7 @@
 </file>
 
 <file path=ppt/slides/slide9.xml><?xml version="1.0" encoding="utf-8"?>
-<p:sld xmlns:a="http://schemas.openxmlformats.org/drawingml/2006/main" xmlns:p="http://schemas.openxmlformats.org/presentationml/2006/main" xmlns:r="http://schemas.openxmlformats.org/officeDocument/2006/relationships">
+<p:sld xmlns:a="http://schemas.openxmlformats.org/drawingml/2006/main" xmlns:r="http://schemas.openxmlformats.org/officeDocument/2006/relationships" xmlns:p="http://schemas.openxmlformats.org/presentationml/2006/main">
   <p:cSld>
     <p:spTree>
       <p:nvGrpSpPr>
@@ -3839,7 +10225,14 @@
         <p:cNvGrpSpPr/>
         <p:nvPr/>
       </p:nvGrpSpPr>
-      <p:grpSpPr/>
+      <p:grpSpPr>
+        <a:xfrm>
+          <a:off x="0" y="0"/>
+          <a:ext cx="0" cy="0"/>
+          <a:chOff x="0" y="0"/>
+          <a:chExt cx="0" cy="0"/>
+        </a:xfrm>
+      </p:grpSpPr>
       <p:sp>
         <p:nvSpPr>
           <p:cNvPr id="2" name="Title 1"/>
@@ -3852,11 +10245,14 @@
         </p:nvSpPr>
         <p:spPr/>
         <p:txBody>
-          <a:bodyPr/>
+          <a:bodyPr>
+            <a:normAutofit/>
+          </a:bodyPr>
           <a:lstStyle/>
           <a:p>
             <a:r>
-              <a:t>Motivation for Students</a:t>
+              <a:rPr dirty="0"/>
+              <a:t>What You Will Learn – Month 1 (Web Designing)</a:t>
             </a:r>
           </a:p>
         </p:txBody>
@@ -3873,23 +10269,43 @@
         </p:nvSpPr>
         <p:spPr/>
         <p:txBody>
-          <a:bodyPr/>
+          <a:bodyPr>
+            <a:normAutofit/>
+          </a:bodyPr>
           <a:lstStyle/>
           <a:p>
-            <a:r>
-              <a:t>Every developer started as a beginner</a:t>
-            </a:r>
-          </a:p>
-          <a:p>
             <a:pPr lvl="1"/>
             <a:r>
-              <a:t>90 days of consistency = lifetime skill</a:t>
+              <a:rPr sz="2400" dirty="0"/>
+              <a:t>HTML – Structure</a:t>
             </a:r>
           </a:p>
           <a:p>
             <a:pPr lvl="1"/>
             <a:r>
-              <a:t>Your future depends on the effort you put today</a:t>
+              <a:rPr sz="2400" dirty="0"/>
+              <a:t>CSS – Styling</a:t>
+            </a:r>
+          </a:p>
+          <a:p>
+            <a:pPr lvl="1"/>
+            <a:r>
+              <a:rPr sz="2400" dirty="0"/>
+              <a:t>Basic JavaScript – Interactivity</a:t>
+            </a:r>
+          </a:p>
+          <a:p>
+            <a:pPr lvl="1"/>
+            <a:r>
+              <a:rPr sz="2400" dirty="0"/>
+              <a:t>Responsive layouts</a:t>
+            </a:r>
+          </a:p>
+          <a:p>
+            <a:pPr lvl="1"/>
+            <a:r>
+              <a:rPr sz="2400" dirty="0"/>
+              <a:t>Professional website building</a:t>
             </a:r>
           </a:p>
         </p:txBody>
@@ -3903,9 +10319,9 @@
 </file>
 
 <file path=ppt/theme/theme1.xml><?xml version="1.0" encoding="utf-8"?>
-<a:theme xmlns:a="http://schemas.openxmlformats.org/drawingml/2006/main" name="Office Theme">
+<a:theme xmlns:a="http://schemas.openxmlformats.org/drawingml/2006/main" name="Ion">
   <a:themeElements>
-    <a:clrScheme name="Office">
+    <a:clrScheme name="Violet">
       <a:dk1>
         <a:sysClr val="windowText" lastClr="000000"/>
       </a:dk1>
@@ -3913,42 +10329,42 @@
         <a:sysClr val="window" lastClr="FFFFFF"/>
       </a:lt1>
       <a:dk2>
-        <a:srgbClr val="1F497D"/>
+        <a:srgbClr val="373545"/>
       </a:dk2>
       <a:lt2>
-        <a:srgbClr val="EEECE1"/>
+        <a:srgbClr val="DCD8DC"/>
       </a:lt2>
       <a:accent1>
-        <a:srgbClr val="4F81BD"/>
+        <a:srgbClr val="AD84C6"/>
       </a:accent1>
       <a:accent2>
-        <a:srgbClr val="C0504D"/>
+        <a:srgbClr val="8784C7"/>
       </a:accent2>
       <a:accent3>
-        <a:srgbClr val="9BBB59"/>
+        <a:srgbClr val="5D739A"/>
       </a:accent3>
       <a:accent4>
-        <a:srgbClr val="8064A2"/>
+        <a:srgbClr val="6997AF"/>
       </a:accent4>
       <a:accent5>
-        <a:srgbClr val="4BACC6"/>
+        <a:srgbClr val="84ACB6"/>
       </a:accent5>
       <a:accent6>
-        <a:srgbClr val="F79646"/>
+        <a:srgbClr val="6F8183"/>
       </a:accent6>
       <a:hlink>
-        <a:srgbClr val="0000FF"/>
+        <a:srgbClr val="69A020"/>
       </a:hlink>
       <a:folHlink>
-        <a:srgbClr val="800080"/>
+        <a:srgbClr val="8C8C8C"/>
       </a:folHlink>
     </a:clrScheme>
-    <a:fontScheme name="Office">
+    <a:fontScheme name="Ion">
       <a:majorFont>
-        <a:latin typeface="Calibri"/>
+        <a:latin typeface="Century Gothic" panose="020B0502020202020204"/>
         <a:ea typeface=""/>
         <a:cs typeface=""/>
-        <a:font script="Jpan" typeface="ＭＳ Ｐゴシック"/>
+        <a:font script="Jpan" typeface="メイリオ"/>
         <a:font script="Hang" typeface="맑은 고딕"/>
         <a:font script="Hans" typeface="宋体"/>
         <a:font script="Hant" typeface="新細明體"/>
@@ -3980,10 +10396,10 @@
         <a:font script="Geor" typeface="Sylfaen"/>
       </a:majorFont>
       <a:minorFont>
-        <a:latin typeface="Calibri"/>
+        <a:latin typeface="Century Gothic" panose="020B0502020202020204"/>
         <a:ea typeface=""/>
         <a:cs typeface=""/>
-        <a:font script="Jpan" typeface="ＭＳ Ｐゴシック"/>
+        <a:font script="Jpan" typeface="メイリオ"/>
         <a:font script="Hang" typeface="맑은 고딕"/>
         <a:font script="Hans" typeface="宋体"/>
         <a:font script="Hant" typeface="新細明體"/>
@@ -4015,7 +10431,7 @@
         <a:font script="Geor" typeface="Sylfaen"/>
       </a:minorFont>
     </a:fontScheme>
-    <a:fmtScheme name="Office">
+    <a:fmtScheme name="Ion">
       <a:fillStyleLst>
         <a:solidFill>
           <a:schemeClr val="phClr"/>
@@ -4024,62 +10440,52 @@
           <a:gsLst>
             <a:gs pos="0">
               <a:schemeClr val="phClr">
-                <a:tint val="50000"/>
-                <a:satMod val="300000"/>
-              </a:schemeClr>
-            </a:gs>
-            <a:gs pos="35000">
-              <a:schemeClr val="phClr">
-                <a:tint val="37000"/>
-                <a:satMod val="300000"/>
+                <a:tint val="64000"/>
+                <a:lumMod val="118000"/>
               </a:schemeClr>
             </a:gs>
             <a:gs pos="100000">
               <a:schemeClr val="phClr">
-                <a:tint val="15000"/>
-                <a:satMod val="350000"/>
+                <a:tint val="92000"/>
+                <a:alpha val="100000"/>
+                <a:lumMod val="110000"/>
               </a:schemeClr>
             </a:gs>
           </a:gsLst>
-          <a:lin ang="16200000" scaled="1"/>
+          <a:lin ang="5400000" scaled="0"/>
         </a:gradFill>
         <a:gradFill rotWithShape="1">
           <a:gsLst>
             <a:gs pos="0">
               <a:schemeClr val="phClr">
-                <a:tint val="100000"/>
-                <a:shade val="100000"/>
-                <a:satMod val="130000"/>
+                <a:tint val="98000"/>
+                <a:lumMod val="114000"/>
               </a:schemeClr>
             </a:gs>
             <a:gs pos="100000">
               <a:schemeClr val="phClr">
-                <a:tint val="50000"/>
-                <a:shade val="100000"/>
-                <a:satMod val="350000"/>
+                <a:shade val="90000"/>
+                <a:lumMod val="84000"/>
               </a:schemeClr>
             </a:gs>
           </a:gsLst>
-          <a:lin ang="16200000" scaled="0"/>
+          <a:lin ang="5400000" scaled="0"/>
         </a:gradFill>
       </a:fillStyleLst>
       <a:lnStyleLst>
-        <a:ln w="9525" cap="flat" cmpd="sng" algn="ctr">
-          <a:solidFill>
-            <a:schemeClr val="phClr">
-              <a:shade val="95000"/>
-              <a:satMod val="105000"/>
-            </a:schemeClr>
-          </a:solidFill>
-          <a:prstDash val="solid"/>
-        </a:ln>
-        <a:ln w="25400" cap="flat" cmpd="sng" algn="ctr">
+        <a:ln w="9525" cap="rnd" cmpd="sng" algn="ctr">
           <a:solidFill>
             <a:schemeClr val="phClr"/>
           </a:solidFill>
           <a:prstDash val="solid"/>
         </a:ln>
-        <a:ln w="38100" cap="flat" cmpd="sng" algn="ctr">
+        <a:ln w="19050" cap="rnd" cmpd="sng" algn="ctr">
+          <a:solidFill>
+            <a:schemeClr val="phClr"/>
+          </a:solidFill>
+          <a:prstDash val="solid"/>
+        </a:ln>
+        <a:ln w="28575" cap="rnd" cmpd="sng" algn="ctr">
           <a:solidFill>
             <a:schemeClr val="phClr"/>
           </a:solidFill>
@@ -4088,28 +10494,22 @@
       </a:lnStyleLst>
       <a:effectStyleLst>
         <a:effectStyle>
+          <a:effectLst/>
+        </a:effectStyle>
+        <a:effectStyle>
           <a:effectLst>
-            <a:outerShdw blurRad="40000" dist="20000" dir="5400000" rotWithShape="0">
+            <a:outerShdw blurRad="38100" dist="25400" dir="5400000" rotWithShape="0">
               <a:srgbClr val="000000">
-                <a:alpha val="38000"/>
+                <a:alpha val="45000"/>
               </a:srgbClr>
             </a:outerShdw>
           </a:effectLst>
         </a:effectStyle>
         <a:effectStyle>
           <a:effectLst>
-            <a:outerShdw blurRad="40000" dist="23000" dir="5400000" rotWithShape="0">
+            <a:outerShdw blurRad="63500" dist="38100" dir="5400000" rotWithShape="0">
               <a:srgbClr val="000000">
-                <a:alpha val="35000"/>
-              </a:srgbClr>
-            </a:outerShdw>
-          </a:effectLst>
-        </a:effectStyle>
-        <a:effectStyle>
-          <a:effectLst>
-            <a:outerShdw blurRad="40000" dist="23000" dir="5400000" rotWithShape="0">
-              <a:srgbClr val="000000">
-                <a:alpha val="35000"/>
+                <a:alpha val="60000"/>
               </a:srgbClr>
             </a:outerShdw>
           </a:effectLst>
@@ -4117,12 +10517,10 @@
             <a:camera prst="orthographicFront">
               <a:rot lat="0" lon="0" rev="0"/>
             </a:camera>
-            <a:lightRig rig="threePt" dir="t">
-              <a:rot lat="0" lon="0" rev="1200000"/>
-            </a:lightRig>
+            <a:lightRig rig="threePt" dir="tl"/>
           </a:scene3d>
-          <a:sp3d>
-            <a:bevelT w="63500" h="25400"/>
+          <a:sp3d prstMaterial="plastic">
+            <a:bevelT w="0" h="0"/>
           </a:sp3d>
         </a:effectStyle>
       </a:effectStyleLst>
@@ -4134,90 +10532,54 @@
           <a:gsLst>
             <a:gs pos="0">
               <a:schemeClr val="phClr">
-                <a:tint val="40000"/>
-                <a:satMod val="350000"/>
-              </a:schemeClr>
-            </a:gs>
-            <a:gs pos="40000">
-              <a:schemeClr val="phClr">
-                <a:tint val="45000"/>
-                <a:shade val="99000"/>
-                <a:satMod val="350000"/>
+                <a:tint val="97000"/>
+                <a:hueMod val="88000"/>
+                <a:satMod val="130000"/>
+                <a:lumMod val="124000"/>
               </a:schemeClr>
             </a:gs>
             <a:gs pos="100000">
               <a:schemeClr val="phClr">
-                <a:shade val="20000"/>
-                <a:satMod val="255000"/>
+                <a:tint val="96000"/>
+                <a:shade val="88000"/>
+                <a:hueMod val="108000"/>
+                <a:satMod val="164000"/>
+                <a:lumMod val="76000"/>
               </a:schemeClr>
             </a:gs>
           </a:gsLst>
           <a:path path="circle">
-            <a:fillToRect l="50000" t="-80000" r="50000" b="180000"/>
+            <a:fillToRect l="45000" t="65000" r="125000" b="100000"/>
           </a:path>
         </a:gradFill>
-        <a:gradFill rotWithShape="1">
-          <a:gsLst>
-            <a:gs pos="0">
+        <a:blipFill rotWithShape="1">
+          <a:blip xmlns:r="http://schemas.openxmlformats.org/officeDocument/2006/relationships" r:embed="rId1">
+            <a:duotone>
               <a:schemeClr val="phClr">
-                <a:tint val="80000"/>
-                <a:satMod val="300000"/>
+                <a:shade val="69000"/>
+                <a:hueMod val="108000"/>
+                <a:satMod val="164000"/>
+                <a:lumMod val="74000"/>
               </a:schemeClr>
-            </a:gs>
-            <a:gs pos="100000">
               <a:schemeClr val="phClr">
-                <a:shade val="30000"/>
-                <a:satMod val="200000"/>
+                <a:tint val="96000"/>
+                <a:hueMod val="88000"/>
+                <a:satMod val="140000"/>
+                <a:lumMod val="132000"/>
               </a:schemeClr>
-            </a:gs>
-          </a:gsLst>
-          <a:path path="circle">
-            <a:fillToRect l="50000" t="50000" r="50000" b="50000"/>
-          </a:path>
-        </a:gradFill>
+            </a:duotone>
+          </a:blip>
+          <a:stretch/>
+        </a:blipFill>
       </a:bgFillStyleLst>
     </a:fmtScheme>
   </a:themeElements>
-  <a:objectDefaults>
-    <a:spDef>
-      <a:spPr/>
-      <a:bodyPr/>
-      <a:lstStyle/>
-      <a:style>
-        <a:lnRef idx="1">
-          <a:schemeClr val="accent1"/>
-        </a:lnRef>
-        <a:fillRef idx="3">
-          <a:schemeClr val="accent1"/>
-        </a:fillRef>
-        <a:effectRef idx="2">
-          <a:schemeClr val="accent1"/>
-        </a:effectRef>
-        <a:fontRef idx="minor">
-          <a:schemeClr val="lt1"/>
-        </a:fontRef>
-      </a:style>
-    </a:spDef>
-    <a:lnDef>
-      <a:spPr/>
-      <a:bodyPr/>
-      <a:lstStyle/>
-      <a:style>
-        <a:lnRef idx="2">
-          <a:schemeClr val="accent1"/>
-        </a:lnRef>
-        <a:fillRef idx="0">
-          <a:schemeClr val="accent1"/>
-        </a:fillRef>
-        <a:effectRef idx="1">
-          <a:schemeClr val="accent1"/>
-        </a:effectRef>
-        <a:fontRef idx="minor">
-          <a:schemeClr val="tx1"/>
-        </a:fontRef>
-      </a:style>
-    </a:lnDef>
-  </a:objectDefaults>
+  <a:objectDefaults/>
   <a:extraClrSchemeLst/>
+  <a:extLst>
+    <a:ext uri="{05A4C25C-085E-4340-85A3-A5531E510DB2}">
+      <thm15:themeFamily xmlns:thm15="http://schemas.microsoft.com/office/thememl/2012/main" name="Ion" id="{B8441ADB-2E43-4AF7-B97A-BD870242C6A8}" vid="{292E63A9-BB86-4E3D-B92A-7223C6510D2E}"/>
+    </a:ext>
+  </a:extLst>
 </a:theme>
 </file>